--- a/docs/customer/ProjexCloud_Why_We_Are_Different_Pitch.pptx
+++ b/docs/customer/ProjexCloud_Why_We_Are_Different_Pitch.pptx
@@ -5,18 +5,18 @@
     <p:sldMasterId id="2147483648" r:id="rId1"/>
   </p:sldMasterIdLst>
   <p:sldIdLst>
-    <p:sldId id="256" r:id="rId7"/>
-    <p:sldId id="257" r:id="rId8"/>
-    <p:sldId id="258" r:id="rId9"/>
-    <p:sldId id="259" r:id="rId10"/>
-    <p:sldId id="260" r:id="rId11"/>
-    <p:sldId id="261" r:id="rId12"/>
-    <p:sldId id="262" r:id="rId13"/>
-    <p:sldId id="263" r:id="rId14"/>
-    <p:sldId id="264" r:id="rId15"/>
-    <p:sldId id="265" r:id="rId16"/>
+    <p:sldId id="256" r:id="rId2"/>
+    <p:sldId id="257" r:id="rId3"/>
+    <p:sldId id="258" r:id="rId4"/>
+    <p:sldId id="259" r:id="rId5"/>
+    <p:sldId id="260" r:id="rId6"/>
+    <p:sldId id="261" r:id="rId7"/>
+    <p:sldId id="262" r:id="rId8"/>
+    <p:sldId id="263" r:id="rId9"/>
+    <p:sldId id="264" r:id="rId10"/>
+    <p:sldId id="265" r:id="rId11"/>
   </p:sldIdLst>
-  <p:sldSz cx="12191695" cy="6858000" type="screen4x3"/>
+  <p:sldSz cx="12192000" cy="6858000"/>
   <p:notesSz cx="6858000" cy="9144000"/>
   <p:defaultTextStyle>
     <a:defPPr>
@@ -113,6 +113,22 @@
       </a:defRPr>
     </a:lvl9pPr>
   </p:defaultTextStyle>
+  <p:extLst>
+    <p:ext uri="{EFAFB233-063F-42B5-8137-9DF3F51BA10A}">
+      <p15:sldGuideLst xmlns:p15="http://schemas.microsoft.com/office/powerpoint/2012/main">
+        <p15:guide id="1" orient="horz" pos="2160">
+          <p15:clr>
+            <a:srgbClr val="A4A3A4"/>
+          </p15:clr>
+        </p15:guide>
+        <p15:guide id="2" pos="2880">
+          <p15:clr>
+            <a:srgbClr val="A4A3A4"/>
+          </p15:clr>
+        </p15:guide>
+      </p15:sldGuideLst>
+    </p:ext>
+  </p:extLst>
 </p:presentation>
 </file>
 
@@ -154,10 +170,9 @@
           <a:lstStyle/>
           <a:p>
             <a:r>
-              <a:rPr lang="en-US" smtClean="0"/>
+              <a:rPr lang="en-US"/>
               <a:t>Click to edit Master title style</a:t>
             </a:r>
-            <a:endParaRPr lang="en-US"/>
           </a:p>
         </p:txBody>
       </p:sp>
@@ -273,10 +288,9 @@
           </a:lstStyle>
           <a:p>
             <a:r>
-              <a:rPr lang="en-US" smtClean="0"/>
+              <a:rPr lang="en-US"/>
               <a:t>Click to edit Master subtitle style</a:t>
             </a:r>
-            <a:endParaRPr lang="en-US"/>
           </a:p>
         </p:txBody>
       </p:sp>
@@ -297,7 +311,7 @@
           <a:p>
             <a:fld id="{5BCAD085-E8A6-8845-BD4E-CB4CCA059FC4}" type="datetimeFigureOut">
               <a:rPr lang="en-US" smtClean="0"/>
-              <a:t>1/27/13</a:t>
+              <a:t>7/7/2026</a:t>
             </a:fld>
             <a:endParaRPr lang="en-US"/>
           </a:p>
@@ -391,10 +405,9 @@
           <a:lstStyle/>
           <a:p>
             <a:r>
-              <a:rPr lang="en-US" smtClean="0"/>
+              <a:rPr lang="en-US"/>
               <a:t>Click to edit Master title style</a:t>
             </a:r>
-            <a:endParaRPr lang="en-US"/>
           </a:p>
         </p:txBody>
       </p:sp>
@@ -415,38 +428,37 @@
           <a:p>
             <a:pPr lvl="0"/>
             <a:r>
-              <a:rPr lang="en-US" smtClean="0"/>
+              <a:rPr lang="en-US"/>
               <a:t>Click to edit Master text styles</a:t>
             </a:r>
           </a:p>
           <a:p>
             <a:pPr lvl="1"/>
             <a:r>
-              <a:rPr lang="en-US" smtClean="0"/>
+              <a:rPr lang="en-US"/>
               <a:t>Second level</a:t>
             </a:r>
           </a:p>
           <a:p>
             <a:pPr lvl="2"/>
             <a:r>
-              <a:rPr lang="en-US" smtClean="0"/>
+              <a:rPr lang="en-US"/>
               <a:t>Third level</a:t>
             </a:r>
           </a:p>
           <a:p>
             <a:pPr lvl="3"/>
             <a:r>
-              <a:rPr lang="en-US" smtClean="0"/>
+              <a:rPr lang="en-US"/>
               <a:t>Fourth level</a:t>
             </a:r>
           </a:p>
           <a:p>
             <a:pPr lvl="4"/>
             <a:r>
-              <a:rPr lang="en-US" smtClean="0"/>
+              <a:rPr lang="en-US"/>
               <a:t>Fifth level</a:t>
             </a:r>
-            <a:endParaRPr lang="en-US"/>
           </a:p>
         </p:txBody>
       </p:sp>
@@ -467,7 +479,7 @@
           <a:p>
             <a:fld id="{5BCAD085-E8A6-8845-BD4E-CB4CCA059FC4}" type="datetimeFigureOut">
               <a:rPr lang="en-US" smtClean="0"/>
-              <a:t>1/27/13</a:t>
+              <a:t>7/7/2026</a:t>
             </a:fld>
             <a:endParaRPr lang="en-US"/>
           </a:p>
@@ -566,10 +578,9 @@
           <a:lstStyle/>
           <a:p>
             <a:r>
-              <a:rPr lang="en-US" smtClean="0"/>
+              <a:rPr lang="en-US"/>
               <a:t>Click to edit Master title style</a:t>
             </a:r>
-            <a:endParaRPr lang="en-US"/>
           </a:p>
         </p:txBody>
       </p:sp>
@@ -595,38 +606,37 @@
           <a:p>
             <a:pPr lvl="0"/>
             <a:r>
-              <a:rPr lang="en-US" smtClean="0"/>
+              <a:rPr lang="en-US"/>
               <a:t>Click to edit Master text styles</a:t>
             </a:r>
           </a:p>
           <a:p>
             <a:pPr lvl="1"/>
             <a:r>
-              <a:rPr lang="en-US" smtClean="0"/>
+              <a:rPr lang="en-US"/>
               <a:t>Second level</a:t>
             </a:r>
           </a:p>
           <a:p>
             <a:pPr lvl="2"/>
             <a:r>
-              <a:rPr lang="en-US" smtClean="0"/>
+              <a:rPr lang="en-US"/>
               <a:t>Third level</a:t>
             </a:r>
           </a:p>
           <a:p>
             <a:pPr lvl="3"/>
             <a:r>
-              <a:rPr lang="en-US" smtClean="0"/>
+              <a:rPr lang="en-US"/>
               <a:t>Fourth level</a:t>
             </a:r>
           </a:p>
           <a:p>
             <a:pPr lvl="4"/>
             <a:r>
-              <a:rPr lang="en-US" smtClean="0"/>
+              <a:rPr lang="en-US"/>
               <a:t>Fifth level</a:t>
             </a:r>
-            <a:endParaRPr lang="en-US"/>
           </a:p>
         </p:txBody>
       </p:sp>
@@ -647,7 +657,7 @@
           <a:p>
             <a:fld id="{5BCAD085-E8A6-8845-BD4E-CB4CCA059FC4}" type="datetimeFigureOut">
               <a:rPr lang="en-US" smtClean="0"/>
-              <a:t>1/27/13</a:t>
+              <a:t>7/7/2026</a:t>
             </a:fld>
             <a:endParaRPr lang="en-US"/>
           </a:p>
@@ -741,10 +751,9 @@
           <a:lstStyle/>
           <a:p>
             <a:r>
-              <a:rPr lang="en-US" smtClean="0"/>
+              <a:rPr lang="en-US"/>
               <a:t>Click to edit Master title style</a:t>
             </a:r>
-            <a:endParaRPr lang="en-US"/>
           </a:p>
         </p:txBody>
       </p:sp>
@@ -765,38 +774,37 @@
           <a:p>
             <a:pPr lvl="0"/>
             <a:r>
-              <a:rPr lang="en-US" smtClean="0"/>
+              <a:rPr lang="en-US"/>
               <a:t>Click to edit Master text styles</a:t>
             </a:r>
           </a:p>
           <a:p>
             <a:pPr lvl="1"/>
             <a:r>
-              <a:rPr lang="en-US" smtClean="0"/>
+              <a:rPr lang="en-US"/>
               <a:t>Second level</a:t>
             </a:r>
           </a:p>
           <a:p>
             <a:pPr lvl="2"/>
             <a:r>
-              <a:rPr lang="en-US" smtClean="0"/>
+              <a:rPr lang="en-US"/>
               <a:t>Third level</a:t>
             </a:r>
           </a:p>
           <a:p>
             <a:pPr lvl="3"/>
             <a:r>
-              <a:rPr lang="en-US" smtClean="0"/>
+              <a:rPr lang="en-US"/>
               <a:t>Fourth level</a:t>
             </a:r>
           </a:p>
           <a:p>
             <a:pPr lvl="4"/>
             <a:r>
-              <a:rPr lang="en-US" smtClean="0"/>
+              <a:rPr lang="en-US"/>
               <a:t>Fifth level</a:t>
             </a:r>
-            <a:endParaRPr lang="en-US"/>
           </a:p>
         </p:txBody>
       </p:sp>
@@ -817,7 +825,7 @@
           <a:p>
             <a:fld id="{5BCAD085-E8A6-8845-BD4E-CB4CCA059FC4}" type="datetimeFigureOut">
               <a:rPr lang="en-US" smtClean="0"/>
-              <a:t>1/27/13</a:t>
+              <a:t>7/7/2026</a:t>
             </a:fld>
             <a:endParaRPr lang="en-US"/>
           </a:p>
@@ -920,10 +928,9 @@
           </a:lstStyle>
           <a:p>
             <a:r>
-              <a:rPr lang="en-US" smtClean="0"/>
+              <a:rPr lang="en-US"/>
               <a:t>Click to edit Master title style</a:t>
             </a:r>
-            <a:endParaRPr lang="en-US"/>
           </a:p>
         </p:txBody>
       </p:sp>
@@ -1040,7 +1047,7 @@
           <a:p>
             <a:pPr lvl="0"/>
             <a:r>
-              <a:rPr lang="en-US" smtClean="0"/>
+              <a:rPr lang="en-US"/>
               <a:t>Click to edit Master text styles</a:t>
             </a:r>
           </a:p>
@@ -1063,7 +1070,7 @@
           <a:p>
             <a:fld id="{5BCAD085-E8A6-8845-BD4E-CB4CCA059FC4}" type="datetimeFigureOut">
               <a:rPr lang="en-US" smtClean="0"/>
-              <a:t>1/27/13</a:t>
+              <a:t>7/7/2026</a:t>
             </a:fld>
             <a:endParaRPr lang="en-US"/>
           </a:p>
@@ -1157,10 +1164,9 @@
           <a:lstStyle/>
           <a:p>
             <a:r>
-              <a:rPr lang="en-US" smtClean="0"/>
+              <a:rPr lang="en-US"/>
               <a:t>Click to edit Master title style</a:t>
             </a:r>
-            <a:endParaRPr lang="en-US"/>
           </a:p>
         </p:txBody>
       </p:sp>
@@ -1214,38 +1220,37 @@
           <a:p>
             <a:pPr lvl="0"/>
             <a:r>
-              <a:rPr lang="en-US" smtClean="0"/>
+              <a:rPr lang="en-US"/>
               <a:t>Click to edit Master text styles</a:t>
             </a:r>
           </a:p>
           <a:p>
             <a:pPr lvl="1"/>
             <a:r>
-              <a:rPr lang="en-US" smtClean="0"/>
+              <a:rPr lang="en-US"/>
               <a:t>Second level</a:t>
             </a:r>
           </a:p>
           <a:p>
             <a:pPr lvl="2"/>
             <a:r>
-              <a:rPr lang="en-US" smtClean="0"/>
+              <a:rPr lang="en-US"/>
               <a:t>Third level</a:t>
             </a:r>
           </a:p>
           <a:p>
             <a:pPr lvl="3"/>
             <a:r>
-              <a:rPr lang="en-US" smtClean="0"/>
+              <a:rPr lang="en-US"/>
               <a:t>Fourth level</a:t>
             </a:r>
           </a:p>
           <a:p>
             <a:pPr lvl="4"/>
             <a:r>
-              <a:rPr lang="en-US" smtClean="0"/>
+              <a:rPr lang="en-US"/>
               <a:t>Fifth level</a:t>
             </a:r>
-            <a:endParaRPr lang="en-US"/>
           </a:p>
         </p:txBody>
       </p:sp>
@@ -1299,38 +1304,37 @@
           <a:p>
             <a:pPr lvl="0"/>
             <a:r>
-              <a:rPr lang="en-US" smtClean="0"/>
+              <a:rPr lang="en-US"/>
               <a:t>Click to edit Master text styles</a:t>
             </a:r>
           </a:p>
           <a:p>
             <a:pPr lvl="1"/>
             <a:r>
-              <a:rPr lang="en-US" smtClean="0"/>
+              <a:rPr lang="en-US"/>
               <a:t>Second level</a:t>
             </a:r>
           </a:p>
           <a:p>
             <a:pPr lvl="2"/>
             <a:r>
-              <a:rPr lang="en-US" smtClean="0"/>
+              <a:rPr lang="en-US"/>
               <a:t>Third level</a:t>
             </a:r>
           </a:p>
           <a:p>
             <a:pPr lvl="3"/>
             <a:r>
-              <a:rPr lang="en-US" smtClean="0"/>
+              <a:rPr lang="en-US"/>
               <a:t>Fourth level</a:t>
             </a:r>
           </a:p>
           <a:p>
             <a:pPr lvl="4"/>
             <a:r>
-              <a:rPr lang="en-US" smtClean="0"/>
+              <a:rPr lang="en-US"/>
               <a:t>Fifth level</a:t>
             </a:r>
-            <a:endParaRPr lang="en-US"/>
           </a:p>
         </p:txBody>
       </p:sp>
@@ -1351,7 +1355,7 @@
           <a:p>
             <a:fld id="{5BCAD085-E8A6-8845-BD4E-CB4CCA059FC4}" type="datetimeFigureOut">
               <a:rPr lang="en-US" smtClean="0"/>
-              <a:t>1/27/13</a:t>
+              <a:t>7/7/2026</a:t>
             </a:fld>
             <a:endParaRPr lang="en-US"/>
           </a:p>
@@ -1449,10 +1453,9 @@
           </a:lstStyle>
           <a:p>
             <a:r>
-              <a:rPr lang="en-US" smtClean="0"/>
+              <a:rPr lang="en-US"/>
               <a:t>Click to edit Master title style</a:t>
             </a:r>
-            <a:endParaRPr lang="en-US"/>
           </a:p>
         </p:txBody>
       </p:sp>
@@ -1515,7 +1518,7 @@
           <a:p>
             <a:pPr lvl="0"/>
             <a:r>
-              <a:rPr lang="en-US" smtClean="0"/>
+              <a:rPr lang="en-US"/>
               <a:t>Click to edit Master text styles</a:t>
             </a:r>
           </a:p>
@@ -1571,38 +1574,37 @@
           <a:p>
             <a:pPr lvl="0"/>
             <a:r>
-              <a:rPr lang="en-US" smtClean="0"/>
+              <a:rPr lang="en-US"/>
               <a:t>Click to edit Master text styles</a:t>
             </a:r>
           </a:p>
           <a:p>
             <a:pPr lvl="1"/>
             <a:r>
-              <a:rPr lang="en-US" smtClean="0"/>
+              <a:rPr lang="en-US"/>
               <a:t>Second level</a:t>
             </a:r>
           </a:p>
           <a:p>
             <a:pPr lvl="2"/>
             <a:r>
-              <a:rPr lang="en-US" smtClean="0"/>
+              <a:rPr lang="en-US"/>
               <a:t>Third level</a:t>
             </a:r>
           </a:p>
           <a:p>
             <a:pPr lvl="3"/>
             <a:r>
-              <a:rPr lang="en-US" smtClean="0"/>
+              <a:rPr lang="en-US"/>
               <a:t>Fourth level</a:t>
             </a:r>
           </a:p>
           <a:p>
             <a:pPr lvl="4"/>
             <a:r>
-              <a:rPr lang="en-US" smtClean="0"/>
+              <a:rPr lang="en-US"/>
               <a:t>Fifth level</a:t>
             </a:r>
-            <a:endParaRPr lang="en-US"/>
           </a:p>
         </p:txBody>
       </p:sp>
@@ -1665,7 +1667,7 @@
           <a:p>
             <a:pPr lvl="0"/>
             <a:r>
-              <a:rPr lang="en-US" smtClean="0"/>
+              <a:rPr lang="en-US"/>
               <a:t>Click to edit Master text styles</a:t>
             </a:r>
           </a:p>
@@ -1721,38 +1723,37 @@
           <a:p>
             <a:pPr lvl="0"/>
             <a:r>
-              <a:rPr lang="en-US" smtClean="0"/>
+              <a:rPr lang="en-US"/>
               <a:t>Click to edit Master text styles</a:t>
             </a:r>
           </a:p>
           <a:p>
             <a:pPr lvl="1"/>
             <a:r>
-              <a:rPr lang="en-US" smtClean="0"/>
+              <a:rPr lang="en-US"/>
               <a:t>Second level</a:t>
             </a:r>
           </a:p>
           <a:p>
             <a:pPr lvl="2"/>
             <a:r>
-              <a:rPr lang="en-US" smtClean="0"/>
+              <a:rPr lang="en-US"/>
               <a:t>Third level</a:t>
             </a:r>
           </a:p>
           <a:p>
             <a:pPr lvl="3"/>
             <a:r>
-              <a:rPr lang="en-US" smtClean="0"/>
+              <a:rPr lang="en-US"/>
               <a:t>Fourth level</a:t>
             </a:r>
           </a:p>
           <a:p>
             <a:pPr lvl="4"/>
             <a:r>
-              <a:rPr lang="en-US" smtClean="0"/>
+              <a:rPr lang="en-US"/>
               <a:t>Fifth level</a:t>
             </a:r>
-            <a:endParaRPr lang="en-US"/>
           </a:p>
         </p:txBody>
       </p:sp>
@@ -1773,7 +1774,7 @@
           <a:p>
             <a:fld id="{5BCAD085-E8A6-8845-BD4E-CB4CCA059FC4}" type="datetimeFigureOut">
               <a:rPr lang="en-US" smtClean="0"/>
-              <a:t>1/27/13</a:t>
+              <a:t>7/7/2026</a:t>
             </a:fld>
             <a:endParaRPr lang="en-US"/>
           </a:p>
@@ -1867,10 +1868,9 @@
           <a:lstStyle/>
           <a:p>
             <a:r>
-              <a:rPr lang="en-US" smtClean="0"/>
+              <a:rPr lang="en-US"/>
               <a:t>Click to edit Master title style</a:t>
             </a:r>
-            <a:endParaRPr lang="en-US"/>
           </a:p>
         </p:txBody>
       </p:sp>
@@ -1891,7 +1891,7 @@
           <a:p>
             <a:fld id="{5BCAD085-E8A6-8845-BD4E-CB4CCA059FC4}" type="datetimeFigureOut">
               <a:rPr lang="en-US" smtClean="0"/>
-              <a:t>1/27/13</a:t>
+              <a:t>7/7/2026</a:t>
             </a:fld>
             <a:endParaRPr lang="en-US"/>
           </a:p>
@@ -1986,7 +1986,7 @@
           <a:p>
             <a:fld id="{5BCAD085-E8A6-8845-BD4E-CB4CCA059FC4}" type="datetimeFigureOut">
               <a:rPr lang="en-US" smtClean="0"/>
-              <a:t>1/27/13</a:t>
+              <a:t>7/7/2026</a:t>
             </a:fld>
             <a:endParaRPr lang="en-US"/>
           </a:p>
@@ -2089,10 +2089,9 @@
           </a:lstStyle>
           <a:p>
             <a:r>
-              <a:rPr lang="en-US" smtClean="0"/>
+              <a:rPr lang="en-US"/>
               <a:t>Click to edit Master title style</a:t>
             </a:r>
-            <a:endParaRPr lang="en-US"/>
           </a:p>
         </p:txBody>
       </p:sp>
@@ -2146,38 +2145,37 @@
           <a:p>
             <a:pPr lvl="0"/>
             <a:r>
-              <a:rPr lang="en-US" smtClean="0"/>
+              <a:rPr lang="en-US"/>
               <a:t>Click to edit Master text styles</a:t>
             </a:r>
           </a:p>
           <a:p>
             <a:pPr lvl="1"/>
             <a:r>
-              <a:rPr lang="en-US" smtClean="0"/>
+              <a:rPr lang="en-US"/>
               <a:t>Second level</a:t>
             </a:r>
           </a:p>
           <a:p>
             <a:pPr lvl="2"/>
             <a:r>
-              <a:rPr lang="en-US" smtClean="0"/>
+              <a:rPr lang="en-US"/>
               <a:t>Third level</a:t>
             </a:r>
           </a:p>
           <a:p>
             <a:pPr lvl="3"/>
             <a:r>
-              <a:rPr lang="en-US" smtClean="0"/>
+              <a:rPr lang="en-US"/>
               <a:t>Fourth level</a:t>
             </a:r>
           </a:p>
           <a:p>
             <a:pPr lvl="4"/>
             <a:r>
-              <a:rPr lang="en-US" smtClean="0"/>
+              <a:rPr lang="en-US"/>
               <a:t>Fifth level</a:t>
             </a:r>
-            <a:endParaRPr lang="en-US"/>
           </a:p>
         </p:txBody>
       </p:sp>
@@ -2240,7 +2238,7 @@
           <a:p>
             <a:pPr lvl="0"/>
             <a:r>
-              <a:rPr lang="en-US" smtClean="0"/>
+              <a:rPr lang="en-US"/>
               <a:t>Click to edit Master text styles</a:t>
             </a:r>
           </a:p>
@@ -2263,7 +2261,7 @@
           <a:p>
             <a:fld id="{5BCAD085-E8A6-8845-BD4E-CB4CCA059FC4}" type="datetimeFigureOut">
               <a:rPr lang="en-US" smtClean="0"/>
-              <a:t>1/27/13</a:t>
+              <a:t>7/7/2026</a:t>
             </a:fld>
             <a:endParaRPr lang="en-US"/>
           </a:p>
@@ -2366,10 +2364,9 @@
           </a:lstStyle>
           <a:p>
             <a:r>
-              <a:rPr lang="en-US" smtClean="0"/>
+              <a:rPr lang="en-US"/>
               <a:t>Click to edit Master title style</a:t>
             </a:r>
-            <a:endParaRPr lang="en-US"/>
           </a:p>
         </p:txBody>
       </p:sp>
@@ -2493,7 +2490,7 @@
           <a:p>
             <a:pPr lvl="0"/>
             <a:r>
-              <a:rPr lang="en-US" smtClean="0"/>
+              <a:rPr lang="en-US"/>
               <a:t>Click to edit Master text styles</a:t>
             </a:r>
           </a:p>
@@ -2516,7 +2513,7 @@
           <a:p>
             <a:fld id="{5BCAD085-E8A6-8845-BD4E-CB4CCA059FC4}" type="datetimeFigureOut">
               <a:rPr lang="en-US" smtClean="0"/>
-              <a:t>1/27/13</a:t>
+              <a:t>7/7/2026</a:t>
             </a:fld>
             <a:endParaRPr lang="en-US"/>
           </a:p>
@@ -2625,10 +2622,9 @@
           <a:lstStyle/>
           <a:p>
             <a:r>
-              <a:rPr lang="en-US" smtClean="0"/>
+              <a:rPr lang="en-US"/>
               <a:t>Click to edit Master title style</a:t>
             </a:r>
-            <a:endParaRPr lang="en-US"/>
           </a:p>
         </p:txBody>
       </p:sp>
@@ -2659,38 +2655,37 @@
           <a:p>
             <a:pPr lvl="0"/>
             <a:r>
-              <a:rPr lang="en-US" smtClean="0"/>
+              <a:rPr lang="en-US"/>
               <a:t>Click to edit Master text styles</a:t>
             </a:r>
           </a:p>
           <a:p>
             <a:pPr lvl="1"/>
             <a:r>
-              <a:rPr lang="en-US" smtClean="0"/>
+              <a:rPr lang="en-US"/>
               <a:t>Second level</a:t>
             </a:r>
           </a:p>
           <a:p>
             <a:pPr lvl="2"/>
             <a:r>
-              <a:rPr lang="en-US" smtClean="0"/>
+              <a:rPr lang="en-US"/>
               <a:t>Third level</a:t>
             </a:r>
           </a:p>
           <a:p>
             <a:pPr lvl="3"/>
             <a:r>
-              <a:rPr lang="en-US" smtClean="0"/>
+              <a:rPr lang="en-US"/>
               <a:t>Fourth level</a:t>
             </a:r>
           </a:p>
           <a:p>
             <a:pPr lvl="4"/>
             <a:r>
-              <a:rPr lang="en-US" smtClean="0"/>
+              <a:rPr lang="en-US"/>
               <a:t>Fifth level</a:t>
             </a:r>
-            <a:endParaRPr lang="en-US"/>
           </a:p>
         </p:txBody>
       </p:sp>
@@ -2729,7 +2724,7 @@
           <a:p>
             <a:fld id="{5BCAD085-E8A6-8845-BD4E-CB4CCA059FC4}" type="datetimeFigureOut">
               <a:rPr lang="en-US" smtClean="0"/>
-              <a:t>1/27/13</a:t>
+              <a:t>7/7/2026</a:t>
             </a:fld>
             <a:endParaRPr lang="en-US"/>
           </a:p>
@@ -3088,7 +3083,7 @@
 </file>
 
 <file path=ppt/slides/slide1.xml><?xml version="1.0" encoding="utf-8"?>
-<p:sld xmlns:a="http://schemas.openxmlformats.org/drawingml/2006/main" xmlns:p="http://schemas.openxmlformats.org/presentationml/2006/main" xmlns:r="http://schemas.openxmlformats.org/officeDocument/2006/relationships">
+<p:sld xmlns:a="http://schemas.openxmlformats.org/drawingml/2006/main" xmlns:r="http://schemas.openxmlformats.org/officeDocument/2006/relationships" xmlns:p="http://schemas.openxmlformats.org/presentationml/2006/main">
   <p:cSld>
     <p:bg>
       <p:bgPr>
@@ -3104,7 +3099,14 @@
         <p:cNvGrpSpPr/>
         <p:nvPr/>
       </p:nvGrpSpPr>
-      <p:grpSpPr/>
+      <p:grpSpPr>
+        <a:xfrm>
+          <a:off x="0" y="0"/>
+          <a:ext cx="0" cy="0"/>
+          <a:chOff x="0" y="0"/>
+          <a:chExt cx="0" cy="0"/>
+        </a:xfrm>
+      </p:grpSpPr>
       <p:sp>
         <p:nvSpPr>
           <p:cNvPr id="2" name="Rectangle 1"/>
@@ -3146,6 +3148,7 @@
           <a:lstStyle/>
           <a:p>
             <a:pPr algn="ctr"/>
+            <a:endParaRPr/>
           </a:p>
         </p:txBody>
       </p:sp>
@@ -3190,6 +3193,7 @@
           <a:lstStyle/>
           <a:p>
             <a:pPr algn="ctr"/>
+            <a:endParaRPr/>
           </a:p>
         </p:txBody>
       </p:sp>
@@ -3234,6 +3238,7 @@
           <a:lstStyle/>
           <a:p>
             <a:pPr algn="ctr"/>
+            <a:endParaRPr/>
           </a:p>
         </p:txBody>
       </p:sp>
@@ -3254,7 +3259,7 @@
           <a:noFill/>
         </p:spPr>
         <p:txBody>
-          <a:bodyPr wrap="square" anchor="t" lIns="0" rIns="0" tIns="0" bIns="0">
+          <a:bodyPr wrap="square" lIns="0" tIns="0" rIns="0" bIns="0" anchor="t">
             <a:spAutoFit/>
           </a:bodyPr>
           <a:lstStyle/>
@@ -3299,7 +3304,7 @@
           <a:noFill/>
         </p:spPr>
         <p:txBody>
-          <a:bodyPr wrap="square" anchor="t" lIns="0" rIns="0" tIns="0" bIns="0">
+          <a:bodyPr wrap="square" lIns="0" tIns="0" rIns="0" bIns="0" anchor="t">
             <a:spAutoFit/>
           </a:bodyPr>
           <a:lstStyle/>
@@ -3386,6 +3391,7 @@
           <a:lstStyle/>
           <a:p>
             <a:pPr algn="ctr"/>
+            <a:endParaRPr/>
           </a:p>
         </p:txBody>
       </p:sp>
@@ -3406,7 +3412,7 @@
           <a:noFill/>
         </p:spPr>
         <p:txBody>
-          <a:bodyPr wrap="square" anchor="t" lIns="0" rIns="0" tIns="0" bIns="0">
+          <a:bodyPr wrap="square" lIns="0" tIns="0" rIns="0" bIns="0" anchor="t">
             <a:spAutoFit/>
           </a:bodyPr>
           <a:lstStyle/>
@@ -3497,6 +3503,7 @@
           <a:lstStyle/>
           <a:p>
             <a:pPr algn="ctr"/>
+            <a:endParaRPr/>
           </a:p>
         </p:txBody>
       </p:sp>
@@ -3517,7 +3524,7 @@
           <a:noFill/>
         </p:spPr>
         <p:txBody>
-          <a:bodyPr wrap="square" anchor="ctr" lIns="0" rIns="0" tIns="0" bIns="0">
+          <a:bodyPr wrap="square" lIns="0" tIns="0" rIns="0" bIns="0" anchor="ctr">
             <a:spAutoFit/>
           </a:bodyPr>
           <a:lstStyle/>
@@ -3562,7 +3569,7 @@
           <a:noFill/>
         </p:spPr>
         <p:txBody>
-          <a:bodyPr wrap="square" anchor="t" lIns="0" rIns="0" tIns="0" bIns="0">
+          <a:bodyPr wrap="square" lIns="0" tIns="0" rIns="0" bIns="0" anchor="t">
             <a:spAutoFit/>
           </a:bodyPr>
           <a:lstStyle/>
@@ -3599,7 +3606,7 @@
 </file>
 
 <file path=ppt/slides/slide10.xml><?xml version="1.0" encoding="utf-8"?>
-<p:sld xmlns:a="http://schemas.openxmlformats.org/drawingml/2006/main" xmlns:p="http://schemas.openxmlformats.org/presentationml/2006/main" xmlns:r="http://schemas.openxmlformats.org/officeDocument/2006/relationships">
+<p:sld xmlns:a="http://schemas.openxmlformats.org/drawingml/2006/main" xmlns:r="http://schemas.openxmlformats.org/officeDocument/2006/relationships" xmlns:p="http://schemas.openxmlformats.org/presentationml/2006/main">
   <p:cSld>
     <p:bg>
       <p:bgPr>
@@ -3615,7 +3622,14 @@
         <p:cNvGrpSpPr/>
         <p:nvPr/>
       </p:nvGrpSpPr>
-      <p:grpSpPr/>
+      <p:grpSpPr>
+        <a:xfrm>
+          <a:off x="0" y="0"/>
+          <a:ext cx="0" cy="0"/>
+          <a:chOff x="0" y="0"/>
+          <a:chExt cx="0" cy="0"/>
+        </a:xfrm>
+      </p:grpSpPr>
       <p:sp>
         <p:nvSpPr>
           <p:cNvPr id="2" name="Oval 1"/>
@@ -3657,6 +3671,7 @@
           <a:lstStyle/>
           <a:p>
             <a:pPr algn="ctr"/>
+            <a:endParaRPr/>
           </a:p>
         </p:txBody>
       </p:sp>
@@ -3701,6 +3716,7 @@
           <a:lstStyle/>
           <a:p>
             <a:pPr algn="ctr"/>
+            <a:endParaRPr/>
           </a:p>
         </p:txBody>
       </p:sp>
@@ -3721,7 +3737,7 @@
           <a:noFill/>
         </p:spPr>
         <p:txBody>
-          <a:bodyPr wrap="square" anchor="t" lIns="0" rIns="0" tIns="0" bIns="0">
+          <a:bodyPr wrap="square" lIns="0" tIns="0" rIns="0" bIns="0" anchor="t">
             <a:spAutoFit/>
           </a:bodyPr>
           <a:lstStyle/>
@@ -3766,7 +3782,7 @@
           <a:noFill/>
         </p:spPr>
         <p:txBody>
-          <a:bodyPr wrap="square" anchor="t" lIns="0" rIns="0" tIns="0" bIns="0">
+          <a:bodyPr wrap="square" lIns="0" tIns="0" rIns="0" bIns="0" anchor="t">
             <a:spAutoFit/>
           </a:bodyPr>
           <a:lstStyle/>
@@ -3835,6 +3851,7 @@
           <a:lstStyle/>
           <a:p>
             <a:pPr algn="ctr"/>
+            <a:endParaRPr/>
           </a:p>
         </p:txBody>
       </p:sp>
@@ -3879,6 +3896,7 @@
           <a:lstStyle/>
           <a:p>
             <a:pPr algn="ctr"/>
+            <a:endParaRPr/>
           </a:p>
         </p:txBody>
       </p:sp>
@@ -3899,7 +3917,7 @@
           <a:noFill/>
         </p:spPr>
         <p:txBody>
-          <a:bodyPr wrap="square" anchor="ctr" lIns="0" rIns="0" tIns="0" bIns="0">
+          <a:bodyPr wrap="square" lIns="0" tIns="0" rIns="0" bIns="0" anchor="ctr">
             <a:spAutoFit/>
           </a:bodyPr>
           <a:lstStyle/>
@@ -3944,7 +3962,7 @@
           <a:noFill/>
         </p:spPr>
         <p:txBody>
-          <a:bodyPr wrap="square" anchor="t" lIns="0" rIns="0" tIns="0" bIns="0">
+          <a:bodyPr wrap="square" lIns="0" tIns="0" rIns="0" bIns="0" anchor="t">
             <a:spAutoFit/>
           </a:bodyPr>
           <a:lstStyle/>
@@ -3989,7 +4007,7 @@
           <a:noFill/>
         </p:spPr>
         <p:txBody>
-          <a:bodyPr wrap="square" anchor="t" lIns="0" rIns="0" tIns="0" bIns="0">
+          <a:bodyPr wrap="square" lIns="0" tIns="0" rIns="0" bIns="0" anchor="t">
             <a:spAutoFit/>
           </a:bodyPr>
           <a:lstStyle/>
@@ -4058,6 +4076,7 @@
           <a:lstStyle/>
           <a:p>
             <a:pPr algn="ctr"/>
+            <a:endParaRPr/>
           </a:p>
         </p:txBody>
       </p:sp>
@@ -4078,7 +4097,7 @@
           <a:noFill/>
         </p:spPr>
         <p:txBody>
-          <a:bodyPr wrap="square" anchor="ctr" lIns="0" rIns="0" tIns="0" bIns="0">
+          <a:bodyPr wrap="square" lIns="0" tIns="0" rIns="0" bIns="0" anchor="ctr">
             <a:spAutoFit/>
           </a:bodyPr>
           <a:lstStyle/>
@@ -4123,7 +4142,7 @@
           <a:noFill/>
         </p:spPr>
         <p:txBody>
-          <a:bodyPr wrap="square" anchor="t" lIns="0" rIns="0" tIns="0" bIns="0">
+          <a:bodyPr wrap="square" lIns="0" tIns="0" rIns="0" bIns="0" anchor="t">
             <a:spAutoFit/>
           </a:bodyPr>
           <a:lstStyle/>
@@ -4168,7 +4187,7 @@
           <a:noFill/>
         </p:spPr>
         <p:txBody>
-          <a:bodyPr wrap="square" anchor="t" lIns="0" rIns="0" tIns="0" bIns="0">
+          <a:bodyPr wrap="square" lIns="0" tIns="0" rIns="0" bIns="0" anchor="t">
             <a:spAutoFit/>
           </a:bodyPr>
           <a:lstStyle/>
@@ -4237,6 +4256,7 @@
           <a:lstStyle/>
           <a:p>
             <a:pPr algn="ctr"/>
+            <a:endParaRPr/>
           </a:p>
         </p:txBody>
       </p:sp>
@@ -4257,7 +4277,7 @@
           <a:noFill/>
         </p:spPr>
         <p:txBody>
-          <a:bodyPr wrap="square" anchor="ctr" lIns="0" rIns="0" tIns="0" bIns="0">
+          <a:bodyPr wrap="square" lIns="0" tIns="0" rIns="0" bIns="0" anchor="ctr">
             <a:spAutoFit/>
           </a:bodyPr>
           <a:lstStyle/>
@@ -4302,7 +4322,7 @@
           <a:noFill/>
         </p:spPr>
         <p:txBody>
-          <a:bodyPr wrap="square" anchor="t" lIns="0" rIns="0" tIns="0" bIns="0">
+          <a:bodyPr wrap="square" lIns="0" tIns="0" rIns="0" bIns="0" anchor="t">
             <a:spAutoFit/>
           </a:bodyPr>
           <a:lstStyle/>
@@ -4347,7 +4367,7 @@
           <a:noFill/>
         </p:spPr>
         <p:txBody>
-          <a:bodyPr wrap="square" anchor="t" lIns="0" rIns="0" tIns="0" bIns="0">
+          <a:bodyPr wrap="square" lIns="0" tIns="0" rIns="0" bIns="0" anchor="t">
             <a:spAutoFit/>
           </a:bodyPr>
           <a:lstStyle/>
@@ -4392,7 +4412,7 @@
           <a:noFill/>
         </p:spPr>
         <p:txBody>
-          <a:bodyPr wrap="square" anchor="t" lIns="0" rIns="0" tIns="0" bIns="0">
+          <a:bodyPr wrap="square" lIns="0" tIns="0" rIns="0" bIns="0" anchor="t">
             <a:spAutoFit/>
           </a:bodyPr>
           <a:lstStyle/>
@@ -4461,6 +4481,7 @@
           <a:lstStyle/>
           <a:p>
             <a:pPr algn="ctr"/>
+            <a:endParaRPr/>
           </a:p>
         </p:txBody>
       </p:sp>
@@ -4481,7 +4502,7 @@
           <a:noFill/>
         </p:spPr>
         <p:txBody>
-          <a:bodyPr wrap="square" anchor="ctr" lIns="0" rIns="0" tIns="0" bIns="0">
+          <a:bodyPr wrap="square" lIns="0" tIns="0" rIns="0" bIns="0" anchor="ctr">
             <a:spAutoFit/>
           </a:bodyPr>
           <a:lstStyle/>
@@ -4536,7 +4557,7 @@
 </file>
 
 <file path=ppt/slides/slide2.xml><?xml version="1.0" encoding="utf-8"?>
-<p:sld xmlns:a="http://schemas.openxmlformats.org/drawingml/2006/main" xmlns:p="http://schemas.openxmlformats.org/presentationml/2006/main" xmlns:r="http://schemas.openxmlformats.org/officeDocument/2006/relationships">
+<p:sld xmlns:a="http://schemas.openxmlformats.org/drawingml/2006/main" xmlns:r="http://schemas.openxmlformats.org/officeDocument/2006/relationships" xmlns:p="http://schemas.openxmlformats.org/presentationml/2006/main">
   <p:cSld>
     <p:bg>
       <p:bgPr>
@@ -4552,7 +4573,14 @@
         <p:cNvGrpSpPr/>
         <p:nvPr/>
       </p:nvGrpSpPr>
-      <p:grpSpPr/>
+      <p:grpSpPr>
+        <a:xfrm>
+          <a:off x="0" y="0"/>
+          <a:ext cx="0" cy="0"/>
+          <a:chOff x="0" y="0"/>
+          <a:chExt cx="0" cy="0"/>
+        </a:xfrm>
+      </p:grpSpPr>
       <p:sp>
         <p:nvSpPr>
           <p:cNvPr id="2" name="Rectangle 1"/>
@@ -4594,6 +4622,7 @@
           <a:lstStyle/>
           <a:p>
             <a:pPr algn="ctr"/>
+            <a:endParaRPr/>
           </a:p>
         </p:txBody>
       </p:sp>
@@ -4614,7 +4643,7 @@
           <a:noFill/>
         </p:spPr>
         <p:txBody>
-          <a:bodyPr wrap="square" anchor="t" lIns="0" rIns="0" tIns="0" bIns="0">
+          <a:bodyPr wrap="square" lIns="0" tIns="0" rIns="0" bIns="0" anchor="t">
             <a:spAutoFit/>
           </a:bodyPr>
           <a:lstStyle/>
@@ -4659,7 +4688,7 @@
           <a:noFill/>
         </p:spPr>
         <p:txBody>
-          <a:bodyPr wrap="square" anchor="t" lIns="0" rIns="0" tIns="0" bIns="0">
+          <a:bodyPr wrap="square" lIns="0" tIns="0" rIns="0" bIns="0" anchor="t">
             <a:spAutoFit/>
           </a:bodyPr>
           <a:lstStyle/>
@@ -4684,50 +4713,6 @@
               </a:rPr>
               <a:t>Robots and factories are AI-first — but the stack is broken</a:t>
             </a:r>
-          </a:p>
-        </p:txBody>
-      </p:sp>
-      <p:sp>
-        <p:nvSpPr>
-          <p:cNvPr id="5" name="Rectangle 4"/>
-          <p:cNvSpPr/>
-          <p:nvPr/>
-        </p:nvSpPr>
-        <p:spPr>
-          <a:xfrm>
-            <a:off x="640080" y="1691640"/>
-            <a:ext cx="822960" cy="64008"/>
-          </a:xfrm>
-          <a:prstGeom prst="rect">
-            <a:avLst/>
-          </a:prstGeom>
-          <a:solidFill>
-            <a:srgbClr val="27D3C4"/>
-          </a:solidFill>
-          <a:ln>
-            <a:noFill/>
-          </a:ln>
-          <a:effectLst/>
-        </p:spPr>
-        <p:style>
-          <a:lnRef idx="1">
-            <a:schemeClr val="accent1"/>
-          </a:lnRef>
-          <a:fillRef idx="3">
-            <a:schemeClr val="accent1"/>
-          </a:fillRef>
-          <a:effectRef idx="2">
-            <a:schemeClr val="accent1"/>
-          </a:effectRef>
-          <a:fontRef idx="minor">
-            <a:schemeClr val="lt1"/>
-          </a:fontRef>
-        </p:style>
-        <p:txBody>
-          <a:bodyPr rtlCol="0" anchor="ctr"/>
-          <a:lstStyle/>
-          <a:p>
-            <a:pPr algn="ctr"/>
           </a:p>
         </p:txBody>
       </p:sp>
@@ -4772,6 +4757,7 @@
           <a:lstStyle/>
           <a:p>
             <a:pPr algn="ctr"/>
+            <a:endParaRPr/>
           </a:p>
         </p:txBody>
       </p:sp>
@@ -4816,6 +4802,7 @@
           <a:lstStyle/>
           <a:p>
             <a:pPr algn="ctr"/>
+            <a:endParaRPr/>
           </a:p>
         </p:txBody>
       </p:sp>
@@ -4836,7 +4823,7 @@
           <a:noFill/>
         </p:spPr>
         <p:txBody>
-          <a:bodyPr wrap="square" anchor="t" lIns="0" rIns="0" tIns="0" bIns="0">
+          <a:bodyPr wrap="square" lIns="0" tIns="0" rIns="0" bIns="0" anchor="t">
             <a:spAutoFit/>
           </a:bodyPr>
           <a:lstStyle/>
@@ -4881,7 +4868,7 @@
           <a:noFill/>
         </p:spPr>
         <p:txBody>
-          <a:bodyPr wrap="square" lIns="0" rIns="0" tIns="0" bIns="0">
+          <a:bodyPr wrap="square" lIns="0" tIns="0" rIns="0" bIns="0">
             <a:spAutoFit/>
           </a:bodyPr>
           <a:lstStyle/>
@@ -4994,6 +4981,7 @@
           <a:lstStyle/>
           <a:p>
             <a:pPr algn="ctr"/>
+            <a:endParaRPr/>
           </a:p>
         </p:txBody>
       </p:sp>
@@ -5038,6 +5026,7 @@
           <a:lstStyle/>
           <a:p>
             <a:pPr algn="ctr"/>
+            <a:endParaRPr/>
           </a:p>
         </p:txBody>
       </p:sp>
@@ -5058,7 +5047,7 @@
           <a:noFill/>
         </p:spPr>
         <p:txBody>
-          <a:bodyPr wrap="square" anchor="t" lIns="0" rIns="0" tIns="0" bIns="0">
+          <a:bodyPr wrap="square" lIns="0" tIns="0" rIns="0" bIns="0" anchor="t">
             <a:spAutoFit/>
           </a:bodyPr>
           <a:lstStyle/>
@@ -5103,7 +5092,7 @@
           <a:noFill/>
         </p:spPr>
         <p:txBody>
-          <a:bodyPr wrap="square" lIns="0" rIns="0" tIns="0" bIns="0">
+          <a:bodyPr wrap="square" lIns="0" tIns="0" rIns="0" bIns="0">
             <a:spAutoFit/>
           </a:bodyPr>
           <a:lstStyle/>
@@ -5216,6 +5205,7 @@
           <a:lstStyle/>
           <a:p>
             <a:pPr algn="ctr"/>
+            <a:endParaRPr/>
           </a:p>
         </p:txBody>
       </p:sp>
@@ -5236,7 +5226,7 @@
           <a:noFill/>
         </p:spPr>
         <p:txBody>
-          <a:bodyPr wrap="square" anchor="ctr" lIns="0" rIns="0" tIns="0" bIns="0">
+          <a:bodyPr wrap="square" lIns="0" tIns="0" rIns="0" bIns="0" anchor="ctr">
             <a:spAutoFit/>
           </a:bodyPr>
           <a:lstStyle/>
@@ -5290,7 +5280,7 @@
           <a:noFill/>
         </p:spPr>
         <p:txBody>
-          <a:bodyPr wrap="square" anchor="t" lIns="0" rIns="0" tIns="0" bIns="0">
+          <a:bodyPr wrap="square" lIns="0" tIns="0" rIns="0" bIns="0" anchor="t">
             <a:spAutoFit/>
           </a:bodyPr>
           <a:lstStyle/>
@@ -5335,7 +5325,7 @@
           <a:noFill/>
         </p:spPr>
         <p:txBody>
-          <a:bodyPr wrap="square" anchor="t" lIns="0" rIns="0" tIns="0" bIns="0">
+          <a:bodyPr wrap="square" lIns="0" tIns="0" rIns="0" bIns="0" anchor="t">
             <a:spAutoFit/>
           </a:bodyPr>
           <a:lstStyle/>
@@ -5372,7 +5362,7 @@
 </file>
 
 <file path=ppt/slides/slide3.xml><?xml version="1.0" encoding="utf-8"?>
-<p:sld xmlns:a="http://schemas.openxmlformats.org/drawingml/2006/main" xmlns:p="http://schemas.openxmlformats.org/presentationml/2006/main" xmlns:r="http://schemas.openxmlformats.org/officeDocument/2006/relationships">
+<p:sld xmlns:a="http://schemas.openxmlformats.org/drawingml/2006/main" xmlns:r="http://schemas.openxmlformats.org/officeDocument/2006/relationships" xmlns:p="http://schemas.openxmlformats.org/presentationml/2006/main">
   <p:cSld>
     <p:bg>
       <p:bgPr>
@@ -5388,7 +5378,14 @@
         <p:cNvGrpSpPr/>
         <p:nvPr/>
       </p:nvGrpSpPr>
-      <p:grpSpPr/>
+      <p:grpSpPr>
+        <a:xfrm>
+          <a:off x="0" y="0"/>
+          <a:ext cx="0" cy="0"/>
+          <a:chOff x="0" y="0"/>
+          <a:chExt cx="0" cy="0"/>
+        </a:xfrm>
+      </p:grpSpPr>
       <p:sp>
         <p:nvSpPr>
           <p:cNvPr id="2" name="Rectangle 1"/>
@@ -5430,6 +5427,7 @@
           <a:lstStyle/>
           <a:p>
             <a:pPr algn="ctr"/>
+            <a:endParaRPr/>
           </a:p>
         </p:txBody>
       </p:sp>
@@ -5450,7 +5448,7 @@
           <a:noFill/>
         </p:spPr>
         <p:txBody>
-          <a:bodyPr wrap="square" anchor="t" lIns="0" rIns="0" tIns="0" bIns="0">
+          <a:bodyPr wrap="square" lIns="0" tIns="0" rIns="0" bIns="0" anchor="t">
             <a:spAutoFit/>
           </a:bodyPr>
           <a:lstStyle/>
@@ -5495,7 +5493,7 @@
           <a:noFill/>
         </p:spPr>
         <p:txBody>
-          <a:bodyPr wrap="square" anchor="t" lIns="0" rIns="0" tIns="0" bIns="0">
+          <a:bodyPr wrap="square" lIns="0" tIns="0" rIns="0" bIns="0" anchor="t">
             <a:spAutoFit/>
           </a:bodyPr>
           <a:lstStyle/>
@@ -5525,14 +5523,372 @@
       </p:sp>
       <p:sp>
         <p:nvSpPr>
-          <p:cNvPr id="5" name="Rectangle 4"/>
+          <p:cNvPr id="6" name="Rounded Rectangle 5"/>
           <p:cNvSpPr/>
           <p:nvPr/>
         </p:nvSpPr>
         <p:spPr>
           <a:xfrm>
-            <a:off x="640080" y="1691640"/>
-            <a:ext cx="822960" cy="64008"/>
+            <a:off x="640080" y="2011680"/>
+            <a:ext cx="5349240" cy="4023360"/>
+          </a:xfrm>
+          <a:prstGeom prst="roundRect">
+            <a:avLst/>
+          </a:prstGeom>
+          <a:solidFill>
+            <a:srgbClr val="122A4D"/>
+          </a:solidFill>
+          <a:ln>
+            <a:noFill/>
+          </a:ln>
+          <a:effectLst/>
+        </p:spPr>
+        <p:style>
+          <a:lnRef idx="1">
+            <a:schemeClr val="accent1"/>
+          </a:lnRef>
+          <a:fillRef idx="3">
+            <a:schemeClr val="accent1"/>
+          </a:fillRef>
+          <a:effectRef idx="2">
+            <a:schemeClr val="accent1"/>
+          </a:effectRef>
+          <a:fontRef idx="minor">
+            <a:schemeClr val="lt1"/>
+          </a:fontRef>
+        </p:style>
+        <p:txBody>
+          <a:bodyPr rtlCol="0" anchor="ctr"/>
+          <a:lstStyle/>
+          <a:p>
+            <a:pPr algn="ctr"/>
+            <a:endParaRPr/>
+          </a:p>
+        </p:txBody>
+      </p:sp>
+      <p:sp>
+        <p:nvSpPr>
+          <p:cNvPr id="7" name="Rectangle 6"/>
+          <p:cNvSpPr/>
+          <p:nvPr/>
+        </p:nvSpPr>
+        <p:spPr>
+          <a:xfrm>
+            <a:off x="640080" y="2011680"/>
+            <a:ext cx="5349240" cy="109728"/>
+          </a:xfrm>
+          <a:prstGeom prst="rect">
+            <a:avLst/>
+          </a:prstGeom>
+          <a:solidFill>
+            <a:srgbClr val="2E6BF0"/>
+          </a:solidFill>
+          <a:ln>
+            <a:noFill/>
+          </a:ln>
+          <a:effectLst/>
+        </p:spPr>
+        <p:style>
+          <a:lnRef idx="1">
+            <a:schemeClr val="accent1"/>
+          </a:lnRef>
+          <a:fillRef idx="3">
+            <a:schemeClr val="accent1"/>
+          </a:fillRef>
+          <a:effectRef idx="2">
+            <a:schemeClr val="accent1"/>
+          </a:effectRef>
+          <a:fontRef idx="minor">
+            <a:schemeClr val="lt1"/>
+          </a:fontRef>
+        </p:style>
+        <p:txBody>
+          <a:bodyPr rtlCol="0" anchor="ctr"/>
+          <a:lstStyle/>
+          <a:p>
+            <a:pPr algn="ctr"/>
+            <a:endParaRPr/>
+          </a:p>
+        </p:txBody>
+      </p:sp>
+      <p:sp>
+        <p:nvSpPr>
+          <p:cNvPr id="8" name="TextBox 7"/>
+          <p:cNvSpPr txBox="1"/>
+          <p:nvPr/>
+        </p:nvSpPr>
+        <p:spPr>
+          <a:xfrm>
+            <a:off x="1051560" y="2286000"/>
+            <a:ext cx="4572000" cy="457200"/>
+          </a:xfrm>
+          <a:prstGeom prst="rect">
+            <a:avLst/>
+          </a:prstGeom>
+          <a:noFill/>
+        </p:spPr>
+        <p:txBody>
+          <a:bodyPr wrap="square" lIns="0" tIns="0" rIns="0" bIns="0" anchor="t">
+            <a:spAutoFit/>
+          </a:bodyPr>
+          <a:lstStyle/>
+          <a:p>
+            <a:pPr algn="l">
+              <a:lnSpc>
+                <a:spcPct val="100000"/>
+              </a:lnSpc>
+              <a:spcBef>
+                <a:spcPts val="0"/>
+              </a:spcBef>
+              <a:spcAft>
+                <a:spcPts val="600"/>
+              </a:spcAft>
+            </a:pPr>
+            <a:r>
+              <a:rPr sz="1300" b="1" i="0">
+                <a:solidFill>
+                  <a:srgbClr val="2E6BF0"/>
+                </a:solidFill>
+                <a:latin typeface="Segoe UI"/>
+              </a:rPr>
+              <a:t>DATA BACKBONE</a:t>
+            </a:r>
+          </a:p>
+        </p:txBody>
+      </p:sp>
+      <p:sp>
+        <p:nvSpPr>
+          <p:cNvPr id="9" name="TextBox 8"/>
+          <p:cNvSpPr txBox="1"/>
+          <p:nvPr/>
+        </p:nvSpPr>
+        <p:spPr>
+          <a:xfrm>
+            <a:off x="1051560" y="2606040"/>
+            <a:ext cx="4572000" cy="640080"/>
+          </a:xfrm>
+          <a:prstGeom prst="rect">
+            <a:avLst/>
+          </a:prstGeom>
+          <a:noFill/>
+        </p:spPr>
+        <p:txBody>
+          <a:bodyPr wrap="square" lIns="0" tIns="0" rIns="0" bIns="0" anchor="t">
+            <a:spAutoFit/>
+          </a:bodyPr>
+          <a:lstStyle/>
+          <a:p>
+            <a:pPr algn="l">
+              <a:lnSpc>
+                <a:spcPct val="100000"/>
+              </a:lnSpc>
+              <a:spcBef>
+                <a:spcPts val="0"/>
+              </a:spcBef>
+              <a:spcAft>
+                <a:spcPts val="600"/>
+              </a:spcAft>
+            </a:pPr>
+            <a:r>
+              <a:rPr sz="2800" b="1" i="0">
+                <a:solidFill>
+                  <a:srgbClr val="FFFFFF"/>
+                </a:solidFill>
+                <a:latin typeface="Segoe UI"/>
+              </a:rPr>
+              <a:t>ProjexCloud</a:t>
+            </a:r>
+          </a:p>
+        </p:txBody>
+      </p:sp>
+      <p:sp>
+        <p:nvSpPr>
+          <p:cNvPr id="10" name="TextBox 9"/>
+          <p:cNvSpPr txBox="1"/>
+          <p:nvPr/>
+        </p:nvSpPr>
+        <p:spPr>
+          <a:xfrm>
+            <a:off x="1051560" y="3383280"/>
+            <a:ext cx="4663440" cy="2468880"/>
+          </a:xfrm>
+          <a:prstGeom prst="rect">
+            <a:avLst/>
+          </a:prstGeom>
+          <a:noFill/>
+        </p:spPr>
+        <p:txBody>
+          <a:bodyPr wrap="square" lIns="0" tIns="0" rIns="0" bIns="0">
+            <a:spAutoFit/>
+          </a:bodyPr>
+          <a:lstStyle/>
+          <a:p>
+            <a:pPr>
+              <a:lnSpc>
+                <a:spcPct val="105000"/>
+              </a:lnSpc>
+              <a:spcBef>
+                <a:spcPts val="0"/>
+              </a:spcBef>
+              <a:spcAft>
+                <a:spcPts val="1100"/>
+              </a:spcAft>
+            </a:pPr>
+            <a:r>
+              <a:rPr sz="1500" b="0">
+                <a:solidFill>
+                  <a:srgbClr val="C9D4E6"/>
+                </a:solidFill>
+                <a:latin typeface="Segoe UI"/>
+              </a:rPr>
+              <a:t>•  Multi-tenant, petabyte-ready data platform</a:t>
+            </a:r>
+          </a:p>
+          <a:p>
+            <a:pPr>
+              <a:lnSpc>
+                <a:spcPct val="105000"/>
+              </a:lnSpc>
+              <a:spcBef>
+                <a:spcPts val="0"/>
+              </a:spcBef>
+              <a:spcAft>
+                <a:spcPts val="1100"/>
+              </a:spcAft>
+            </a:pPr>
+            <a:r>
+              <a:rPr sz="1500" b="0">
+                <a:solidFill>
+                  <a:srgbClr val="C9D4E6"/>
+                </a:solidFill>
+                <a:latin typeface="Segoe UI"/>
+              </a:rPr>
+              <a:t>•  Tenants · projects · workspaces for fleets, plants &amp; OEMs</a:t>
+            </a:r>
+          </a:p>
+          <a:p>
+            <a:pPr>
+              <a:lnSpc>
+                <a:spcPct val="105000"/>
+              </a:lnSpc>
+              <a:spcBef>
+                <a:spcPts val="0"/>
+              </a:spcBef>
+              <a:spcAft>
+                <a:spcPts val="1100"/>
+              </a:spcAft>
+            </a:pPr>
+            <a:r>
+              <a:rPr sz="1500" b="0">
+                <a:solidFill>
+                  <a:srgbClr val="C9D4E6"/>
+                </a:solidFill>
+                <a:latin typeface="Segoe UI"/>
+              </a:rPr>
+              <a:t>•  ClickHouse analytics + pgvector embeddings</a:t>
+            </a:r>
+          </a:p>
+          <a:p>
+            <a:pPr>
+              <a:lnSpc>
+                <a:spcPct val="105000"/>
+              </a:lnSpc>
+              <a:spcBef>
+                <a:spcPts val="0"/>
+              </a:spcBef>
+              <a:spcAft>
+                <a:spcPts val="1100"/>
+              </a:spcAft>
+            </a:pPr>
+            <a:r>
+              <a:rPr sz="1500" b="0">
+                <a:solidFill>
+                  <a:srgbClr val="C9D4E6"/>
+                </a:solidFill>
+                <a:latin typeface="Segoe UI"/>
+              </a:rPr>
+              <a:t>•  Identity · metering · billing · tamper-evident audit</a:t>
+            </a:r>
+          </a:p>
+          <a:p>
+            <a:pPr>
+              <a:lnSpc>
+                <a:spcPct val="105000"/>
+              </a:lnSpc>
+              <a:spcBef>
+                <a:spcPts val="0"/>
+              </a:spcBef>
+              <a:spcAft>
+                <a:spcPts val="1100"/>
+              </a:spcAft>
+            </a:pPr>
+            <a:r>
+              <a:rPr sz="1500" b="0">
+                <a:solidFill>
+                  <a:srgbClr val="C9D4E6"/>
+                </a:solidFill>
+                <a:latin typeface="Segoe UI"/>
+              </a:rPr>
+              <a:t>•  AI Gateway with per-tenant keys &amp; guardrails</a:t>
+            </a:r>
+          </a:p>
+        </p:txBody>
+      </p:sp>
+      <p:sp>
+        <p:nvSpPr>
+          <p:cNvPr id="11" name="Rounded Rectangle 10"/>
+          <p:cNvSpPr/>
+          <p:nvPr/>
+        </p:nvSpPr>
+        <p:spPr>
+          <a:xfrm>
+            <a:off x="6309360" y="2011680"/>
+            <a:ext cx="5349240" cy="4023360"/>
+          </a:xfrm>
+          <a:prstGeom prst="roundRect">
+            <a:avLst/>
+          </a:prstGeom>
+          <a:solidFill>
+            <a:srgbClr val="122A4D"/>
+          </a:solidFill>
+          <a:ln>
+            <a:noFill/>
+          </a:ln>
+          <a:effectLst/>
+        </p:spPr>
+        <p:style>
+          <a:lnRef idx="1">
+            <a:schemeClr val="accent1"/>
+          </a:lnRef>
+          <a:fillRef idx="3">
+            <a:schemeClr val="accent1"/>
+          </a:fillRef>
+          <a:effectRef idx="2">
+            <a:schemeClr val="accent1"/>
+          </a:effectRef>
+          <a:fontRef idx="minor">
+            <a:schemeClr val="lt1"/>
+          </a:fontRef>
+        </p:style>
+        <p:txBody>
+          <a:bodyPr rtlCol="0" anchor="ctr"/>
+          <a:lstStyle/>
+          <a:p>
+            <a:pPr algn="ctr"/>
+            <a:endParaRPr/>
+          </a:p>
+        </p:txBody>
+      </p:sp>
+      <p:sp>
+        <p:nvSpPr>
+          <p:cNvPr id="12" name="Rectangle 11"/>
+          <p:cNvSpPr/>
+          <p:nvPr/>
+        </p:nvSpPr>
+        <p:spPr>
+          <a:xfrm>
+            <a:off x="6309360" y="2011680"/>
+            <a:ext cx="5349240" cy="109728"/>
           </a:xfrm>
           <a:prstGeom prst="rect">
             <a:avLst/>
@@ -5564,106 +5920,19 @@
           <a:lstStyle/>
           <a:p>
             <a:pPr algn="ctr"/>
-          </a:p>
-        </p:txBody>
-      </p:sp>
-      <p:sp>
-        <p:nvSpPr>
-          <p:cNvPr id="6" name="Rounded Rectangle 5"/>
-          <p:cNvSpPr/>
-          <p:nvPr/>
-        </p:nvSpPr>
-        <p:spPr>
-          <a:xfrm>
-            <a:off x="640080" y="2011680"/>
-            <a:ext cx="5349240" cy="4023360"/>
-          </a:xfrm>
-          <a:prstGeom prst="roundRect">
-            <a:avLst/>
-          </a:prstGeom>
-          <a:solidFill>
-            <a:srgbClr val="122A4D"/>
-          </a:solidFill>
-          <a:ln>
-            <a:noFill/>
-          </a:ln>
-          <a:effectLst/>
-        </p:spPr>
-        <p:style>
-          <a:lnRef idx="1">
-            <a:schemeClr val="accent1"/>
-          </a:lnRef>
-          <a:fillRef idx="3">
-            <a:schemeClr val="accent1"/>
-          </a:fillRef>
-          <a:effectRef idx="2">
-            <a:schemeClr val="accent1"/>
-          </a:effectRef>
-          <a:fontRef idx="minor">
-            <a:schemeClr val="lt1"/>
-          </a:fontRef>
-        </p:style>
-        <p:txBody>
-          <a:bodyPr rtlCol="0" anchor="ctr"/>
-          <a:lstStyle/>
-          <a:p>
-            <a:pPr algn="ctr"/>
-          </a:p>
-        </p:txBody>
-      </p:sp>
-      <p:sp>
-        <p:nvSpPr>
-          <p:cNvPr id="7" name="Rectangle 6"/>
-          <p:cNvSpPr/>
-          <p:nvPr/>
-        </p:nvSpPr>
-        <p:spPr>
-          <a:xfrm>
-            <a:off x="640080" y="2011680"/>
-            <a:ext cx="5349240" cy="109728"/>
-          </a:xfrm>
-          <a:prstGeom prst="rect">
-            <a:avLst/>
-          </a:prstGeom>
-          <a:solidFill>
-            <a:srgbClr val="2E6BF0"/>
-          </a:solidFill>
-          <a:ln>
-            <a:noFill/>
-          </a:ln>
-          <a:effectLst/>
-        </p:spPr>
-        <p:style>
-          <a:lnRef idx="1">
-            <a:schemeClr val="accent1"/>
-          </a:lnRef>
-          <a:fillRef idx="3">
-            <a:schemeClr val="accent1"/>
-          </a:fillRef>
-          <a:effectRef idx="2">
-            <a:schemeClr val="accent1"/>
-          </a:effectRef>
-          <a:fontRef idx="minor">
-            <a:schemeClr val="lt1"/>
-          </a:fontRef>
-        </p:style>
-        <p:txBody>
-          <a:bodyPr rtlCol="0" anchor="ctr"/>
-          <a:lstStyle/>
-          <a:p>
-            <a:pPr algn="ctr"/>
-          </a:p>
-        </p:txBody>
-      </p:sp>
-      <p:sp>
-        <p:nvSpPr>
-          <p:cNvPr id="8" name="TextBox 7"/>
+            <a:endParaRPr/>
+          </a:p>
+        </p:txBody>
+      </p:sp>
+      <p:sp>
+        <p:nvSpPr>
+          <p:cNvPr id="13" name="TextBox 12"/>
           <p:cNvSpPr txBox="1"/>
           <p:nvPr/>
         </p:nvSpPr>
         <p:spPr>
           <a:xfrm>
-            <a:off x="1051560" y="2286000"/>
+            <a:off x="6720840" y="2286000"/>
             <a:ext cx="4572000" cy="457200"/>
           </a:xfrm>
           <a:prstGeom prst="rect">
@@ -5672,7 +5941,7 @@
           <a:noFill/>
         </p:spPr>
         <p:txBody>
-          <a:bodyPr wrap="square" anchor="t" lIns="0" rIns="0" tIns="0" bIns="0">
+          <a:bodyPr wrap="square" lIns="0" tIns="0" rIns="0" bIns="0" anchor="t">
             <a:spAutoFit/>
           </a:bodyPr>
           <a:lstStyle/>
@@ -5691,24 +5960,24 @@
             <a:r>
               <a:rPr sz="1300" b="1" i="0">
                 <a:solidFill>
-                  <a:srgbClr val="2E6BF0"/>
-                </a:solidFill>
-                <a:latin typeface="Segoe UI"/>
-              </a:rPr>
-              <a:t>DATA BACKBONE</a:t>
-            </a:r>
-          </a:p>
-        </p:txBody>
-      </p:sp>
-      <p:sp>
-        <p:nvSpPr>
-          <p:cNvPr id="9" name="TextBox 8"/>
+                  <a:srgbClr val="27D3C4"/>
+                </a:solidFill>
+                <a:latin typeface="Segoe UI"/>
+              </a:rPr>
+              <a:t>CONTROL PLANE</a:t>
+            </a:r>
+          </a:p>
+        </p:txBody>
+      </p:sp>
+      <p:sp>
+        <p:nvSpPr>
+          <p:cNvPr id="14" name="TextBox 13"/>
           <p:cNvSpPr txBox="1"/>
           <p:nvPr/>
         </p:nvSpPr>
         <p:spPr>
           <a:xfrm>
-            <a:off x="1051560" y="2606040"/>
+            <a:off x="6720840" y="2606040"/>
             <a:ext cx="4572000" cy="640080"/>
           </a:xfrm>
           <a:prstGeom prst="rect">
@@ -5717,7 +5986,7 @@
           <a:noFill/>
         </p:spPr>
         <p:txBody>
-          <a:bodyPr wrap="square" anchor="t" lIns="0" rIns="0" tIns="0" bIns="0">
+          <a:bodyPr wrap="square" lIns="0" tIns="0" rIns="0" bIns="0" anchor="t">
             <a:spAutoFit/>
           </a:bodyPr>
           <a:lstStyle/>
@@ -5740,20 +6009,20 @@
                 </a:solidFill>
                 <a:latin typeface="Segoe UI"/>
               </a:rPr>
-              <a:t>ProjexCloud</a:t>
-            </a:r>
-          </a:p>
-        </p:txBody>
-      </p:sp>
-      <p:sp>
-        <p:nvSpPr>
-          <p:cNvPr id="10" name="TextBox 9"/>
+              <a:t>Projexlight</a:t>
+            </a:r>
+          </a:p>
+        </p:txBody>
+      </p:sp>
+      <p:sp>
+        <p:nvSpPr>
+          <p:cNvPr id="15" name="TextBox 14"/>
           <p:cNvSpPr txBox="1"/>
           <p:nvPr/>
         </p:nvSpPr>
         <p:spPr>
           <a:xfrm>
-            <a:off x="1051560" y="3383280"/>
+            <a:off x="6720840" y="3383280"/>
             <a:ext cx="4663440" cy="2468880"/>
           </a:xfrm>
           <a:prstGeom prst="rect">
@@ -5762,7 +6031,7 @@
           <a:noFill/>
         </p:spPr>
         <p:txBody>
-          <a:bodyPr wrap="square" lIns="0" rIns="0" tIns="0" bIns="0">
+          <a:bodyPr wrap="square" lIns="0" tIns="0" rIns="0" bIns="0">
             <a:spAutoFit/>
           </a:bodyPr>
           <a:lstStyle/>
@@ -5785,7 +6054,7 @@
                 </a:solidFill>
                 <a:latin typeface="Segoe UI"/>
               </a:rPr>
-              <a:t>•  Multi-tenant, petabyte-ready data platform</a:t>
+              <a:t>•  Sits on top of coding agents — drives &amp; governs them</a:t>
             </a:r>
           </a:p>
           <a:p>
@@ -5807,7 +6076,7 @@
                 </a:solidFill>
                 <a:latin typeface="Segoe UI"/>
               </a:rPr>
-              <a:t>•  Tenants · projects · workspaces for fleets, plants &amp; OEMs</a:t>
+              <a:t>•  Blueprint-driven SDLC: features, APIs, BDD, acceptance</a:t>
             </a:r>
           </a:p>
           <a:p>
@@ -5829,7 +6098,7 @@
                 </a:solidFill>
                 <a:latin typeface="Segoe UI"/>
               </a:rPr>
-              <a:t>•  ClickHouse analytics + pgvector embeddings</a:t>
+              <a:t>•  Control at task · scenario · feature level</a:t>
             </a:r>
           </a:p>
           <a:p>
@@ -5851,7 +6120,7 @@
                 </a:solidFill>
                 <a:latin typeface="Segoe UI"/>
               </a:rPr>
-              <a:t>•  Identity · metering · billing · tamper-evident audit</a:t>
+              <a:t>•  Validates &amp; auto-fixes every change early</a:t>
             </a:r>
           </a:p>
           <a:p>
@@ -5873,109 +6142,21 @@
                 </a:solidFill>
                 <a:latin typeface="Segoe UI"/>
               </a:rPr>
-              <a:t>•  AI Gateway with per-tenant keys &amp; guardrails</a:t>
-            </a:r>
-          </a:p>
-        </p:txBody>
-      </p:sp>
-      <p:sp>
-        <p:nvSpPr>
-          <p:cNvPr id="11" name="Rounded Rectangle 10"/>
-          <p:cNvSpPr/>
-          <p:nvPr/>
-        </p:nvSpPr>
-        <p:spPr>
-          <a:xfrm>
-            <a:off x="6309360" y="2011680"/>
-            <a:ext cx="5349240" cy="4023360"/>
-          </a:xfrm>
-          <a:prstGeom prst="roundRect">
-            <a:avLst/>
-          </a:prstGeom>
-          <a:solidFill>
-            <a:srgbClr val="122A4D"/>
-          </a:solidFill>
-          <a:ln>
-            <a:noFill/>
-          </a:ln>
-          <a:effectLst/>
-        </p:spPr>
-        <p:style>
-          <a:lnRef idx="1">
-            <a:schemeClr val="accent1"/>
-          </a:lnRef>
-          <a:fillRef idx="3">
-            <a:schemeClr val="accent1"/>
-          </a:fillRef>
-          <a:effectRef idx="2">
-            <a:schemeClr val="accent1"/>
-          </a:effectRef>
-          <a:fontRef idx="minor">
-            <a:schemeClr val="lt1"/>
-          </a:fontRef>
-        </p:style>
-        <p:txBody>
-          <a:bodyPr rtlCol="0" anchor="ctr"/>
-          <a:lstStyle/>
-          <a:p>
-            <a:pPr algn="ctr"/>
-          </a:p>
-        </p:txBody>
-      </p:sp>
-      <p:sp>
-        <p:nvSpPr>
-          <p:cNvPr id="12" name="Rectangle 11"/>
-          <p:cNvSpPr/>
-          <p:nvPr/>
-        </p:nvSpPr>
-        <p:spPr>
-          <a:xfrm>
-            <a:off x="6309360" y="2011680"/>
-            <a:ext cx="5349240" cy="109728"/>
-          </a:xfrm>
-          <a:prstGeom prst="rect">
-            <a:avLst/>
-          </a:prstGeom>
-          <a:solidFill>
-            <a:srgbClr val="27D3C4"/>
-          </a:solidFill>
-          <a:ln>
-            <a:noFill/>
-          </a:ln>
-          <a:effectLst/>
-        </p:spPr>
-        <p:style>
-          <a:lnRef idx="1">
-            <a:schemeClr val="accent1"/>
-          </a:lnRef>
-          <a:fillRef idx="3">
-            <a:schemeClr val="accent1"/>
-          </a:fillRef>
-          <a:effectRef idx="2">
-            <a:schemeClr val="accent1"/>
-          </a:effectRef>
-          <a:fontRef idx="minor">
-            <a:schemeClr val="lt1"/>
-          </a:fontRef>
-        </p:style>
-        <p:txBody>
-          <a:bodyPr rtlCol="0" anchor="ctr"/>
-          <a:lstStyle/>
-          <a:p>
-            <a:pPr algn="ctr"/>
-          </a:p>
-        </p:txBody>
-      </p:sp>
-      <p:sp>
-        <p:nvSpPr>
-          <p:cNvPr id="13" name="TextBox 12"/>
+              <a:t>•  Certification gates before customer release</a:t>
+            </a:r>
+          </a:p>
+        </p:txBody>
+      </p:sp>
+      <p:sp>
+        <p:nvSpPr>
+          <p:cNvPr id="16" name="TextBox 15"/>
           <p:cNvSpPr txBox="1"/>
           <p:nvPr/>
         </p:nvSpPr>
         <p:spPr>
           <a:xfrm>
-            <a:off x="6720840" y="2286000"/>
-            <a:ext cx="4572000" cy="457200"/>
+            <a:off x="5715000" y="3566160"/>
+            <a:ext cx="777240" cy="731520"/>
           </a:xfrm>
           <a:prstGeom prst="rect">
             <a:avLst/>
@@ -5983,12 +6164,12 @@
           <a:noFill/>
         </p:spPr>
         <p:txBody>
-          <a:bodyPr wrap="square" anchor="t" lIns="0" rIns="0" tIns="0" bIns="0">
+          <a:bodyPr wrap="square" lIns="0" tIns="0" rIns="0" bIns="0" anchor="t">
             <a:spAutoFit/>
           </a:bodyPr>
           <a:lstStyle/>
           <a:p>
-            <a:pPr algn="l">
+            <a:pPr algn="ctr">
               <a:lnSpc>
                 <a:spcPct val="100000"/>
               </a:lnSpc>
@@ -6000,27 +6181,27 @@
               </a:spcAft>
             </a:pPr>
             <a:r>
-              <a:rPr sz="1300" b="1" i="0">
-                <a:solidFill>
-                  <a:srgbClr val="27D3C4"/>
-                </a:solidFill>
-                <a:latin typeface="Segoe UI"/>
-              </a:rPr>
-              <a:t>CONTROL PLANE</a:t>
-            </a:r>
-          </a:p>
-        </p:txBody>
-      </p:sp>
-      <p:sp>
-        <p:nvSpPr>
-          <p:cNvPr id="14" name="TextBox 13"/>
+              <a:rPr sz="4000" b="1" i="0">
+                <a:solidFill>
+                  <a:srgbClr val="FFFFFF"/>
+                </a:solidFill>
+                <a:latin typeface="Segoe UI"/>
+              </a:rPr>
+              <a:t>+</a:t>
+            </a:r>
+          </a:p>
+        </p:txBody>
+      </p:sp>
+      <p:sp>
+        <p:nvSpPr>
+          <p:cNvPr id="17" name="TextBox 16"/>
           <p:cNvSpPr txBox="1"/>
           <p:nvPr/>
         </p:nvSpPr>
         <p:spPr>
           <a:xfrm>
-            <a:off x="6720840" y="2606040"/>
-            <a:ext cx="4572000" cy="640080"/>
+            <a:off x="11338560" y="6400800"/>
+            <a:ext cx="640080" cy="365760"/>
           </a:xfrm>
           <a:prstGeom prst="rect">
             <a:avLst/>
@@ -6028,234 +6209,11 @@
           <a:noFill/>
         </p:spPr>
         <p:txBody>
-          <a:bodyPr wrap="square" anchor="t" lIns="0" rIns="0" tIns="0" bIns="0">
+          <a:bodyPr wrap="square" lIns="0" tIns="0" rIns="0" bIns="0" anchor="t">
             <a:spAutoFit/>
           </a:bodyPr>
           <a:lstStyle/>
           <a:p>
-            <a:pPr algn="l">
-              <a:lnSpc>
-                <a:spcPct val="100000"/>
-              </a:lnSpc>
-              <a:spcBef>
-                <a:spcPts val="0"/>
-              </a:spcBef>
-              <a:spcAft>
-                <a:spcPts val="600"/>
-              </a:spcAft>
-            </a:pPr>
-            <a:r>
-              <a:rPr sz="2800" b="1" i="0">
-                <a:solidFill>
-                  <a:srgbClr val="FFFFFF"/>
-                </a:solidFill>
-                <a:latin typeface="Segoe UI"/>
-              </a:rPr>
-              <a:t>Projexlight</a:t>
-            </a:r>
-          </a:p>
-        </p:txBody>
-      </p:sp>
-      <p:sp>
-        <p:nvSpPr>
-          <p:cNvPr id="15" name="TextBox 14"/>
-          <p:cNvSpPr txBox="1"/>
-          <p:nvPr/>
-        </p:nvSpPr>
-        <p:spPr>
-          <a:xfrm>
-            <a:off x="6720840" y="3383280"/>
-            <a:ext cx="4663440" cy="2468880"/>
-          </a:xfrm>
-          <a:prstGeom prst="rect">
-            <a:avLst/>
-          </a:prstGeom>
-          <a:noFill/>
-        </p:spPr>
-        <p:txBody>
-          <a:bodyPr wrap="square" lIns="0" rIns="0" tIns="0" bIns="0">
-            <a:spAutoFit/>
-          </a:bodyPr>
-          <a:lstStyle/>
-          <a:p>
-            <a:pPr>
-              <a:lnSpc>
-                <a:spcPct val="105000"/>
-              </a:lnSpc>
-              <a:spcBef>
-                <a:spcPts val="0"/>
-              </a:spcBef>
-              <a:spcAft>
-                <a:spcPts val="1100"/>
-              </a:spcAft>
-            </a:pPr>
-            <a:r>
-              <a:rPr sz="1500" b="0">
-                <a:solidFill>
-                  <a:srgbClr val="C9D4E6"/>
-                </a:solidFill>
-                <a:latin typeface="Segoe UI"/>
-              </a:rPr>
-              <a:t>•  Sits on top of coding agents — drives &amp; governs them</a:t>
-            </a:r>
-          </a:p>
-          <a:p>
-            <a:pPr>
-              <a:lnSpc>
-                <a:spcPct val="105000"/>
-              </a:lnSpc>
-              <a:spcBef>
-                <a:spcPts val="0"/>
-              </a:spcBef>
-              <a:spcAft>
-                <a:spcPts val="1100"/>
-              </a:spcAft>
-            </a:pPr>
-            <a:r>
-              <a:rPr sz="1500" b="0">
-                <a:solidFill>
-                  <a:srgbClr val="C9D4E6"/>
-                </a:solidFill>
-                <a:latin typeface="Segoe UI"/>
-              </a:rPr>
-              <a:t>•  Blueprint-driven SDLC: features, APIs, BDD, acceptance</a:t>
-            </a:r>
-          </a:p>
-          <a:p>
-            <a:pPr>
-              <a:lnSpc>
-                <a:spcPct val="105000"/>
-              </a:lnSpc>
-              <a:spcBef>
-                <a:spcPts val="0"/>
-              </a:spcBef>
-              <a:spcAft>
-                <a:spcPts val="1100"/>
-              </a:spcAft>
-            </a:pPr>
-            <a:r>
-              <a:rPr sz="1500" b="0">
-                <a:solidFill>
-                  <a:srgbClr val="C9D4E6"/>
-                </a:solidFill>
-                <a:latin typeface="Segoe UI"/>
-              </a:rPr>
-              <a:t>•  Control at task · scenario · feature level</a:t>
-            </a:r>
-          </a:p>
-          <a:p>
-            <a:pPr>
-              <a:lnSpc>
-                <a:spcPct val="105000"/>
-              </a:lnSpc>
-              <a:spcBef>
-                <a:spcPts val="0"/>
-              </a:spcBef>
-              <a:spcAft>
-                <a:spcPts val="1100"/>
-              </a:spcAft>
-            </a:pPr>
-            <a:r>
-              <a:rPr sz="1500" b="0">
-                <a:solidFill>
-                  <a:srgbClr val="C9D4E6"/>
-                </a:solidFill>
-                <a:latin typeface="Segoe UI"/>
-              </a:rPr>
-              <a:t>•  Validates &amp; auto-fixes every change early</a:t>
-            </a:r>
-          </a:p>
-          <a:p>
-            <a:pPr>
-              <a:lnSpc>
-                <a:spcPct val="105000"/>
-              </a:lnSpc>
-              <a:spcBef>
-                <a:spcPts val="0"/>
-              </a:spcBef>
-              <a:spcAft>
-                <a:spcPts val="1100"/>
-              </a:spcAft>
-            </a:pPr>
-            <a:r>
-              <a:rPr sz="1500" b="0">
-                <a:solidFill>
-                  <a:srgbClr val="C9D4E6"/>
-                </a:solidFill>
-                <a:latin typeface="Segoe UI"/>
-              </a:rPr>
-              <a:t>•  Certification gates before customer release</a:t>
-            </a:r>
-          </a:p>
-        </p:txBody>
-      </p:sp>
-      <p:sp>
-        <p:nvSpPr>
-          <p:cNvPr id="16" name="TextBox 15"/>
-          <p:cNvSpPr txBox="1"/>
-          <p:nvPr/>
-        </p:nvSpPr>
-        <p:spPr>
-          <a:xfrm>
-            <a:off x="5715000" y="3566160"/>
-            <a:ext cx="777240" cy="731520"/>
-          </a:xfrm>
-          <a:prstGeom prst="rect">
-            <a:avLst/>
-          </a:prstGeom>
-          <a:noFill/>
-        </p:spPr>
-        <p:txBody>
-          <a:bodyPr wrap="square" anchor="t" lIns="0" rIns="0" tIns="0" bIns="0">
-            <a:spAutoFit/>
-          </a:bodyPr>
-          <a:lstStyle/>
-          <a:p>
-            <a:pPr algn="ctr">
-              <a:lnSpc>
-                <a:spcPct val="100000"/>
-              </a:lnSpc>
-              <a:spcBef>
-                <a:spcPts val="0"/>
-              </a:spcBef>
-              <a:spcAft>
-                <a:spcPts val="600"/>
-              </a:spcAft>
-            </a:pPr>
-            <a:r>
-              <a:rPr sz="4000" b="1" i="0">
-                <a:solidFill>
-                  <a:srgbClr val="FFFFFF"/>
-                </a:solidFill>
-                <a:latin typeface="Segoe UI"/>
-              </a:rPr>
-              <a:t>+</a:t>
-            </a:r>
-          </a:p>
-        </p:txBody>
-      </p:sp>
-      <p:sp>
-        <p:nvSpPr>
-          <p:cNvPr id="17" name="TextBox 16"/>
-          <p:cNvSpPr txBox="1"/>
-          <p:nvPr/>
-        </p:nvSpPr>
-        <p:spPr>
-          <a:xfrm>
-            <a:off x="11338560" y="6400800"/>
-            <a:ext cx="640080" cy="365760"/>
-          </a:xfrm>
-          <a:prstGeom prst="rect">
-            <a:avLst/>
-          </a:prstGeom>
-          <a:noFill/>
-        </p:spPr>
-        <p:txBody>
-          <a:bodyPr wrap="square" anchor="t" lIns="0" rIns="0" tIns="0" bIns="0">
-            <a:spAutoFit/>
-          </a:bodyPr>
-          <a:lstStyle/>
-          <a:p>
             <a:pPr algn="r">
               <a:lnSpc>
                 <a:spcPct val="100000"/>
@@ -6296,7 +6254,7 @@
           <a:noFill/>
         </p:spPr>
         <p:txBody>
-          <a:bodyPr wrap="square" anchor="t" lIns="0" rIns="0" tIns="0" bIns="0">
+          <a:bodyPr wrap="square" lIns="0" tIns="0" rIns="0" bIns="0" anchor="t">
             <a:spAutoFit/>
           </a:bodyPr>
           <a:lstStyle/>
@@ -6333,7 +6291,7 @@
 </file>
 
 <file path=ppt/slides/slide4.xml><?xml version="1.0" encoding="utf-8"?>
-<p:sld xmlns:a="http://schemas.openxmlformats.org/drawingml/2006/main" xmlns:p="http://schemas.openxmlformats.org/presentationml/2006/main" xmlns:r="http://schemas.openxmlformats.org/officeDocument/2006/relationships">
+<p:sld xmlns:a="http://schemas.openxmlformats.org/drawingml/2006/main" xmlns:r="http://schemas.openxmlformats.org/officeDocument/2006/relationships" xmlns:p="http://schemas.openxmlformats.org/presentationml/2006/main">
   <p:cSld>
     <p:bg>
       <p:bgPr>
@@ -6349,7 +6307,14 @@
         <p:cNvGrpSpPr/>
         <p:nvPr/>
       </p:nvGrpSpPr>
-      <p:grpSpPr/>
+      <p:grpSpPr>
+        <a:xfrm>
+          <a:off x="0" y="0"/>
+          <a:ext cx="0" cy="0"/>
+          <a:chOff x="0" y="0"/>
+          <a:chExt cx="0" cy="0"/>
+        </a:xfrm>
+      </p:grpSpPr>
       <p:sp>
         <p:nvSpPr>
           <p:cNvPr id="2" name="Rectangle 1"/>
@@ -6391,6 +6356,7 @@
           <a:lstStyle/>
           <a:p>
             <a:pPr algn="ctr"/>
+            <a:endParaRPr/>
           </a:p>
         </p:txBody>
       </p:sp>
@@ -6411,7 +6377,7 @@
           <a:noFill/>
         </p:spPr>
         <p:txBody>
-          <a:bodyPr wrap="square" anchor="t" lIns="0" rIns="0" tIns="0" bIns="0">
+          <a:bodyPr wrap="square" lIns="0" tIns="0" rIns="0" bIns="0" anchor="t">
             <a:spAutoFit/>
           </a:bodyPr>
           <a:lstStyle/>
@@ -6456,7 +6422,7 @@
           <a:noFill/>
         </p:spPr>
         <p:txBody>
-          <a:bodyPr wrap="square" anchor="t" lIns="0" rIns="0" tIns="0" bIns="0">
+          <a:bodyPr wrap="square" lIns="0" tIns="0" rIns="0" bIns="0" anchor="t">
             <a:spAutoFit/>
           </a:bodyPr>
           <a:lstStyle/>
@@ -6481,50 +6447,6 @@
               </a:rPr>
               <a:t>ProjexCloud — AI data backbone for robots &amp; smart factories</a:t>
             </a:r>
-          </a:p>
-        </p:txBody>
-      </p:sp>
-      <p:sp>
-        <p:nvSpPr>
-          <p:cNvPr id="5" name="Rectangle 4"/>
-          <p:cNvSpPr/>
-          <p:nvPr/>
-        </p:nvSpPr>
-        <p:spPr>
-          <a:xfrm>
-            <a:off x="640080" y="1691640"/>
-            <a:ext cx="822960" cy="64008"/>
-          </a:xfrm>
-          <a:prstGeom prst="rect">
-            <a:avLst/>
-          </a:prstGeom>
-          <a:solidFill>
-            <a:srgbClr val="27D3C4"/>
-          </a:solidFill>
-          <a:ln>
-            <a:noFill/>
-          </a:ln>
-          <a:effectLst/>
-        </p:spPr>
-        <p:style>
-          <a:lnRef idx="1">
-            <a:schemeClr val="accent1"/>
-          </a:lnRef>
-          <a:fillRef idx="3">
-            <a:schemeClr val="accent1"/>
-          </a:fillRef>
-          <a:effectRef idx="2">
-            <a:schemeClr val="accent1"/>
-          </a:effectRef>
-          <a:fontRef idx="minor">
-            <a:schemeClr val="lt1"/>
-          </a:fontRef>
-        </p:style>
-        <p:txBody>
-          <a:bodyPr rtlCol="0" anchor="ctr"/>
-          <a:lstStyle/>
-          <a:p>
-            <a:pPr algn="ctr"/>
           </a:p>
         </p:txBody>
       </p:sp>
@@ -6569,6 +6491,7 @@
           <a:lstStyle/>
           <a:p>
             <a:pPr algn="ctr"/>
+            <a:endParaRPr/>
           </a:p>
         </p:txBody>
       </p:sp>
@@ -6613,6 +6536,7 @@
           <a:lstStyle/>
           <a:p>
             <a:pPr algn="ctr"/>
+            <a:endParaRPr/>
           </a:p>
         </p:txBody>
       </p:sp>
@@ -6633,7 +6557,7 @@
           <a:noFill/>
         </p:spPr>
         <p:txBody>
-          <a:bodyPr wrap="square" anchor="t" lIns="0" rIns="0" tIns="0" bIns="0">
+          <a:bodyPr wrap="square" lIns="0" tIns="0" rIns="0" bIns="0" anchor="t">
             <a:spAutoFit/>
           </a:bodyPr>
           <a:lstStyle/>
@@ -6678,7 +6602,7 @@
           <a:noFill/>
         </p:spPr>
         <p:txBody>
-          <a:bodyPr wrap="square" anchor="t" lIns="0" rIns="0" tIns="0" bIns="0">
+          <a:bodyPr wrap="square" lIns="0" tIns="0" rIns="0" bIns="0" anchor="t">
             <a:spAutoFit/>
           </a:bodyPr>
           <a:lstStyle/>
@@ -6747,6 +6671,7 @@
           <a:lstStyle/>
           <a:p>
             <a:pPr algn="ctr"/>
+            <a:endParaRPr/>
           </a:p>
         </p:txBody>
       </p:sp>
@@ -6791,6 +6716,7 @@
           <a:lstStyle/>
           <a:p>
             <a:pPr algn="ctr"/>
+            <a:endParaRPr/>
           </a:p>
         </p:txBody>
       </p:sp>
@@ -6811,7 +6737,7 @@
           <a:noFill/>
         </p:spPr>
         <p:txBody>
-          <a:bodyPr wrap="square" anchor="t" lIns="0" rIns="0" tIns="0" bIns="0">
+          <a:bodyPr wrap="square" lIns="0" tIns="0" rIns="0" bIns="0" anchor="t">
             <a:spAutoFit/>
           </a:bodyPr>
           <a:lstStyle/>
@@ -6856,7 +6782,7 @@
           <a:noFill/>
         </p:spPr>
         <p:txBody>
-          <a:bodyPr wrap="square" anchor="t" lIns="0" rIns="0" tIns="0" bIns="0">
+          <a:bodyPr wrap="square" lIns="0" tIns="0" rIns="0" bIns="0" anchor="t">
             <a:spAutoFit/>
           </a:bodyPr>
           <a:lstStyle/>
@@ -6925,6 +6851,7 @@
           <a:lstStyle/>
           <a:p>
             <a:pPr algn="ctr"/>
+            <a:endParaRPr/>
           </a:p>
         </p:txBody>
       </p:sp>
@@ -6969,6 +6896,7 @@
           <a:lstStyle/>
           <a:p>
             <a:pPr algn="ctr"/>
+            <a:endParaRPr/>
           </a:p>
         </p:txBody>
       </p:sp>
@@ -6989,7 +6917,7 @@
           <a:noFill/>
         </p:spPr>
         <p:txBody>
-          <a:bodyPr wrap="square" anchor="t" lIns="0" rIns="0" tIns="0" bIns="0">
+          <a:bodyPr wrap="square" lIns="0" tIns="0" rIns="0" bIns="0" anchor="t">
             <a:spAutoFit/>
           </a:bodyPr>
           <a:lstStyle/>
@@ -7034,7 +6962,7 @@
           <a:noFill/>
         </p:spPr>
         <p:txBody>
-          <a:bodyPr wrap="square" anchor="t" lIns="0" rIns="0" tIns="0" bIns="0">
+          <a:bodyPr wrap="square" lIns="0" tIns="0" rIns="0" bIns="0" anchor="t">
             <a:spAutoFit/>
           </a:bodyPr>
           <a:lstStyle/>
@@ -7103,6 +7031,7 @@
           <a:lstStyle/>
           <a:p>
             <a:pPr algn="ctr"/>
+            <a:endParaRPr/>
           </a:p>
         </p:txBody>
       </p:sp>
@@ -7147,6 +7076,7 @@
           <a:lstStyle/>
           <a:p>
             <a:pPr algn="ctr"/>
+            <a:endParaRPr/>
           </a:p>
         </p:txBody>
       </p:sp>
@@ -7167,7 +7097,7 @@
           <a:noFill/>
         </p:spPr>
         <p:txBody>
-          <a:bodyPr wrap="square" anchor="t" lIns="0" rIns="0" tIns="0" bIns="0">
+          <a:bodyPr wrap="square" lIns="0" tIns="0" rIns="0" bIns="0" anchor="t">
             <a:spAutoFit/>
           </a:bodyPr>
           <a:lstStyle/>
@@ -7212,7 +7142,7 @@
           <a:noFill/>
         </p:spPr>
         <p:txBody>
-          <a:bodyPr wrap="square" anchor="t" lIns="0" rIns="0" tIns="0" bIns="0">
+          <a:bodyPr wrap="square" lIns="0" tIns="0" rIns="0" bIns="0" anchor="t">
             <a:spAutoFit/>
           </a:bodyPr>
           <a:lstStyle/>
@@ -7257,7 +7187,7 @@
           <a:noFill/>
         </p:spPr>
         <p:txBody>
-          <a:bodyPr wrap="square" anchor="t" lIns="0" rIns="0" tIns="0" bIns="0">
+          <a:bodyPr wrap="square" lIns="0" tIns="0" rIns="0" bIns="0" anchor="t">
             <a:spAutoFit/>
           </a:bodyPr>
           <a:lstStyle/>
@@ -7302,7 +7232,7 @@
           <a:noFill/>
         </p:spPr>
         <p:txBody>
-          <a:bodyPr wrap="square" anchor="t" lIns="0" rIns="0" tIns="0" bIns="0">
+          <a:bodyPr wrap="square" lIns="0" tIns="0" rIns="0" bIns="0" anchor="t">
             <a:spAutoFit/>
           </a:bodyPr>
           <a:lstStyle/>
@@ -7339,7 +7269,7 @@
 </file>
 
 <file path=ppt/slides/slide5.xml><?xml version="1.0" encoding="utf-8"?>
-<p:sld xmlns:a="http://schemas.openxmlformats.org/drawingml/2006/main" xmlns:p="http://schemas.openxmlformats.org/presentationml/2006/main" xmlns:r="http://schemas.openxmlformats.org/officeDocument/2006/relationships">
+<p:sld xmlns:a="http://schemas.openxmlformats.org/drawingml/2006/main" xmlns:r="http://schemas.openxmlformats.org/officeDocument/2006/relationships" xmlns:p="http://schemas.openxmlformats.org/presentationml/2006/main">
   <p:cSld>
     <p:bg>
       <p:bgPr>
@@ -7355,7 +7285,14 @@
         <p:cNvGrpSpPr/>
         <p:nvPr/>
       </p:nvGrpSpPr>
-      <p:grpSpPr/>
+      <p:grpSpPr>
+        <a:xfrm>
+          <a:off x="0" y="0"/>
+          <a:ext cx="0" cy="0"/>
+          <a:chOff x="0" y="0"/>
+          <a:chExt cx="0" cy="0"/>
+        </a:xfrm>
+      </p:grpSpPr>
       <p:sp>
         <p:nvSpPr>
           <p:cNvPr id="2" name="Rectangle 1"/>
@@ -7397,6 +7334,7 @@
           <a:lstStyle/>
           <a:p>
             <a:pPr algn="ctr"/>
+            <a:endParaRPr/>
           </a:p>
         </p:txBody>
       </p:sp>
@@ -7417,7 +7355,7 @@
           <a:noFill/>
         </p:spPr>
         <p:txBody>
-          <a:bodyPr wrap="square" anchor="t" lIns="0" rIns="0" tIns="0" bIns="0">
+          <a:bodyPr wrap="square" lIns="0" tIns="0" rIns="0" bIns="0" anchor="t">
             <a:spAutoFit/>
           </a:bodyPr>
           <a:lstStyle/>
@@ -7462,7 +7400,7 @@
           <a:noFill/>
         </p:spPr>
         <p:txBody>
-          <a:bodyPr wrap="square" anchor="t" lIns="0" rIns="0" tIns="0" bIns="0">
+          <a:bodyPr wrap="square" lIns="0" tIns="0" rIns="0" bIns="0" anchor="t">
             <a:spAutoFit/>
           </a:bodyPr>
           <a:lstStyle/>
@@ -7492,14 +7430,59 @@
       </p:sp>
       <p:sp>
         <p:nvSpPr>
-          <p:cNvPr id="5" name="Rectangle 4"/>
+          <p:cNvPr id="6" name="Rounded Rectangle 5"/>
           <p:cNvSpPr/>
           <p:nvPr/>
         </p:nvSpPr>
         <p:spPr>
           <a:xfrm>
-            <a:off x="640080" y="1691640"/>
-            <a:ext cx="822960" cy="64008"/>
+            <a:off x="640080" y="2057400"/>
+            <a:ext cx="5394960" cy="1828800"/>
+          </a:xfrm>
+          <a:prstGeom prst="roundRect">
+            <a:avLst/>
+          </a:prstGeom>
+          <a:solidFill>
+            <a:srgbClr val="122A4D"/>
+          </a:solidFill>
+          <a:ln>
+            <a:noFill/>
+          </a:ln>
+          <a:effectLst/>
+        </p:spPr>
+        <p:style>
+          <a:lnRef idx="1">
+            <a:schemeClr val="accent1"/>
+          </a:lnRef>
+          <a:fillRef idx="3">
+            <a:schemeClr val="accent1"/>
+          </a:fillRef>
+          <a:effectRef idx="2">
+            <a:schemeClr val="accent1"/>
+          </a:effectRef>
+          <a:fontRef idx="minor">
+            <a:schemeClr val="lt1"/>
+          </a:fontRef>
+        </p:style>
+        <p:txBody>
+          <a:bodyPr rtlCol="0" anchor="ctr"/>
+          <a:lstStyle/>
+          <a:p>
+            <a:pPr algn="ctr"/>
+            <a:endParaRPr/>
+          </a:p>
+        </p:txBody>
+      </p:sp>
+      <p:sp>
+        <p:nvSpPr>
+          <p:cNvPr id="7" name="Rectangle 6"/>
+          <p:cNvSpPr/>
+          <p:nvPr/>
+        </p:nvSpPr>
+        <p:spPr>
+          <a:xfrm>
+            <a:off x="640080" y="2057400"/>
+            <a:ext cx="109728" cy="1828800"/>
           </a:xfrm>
           <a:prstGeom prst="rect">
             <a:avLst/>
@@ -7531,18 +7514,109 @@
           <a:lstStyle/>
           <a:p>
             <a:pPr algn="ctr"/>
-          </a:p>
-        </p:txBody>
-      </p:sp>
-      <p:sp>
-        <p:nvSpPr>
-          <p:cNvPr id="6" name="Rounded Rectangle 5"/>
+            <a:endParaRPr/>
+          </a:p>
+        </p:txBody>
+      </p:sp>
+      <p:sp>
+        <p:nvSpPr>
+          <p:cNvPr id="8" name="TextBox 7"/>
+          <p:cNvSpPr txBox="1"/>
+          <p:nvPr/>
+        </p:nvSpPr>
+        <p:spPr>
+          <a:xfrm>
+            <a:off x="1005840" y="2286000"/>
+            <a:ext cx="4663440" cy="457200"/>
+          </a:xfrm>
+          <a:prstGeom prst="rect">
+            <a:avLst/>
+          </a:prstGeom>
+          <a:noFill/>
+        </p:spPr>
+        <p:txBody>
+          <a:bodyPr wrap="square" lIns="0" tIns="0" rIns="0" bIns="0" anchor="t">
+            <a:spAutoFit/>
+          </a:bodyPr>
+          <a:lstStyle/>
+          <a:p>
+            <a:pPr algn="l">
+              <a:lnSpc>
+                <a:spcPct val="100000"/>
+              </a:lnSpc>
+              <a:spcBef>
+                <a:spcPts val="0"/>
+              </a:spcBef>
+              <a:spcAft>
+                <a:spcPts val="600"/>
+              </a:spcAft>
+            </a:pPr>
+            <a:r>
+              <a:rPr sz="1900" b="1" i="0">
+                <a:solidFill>
+                  <a:srgbClr val="FFFFFF"/>
+                </a:solidFill>
+                <a:latin typeface="Segoe UI"/>
+              </a:rPr>
+              <a:t>Control plane on coding agents</a:t>
+            </a:r>
+          </a:p>
+        </p:txBody>
+      </p:sp>
+      <p:sp>
+        <p:nvSpPr>
+          <p:cNvPr id="9" name="TextBox 8"/>
+          <p:cNvSpPr txBox="1"/>
+          <p:nvPr/>
+        </p:nvSpPr>
+        <p:spPr>
+          <a:xfrm>
+            <a:off x="1005840" y="2834640"/>
+            <a:ext cx="4754880" cy="914400"/>
+          </a:xfrm>
+          <a:prstGeom prst="rect">
+            <a:avLst/>
+          </a:prstGeom>
+          <a:noFill/>
+        </p:spPr>
+        <p:txBody>
+          <a:bodyPr wrap="square" lIns="0" tIns="0" rIns="0" bIns="0" anchor="t">
+            <a:spAutoFit/>
+          </a:bodyPr>
+          <a:lstStyle/>
+          <a:p>
+            <a:pPr algn="l">
+              <a:lnSpc>
+                <a:spcPct val="110000"/>
+              </a:lnSpc>
+              <a:spcBef>
+                <a:spcPts val="0"/>
+              </a:spcBef>
+              <a:spcAft>
+                <a:spcPts val="600"/>
+              </a:spcAft>
+            </a:pPr>
+            <a:r>
+              <a:rPr sz="1450" b="0" i="0">
+                <a:solidFill>
+                  <a:srgbClr val="C9D4E6"/>
+                </a:solidFill>
+                <a:latin typeface="Segoe UI"/>
+              </a:rPr>
+              <a:t>Integrates Cursor, Claude Code/CLI, Factory AI &amp; Antigravity as engines — Projexlight is the driver &amp; governor.</a:t>
+            </a:r>
+          </a:p>
+        </p:txBody>
+      </p:sp>
+      <p:sp>
+        <p:nvSpPr>
+          <p:cNvPr id="10" name="Rounded Rectangle 9"/>
           <p:cNvSpPr/>
           <p:nvPr/>
         </p:nvSpPr>
         <p:spPr>
           <a:xfrm>
-            <a:off x="640080" y="2057400"/>
+            <a:off x="6263640" y="2057400"/>
             <a:ext cx="5394960" cy="1828800"/>
           </a:xfrm>
           <a:prstGeom prst="roundRect">
@@ -7575,18 +7649,19 @@
           <a:lstStyle/>
           <a:p>
             <a:pPr algn="ctr"/>
-          </a:p>
-        </p:txBody>
-      </p:sp>
-      <p:sp>
-        <p:nvSpPr>
-          <p:cNvPr id="7" name="Rectangle 6"/>
+            <a:endParaRPr/>
+          </a:p>
+        </p:txBody>
+      </p:sp>
+      <p:sp>
+        <p:nvSpPr>
+          <p:cNvPr id="11" name="Rectangle 10"/>
           <p:cNvSpPr/>
           <p:nvPr/>
         </p:nvSpPr>
         <p:spPr>
           <a:xfrm>
-            <a:off x="640080" y="2057400"/>
+            <a:off x="6263640" y="2057400"/>
             <a:ext cx="109728" cy="1828800"/>
           </a:xfrm>
           <a:prstGeom prst="rect">
@@ -7619,18 +7694,19 @@
           <a:lstStyle/>
           <a:p>
             <a:pPr algn="ctr"/>
-          </a:p>
-        </p:txBody>
-      </p:sp>
-      <p:sp>
-        <p:nvSpPr>
-          <p:cNvPr id="8" name="TextBox 7"/>
+            <a:endParaRPr/>
+          </a:p>
+        </p:txBody>
+      </p:sp>
+      <p:sp>
+        <p:nvSpPr>
+          <p:cNvPr id="12" name="TextBox 11"/>
           <p:cNvSpPr txBox="1"/>
           <p:nvPr/>
         </p:nvSpPr>
         <p:spPr>
           <a:xfrm>
-            <a:off x="1005840" y="2286000"/>
+            <a:off x="6629400" y="2286000"/>
             <a:ext cx="4663440" cy="457200"/>
           </a:xfrm>
           <a:prstGeom prst="rect">
@@ -7639,7 +7715,7 @@
           <a:noFill/>
         </p:spPr>
         <p:txBody>
-          <a:bodyPr wrap="square" anchor="t" lIns="0" rIns="0" tIns="0" bIns="0">
+          <a:bodyPr wrap="square" lIns="0" tIns="0" rIns="0" bIns="0" anchor="t">
             <a:spAutoFit/>
           </a:bodyPr>
           <a:lstStyle/>
@@ -7662,20 +7738,20 @@
                 </a:solidFill>
                 <a:latin typeface="Segoe UI"/>
               </a:rPr>
-              <a:t>Control plane on coding agents</a:t>
-            </a:r>
-          </a:p>
-        </p:txBody>
-      </p:sp>
-      <p:sp>
-        <p:nvSpPr>
-          <p:cNvPr id="9" name="TextBox 8"/>
+              <a:t>Blueprint-driven SDLC</a:t>
+            </a:r>
+          </a:p>
+        </p:txBody>
+      </p:sp>
+      <p:sp>
+        <p:nvSpPr>
+          <p:cNvPr id="13" name="TextBox 12"/>
           <p:cNvSpPr txBox="1"/>
           <p:nvPr/>
         </p:nvSpPr>
         <p:spPr>
           <a:xfrm>
-            <a:off x="1005840" y="2834640"/>
+            <a:off x="6629400" y="2834640"/>
             <a:ext cx="4754880" cy="914400"/>
           </a:xfrm>
           <a:prstGeom prst="rect">
@@ -7684,7 +7760,7 @@
           <a:noFill/>
         </p:spPr>
         <p:txBody>
-          <a:bodyPr wrap="square" anchor="t" lIns="0" rIns="0" tIns="0" bIns="0">
+          <a:bodyPr wrap="square" lIns="0" tIns="0" rIns="0" bIns="0" anchor="t">
             <a:spAutoFit/>
           </a:bodyPr>
           <a:lstStyle/>
@@ -7707,20 +7783,20 @@
                 </a:solidFill>
                 <a:latin typeface="Segoe UI"/>
               </a:rPr>
-              <a:t>Integrates Cursor, Claude Code/CLI, Factory AI &amp; Antigravity as engines — Projexlight is the driver &amp; governor.</a:t>
-            </a:r>
-          </a:p>
-        </p:txBody>
-      </p:sp>
-      <p:sp>
-        <p:nvSpPr>
-          <p:cNvPr id="10" name="Rounded Rectangle 9"/>
+              <a:t>Captures domain context as blueprints: features, APIs, services, BDD scenarios &amp; acceptance criteria.</a:t>
+            </a:r>
+          </a:p>
+        </p:txBody>
+      </p:sp>
+      <p:sp>
+        <p:nvSpPr>
+          <p:cNvPr id="14" name="Rounded Rectangle 13"/>
           <p:cNvSpPr/>
           <p:nvPr/>
         </p:nvSpPr>
         <p:spPr>
           <a:xfrm>
-            <a:off x="6263640" y="2057400"/>
+            <a:off x="640080" y="4114800"/>
             <a:ext cx="5394960" cy="1828800"/>
           </a:xfrm>
           <a:prstGeom prst="roundRect">
@@ -7753,18 +7829,19 @@
           <a:lstStyle/>
           <a:p>
             <a:pPr algn="ctr"/>
-          </a:p>
-        </p:txBody>
-      </p:sp>
-      <p:sp>
-        <p:nvSpPr>
-          <p:cNvPr id="11" name="Rectangle 10"/>
+            <a:endParaRPr/>
+          </a:p>
+        </p:txBody>
+      </p:sp>
+      <p:sp>
+        <p:nvSpPr>
+          <p:cNvPr id="15" name="Rectangle 14"/>
           <p:cNvSpPr/>
           <p:nvPr/>
         </p:nvSpPr>
         <p:spPr>
           <a:xfrm>
-            <a:off x="6263640" y="2057400"/>
+            <a:off x="640080" y="4114800"/>
             <a:ext cx="109728" cy="1828800"/>
           </a:xfrm>
           <a:prstGeom prst="rect">
@@ -7797,18 +7874,19 @@
           <a:lstStyle/>
           <a:p>
             <a:pPr algn="ctr"/>
-          </a:p>
-        </p:txBody>
-      </p:sp>
-      <p:sp>
-        <p:nvSpPr>
-          <p:cNvPr id="12" name="TextBox 11"/>
+            <a:endParaRPr/>
+          </a:p>
+        </p:txBody>
+      </p:sp>
+      <p:sp>
+        <p:nvSpPr>
+          <p:cNvPr id="16" name="TextBox 15"/>
           <p:cNvSpPr txBox="1"/>
           <p:nvPr/>
         </p:nvSpPr>
         <p:spPr>
           <a:xfrm>
-            <a:off x="6629400" y="2286000"/>
+            <a:off x="1005840" y="4343400"/>
             <a:ext cx="4663440" cy="457200"/>
           </a:xfrm>
           <a:prstGeom prst="rect">
@@ -7817,7 +7895,7 @@
           <a:noFill/>
         </p:spPr>
         <p:txBody>
-          <a:bodyPr wrap="square" anchor="t" lIns="0" rIns="0" tIns="0" bIns="0">
+          <a:bodyPr wrap="square" lIns="0" tIns="0" rIns="0" bIns="0" anchor="t">
             <a:spAutoFit/>
           </a:bodyPr>
           <a:lstStyle/>
@@ -7840,20 +7918,20 @@
                 </a:solidFill>
                 <a:latin typeface="Segoe UI"/>
               </a:rPr>
-              <a:t>Blueprint-driven SDLC</a:t>
-            </a:r>
-          </a:p>
-        </p:txBody>
-      </p:sp>
-      <p:sp>
-        <p:nvSpPr>
-          <p:cNvPr id="13" name="TextBox 12"/>
+              <a:t>Multi-level control, not prompt chaos</a:t>
+            </a:r>
+          </a:p>
+        </p:txBody>
+      </p:sp>
+      <p:sp>
+        <p:nvSpPr>
+          <p:cNvPr id="17" name="TextBox 16"/>
           <p:cNvSpPr txBox="1"/>
           <p:nvPr/>
         </p:nvSpPr>
         <p:spPr>
           <a:xfrm>
-            <a:off x="6629400" y="2834640"/>
+            <a:off x="1005840" y="4892040"/>
             <a:ext cx="4754880" cy="914400"/>
           </a:xfrm>
           <a:prstGeom prst="rect">
@@ -7862,7 +7940,7 @@
           <a:noFill/>
         </p:spPr>
         <p:txBody>
-          <a:bodyPr wrap="square" anchor="t" lIns="0" rIns="0" tIns="0" bIns="0">
+          <a:bodyPr wrap="square" lIns="0" tIns="0" rIns="0" bIns="0" anchor="t">
             <a:spAutoFit/>
           </a:bodyPr>
           <a:lstStyle/>
@@ -7885,20 +7963,20 @@
                 </a:solidFill>
                 <a:latin typeface="Segoe UI"/>
               </a:rPr>
-              <a:t>Captures domain context as blueprints: features, APIs, services, BDD scenarios &amp; acceptance criteria.</a:t>
-            </a:r>
-          </a:p>
-        </p:txBody>
-      </p:sp>
-      <p:sp>
-        <p:nvSpPr>
-          <p:cNvPr id="14" name="Rounded Rectangle 13"/>
+              <a:t>Keeps a visible plan at task / scenario / feature level — runs tests &amp; BDD, auto-fixes issues early.</a:t>
+            </a:r>
+          </a:p>
+        </p:txBody>
+      </p:sp>
+      <p:sp>
+        <p:nvSpPr>
+          <p:cNvPr id="18" name="Rounded Rectangle 17"/>
           <p:cNvSpPr/>
           <p:nvPr/>
         </p:nvSpPr>
         <p:spPr>
           <a:xfrm>
-            <a:off x="640080" y="4114800"/>
+            <a:off x="6263640" y="4114800"/>
             <a:ext cx="5394960" cy="1828800"/>
           </a:xfrm>
           <a:prstGeom prst="roundRect">
@@ -7931,18 +8009,19 @@
           <a:lstStyle/>
           <a:p>
             <a:pPr algn="ctr"/>
-          </a:p>
-        </p:txBody>
-      </p:sp>
-      <p:sp>
-        <p:nvSpPr>
-          <p:cNvPr id="15" name="Rectangle 14"/>
+            <a:endParaRPr/>
+          </a:p>
+        </p:txBody>
+      </p:sp>
+      <p:sp>
+        <p:nvSpPr>
+          <p:cNvPr id="19" name="Rectangle 18"/>
           <p:cNvSpPr/>
           <p:nvPr/>
         </p:nvSpPr>
         <p:spPr>
           <a:xfrm>
-            <a:off x="640080" y="4114800"/>
+            <a:off x="6263640" y="4114800"/>
             <a:ext cx="109728" cy="1828800"/>
           </a:xfrm>
           <a:prstGeom prst="rect">
@@ -7975,18 +8054,19 @@
           <a:lstStyle/>
           <a:p>
             <a:pPr algn="ctr"/>
-          </a:p>
-        </p:txBody>
-      </p:sp>
-      <p:sp>
-        <p:nvSpPr>
-          <p:cNvPr id="16" name="TextBox 15"/>
+            <a:endParaRPr/>
+          </a:p>
+        </p:txBody>
+      </p:sp>
+      <p:sp>
+        <p:nvSpPr>
+          <p:cNvPr id="20" name="TextBox 19"/>
           <p:cNvSpPr txBox="1"/>
           <p:nvPr/>
         </p:nvSpPr>
         <p:spPr>
           <a:xfrm>
-            <a:off x="1005840" y="4343400"/>
+            <a:off x="6629400" y="4343400"/>
             <a:ext cx="4663440" cy="457200"/>
           </a:xfrm>
           <a:prstGeom prst="rect">
@@ -7995,7 +8075,7 @@
           <a:noFill/>
         </p:spPr>
         <p:txBody>
-          <a:bodyPr wrap="square" anchor="t" lIns="0" rIns="0" tIns="0" bIns="0">
+          <a:bodyPr wrap="square" lIns="0" tIns="0" rIns="0" bIns="0" anchor="t">
             <a:spAutoFit/>
           </a:bodyPr>
           <a:lstStyle/>
@@ -8018,20 +8098,20 @@
                 </a:solidFill>
                 <a:latin typeface="Segoe UI"/>
               </a:rPr>
-              <a:t>Multi-level control, not prompt chaos</a:t>
-            </a:r>
-          </a:p>
-        </p:txBody>
-      </p:sp>
-      <p:sp>
-        <p:nvSpPr>
-          <p:cNvPr id="17" name="TextBox 16"/>
+              <a:t>Certification gates for safe release</a:t>
+            </a:r>
+          </a:p>
+        </p:txBody>
+      </p:sp>
+      <p:sp>
+        <p:nvSpPr>
+          <p:cNvPr id="21" name="TextBox 20"/>
           <p:cNvSpPr txBox="1"/>
           <p:nvPr/>
         </p:nvSpPr>
         <p:spPr>
           <a:xfrm>
-            <a:off x="1005840" y="4892040"/>
+            <a:off x="6629400" y="4892040"/>
             <a:ext cx="4754880" cy="914400"/>
           </a:xfrm>
           <a:prstGeom prst="rect">
@@ -8040,7 +8120,7 @@
           <a:noFill/>
         </p:spPr>
         <p:txBody>
-          <a:bodyPr wrap="square" anchor="t" lIns="0" rIns="0" tIns="0" bIns="0">
+          <a:bodyPr wrap="square" lIns="0" tIns="0" rIns="0" bIns="0" anchor="t">
             <a:spAutoFit/>
           </a:bodyPr>
           <a:lstStyle/>
@@ -8063,109 +8143,21 @@
                 </a:solidFill>
                 <a:latin typeface="Segoe UI"/>
               </a:rPr>
-              <a:t>Keeps a visible plan at task / scenario / feature level — runs tests &amp; BDD, auto-fixes issues early.</a:t>
-            </a:r>
-          </a:p>
-        </p:txBody>
-      </p:sp>
-      <p:sp>
-        <p:nvSpPr>
-          <p:cNvPr id="18" name="Rounded Rectangle 17"/>
-          <p:cNvSpPr/>
-          <p:nvPr/>
-        </p:nvSpPr>
-        <p:spPr>
-          <a:xfrm>
-            <a:off x="6263640" y="4114800"/>
-            <a:ext cx="5394960" cy="1828800"/>
-          </a:xfrm>
-          <a:prstGeom prst="roundRect">
-            <a:avLst/>
-          </a:prstGeom>
-          <a:solidFill>
-            <a:srgbClr val="122A4D"/>
-          </a:solidFill>
-          <a:ln>
-            <a:noFill/>
-          </a:ln>
-          <a:effectLst/>
-        </p:spPr>
-        <p:style>
-          <a:lnRef idx="1">
-            <a:schemeClr val="accent1"/>
-          </a:lnRef>
-          <a:fillRef idx="3">
-            <a:schemeClr val="accent1"/>
-          </a:fillRef>
-          <a:effectRef idx="2">
-            <a:schemeClr val="accent1"/>
-          </a:effectRef>
-          <a:fontRef idx="minor">
-            <a:schemeClr val="lt1"/>
-          </a:fontRef>
-        </p:style>
-        <p:txBody>
-          <a:bodyPr rtlCol="0" anchor="ctr"/>
-          <a:lstStyle/>
-          <a:p>
-            <a:pPr algn="ctr"/>
-          </a:p>
-        </p:txBody>
-      </p:sp>
-      <p:sp>
-        <p:nvSpPr>
-          <p:cNvPr id="19" name="Rectangle 18"/>
-          <p:cNvSpPr/>
-          <p:nvPr/>
-        </p:nvSpPr>
-        <p:spPr>
-          <a:xfrm>
-            <a:off x="6263640" y="4114800"/>
-            <a:ext cx="109728" cy="1828800"/>
-          </a:xfrm>
-          <a:prstGeom prst="rect">
-            <a:avLst/>
-          </a:prstGeom>
-          <a:solidFill>
-            <a:srgbClr val="27D3C4"/>
-          </a:solidFill>
-          <a:ln>
-            <a:noFill/>
-          </a:ln>
-          <a:effectLst/>
-        </p:spPr>
-        <p:style>
-          <a:lnRef idx="1">
-            <a:schemeClr val="accent1"/>
-          </a:lnRef>
-          <a:fillRef idx="3">
-            <a:schemeClr val="accent1"/>
-          </a:fillRef>
-          <a:effectRef idx="2">
-            <a:schemeClr val="accent1"/>
-          </a:effectRef>
-          <a:fontRef idx="minor">
-            <a:schemeClr val="lt1"/>
-          </a:fontRef>
-        </p:style>
-        <p:txBody>
-          <a:bodyPr rtlCol="0" anchor="ctr"/>
-          <a:lstStyle/>
-          <a:p>
-            <a:pPr algn="ctr"/>
-          </a:p>
-        </p:txBody>
-      </p:sp>
-      <p:sp>
-        <p:nvSpPr>
-          <p:cNvPr id="20" name="TextBox 19"/>
+              <a:t>Architecture checks, test suites, BDD &amp; functional acceptance — before “certified customer release.”</a:t>
+            </a:r>
+          </a:p>
+        </p:txBody>
+      </p:sp>
+      <p:sp>
+        <p:nvSpPr>
+          <p:cNvPr id="22" name="TextBox 21"/>
           <p:cNvSpPr txBox="1"/>
           <p:nvPr/>
         </p:nvSpPr>
         <p:spPr>
           <a:xfrm>
-            <a:off x="6629400" y="4343400"/>
-            <a:ext cx="4663440" cy="457200"/>
+            <a:off x="11338560" y="6400800"/>
+            <a:ext cx="640080" cy="365760"/>
           </a:xfrm>
           <a:prstGeom prst="rect">
             <a:avLst/>
@@ -8173,101 +8165,11 @@
           <a:noFill/>
         </p:spPr>
         <p:txBody>
-          <a:bodyPr wrap="square" anchor="t" lIns="0" rIns="0" tIns="0" bIns="0">
+          <a:bodyPr wrap="square" lIns="0" tIns="0" rIns="0" bIns="0" anchor="t">
             <a:spAutoFit/>
           </a:bodyPr>
           <a:lstStyle/>
           <a:p>
-            <a:pPr algn="l">
-              <a:lnSpc>
-                <a:spcPct val="100000"/>
-              </a:lnSpc>
-              <a:spcBef>
-                <a:spcPts val="0"/>
-              </a:spcBef>
-              <a:spcAft>
-                <a:spcPts val="600"/>
-              </a:spcAft>
-            </a:pPr>
-            <a:r>
-              <a:rPr sz="1900" b="1" i="0">
-                <a:solidFill>
-                  <a:srgbClr val="FFFFFF"/>
-                </a:solidFill>
-                <a:latin typeface="Segoe UI"/>
-              </a:rPr>
-              <a:t>Certification gates for safe release</a:t>
-            </a:r>
-          </a:p>
-        </p:txBody>
-      </p:sp>
-      <p:sp>
-        <p:nvSpPr>
-          <p:cNvPr id="21" name="TextBox 20"/>
-          <p:cNvSpPr txBox="1"/>
-          <p:nvPr/>
-        </p:nvSpPr>
-        <p:spPr>
-          <a:xfrm>
-            <a:off x="6629400" y="4892040"/>
-            <a:ext cx="4754880" cy="914400"/>
-          </a:xfrm>
-          <a:prstGeom prst="rect">
-            <a:avLst/>
-          </a:prstGeom>
-          <a:noFill/>
-        </p:spPr>
-        <p:txBody>
-          <a:bodyPr wrap="square" anchor="t" lIns="0" rIns="0" tIns="0" bIns="0">
-            <a:spAutoFit/>
-          </a:bodyPr>
-          <a:lstStyle/>
-          <a:p>
-            <a:pPr algn="l">
-              <a:lnSpc>
-                <a:spcPct val="110000"/>
-              </a:lnSpc>
-              <a:spcBef>
-                <a:spcPts val="0"/>
-              </a:spcBef>
-              <a:spcAft>
-                <a:spcPts val="600"/>
-              </a:spcAft>
-            </a:pPr>
-            <a:r>
-              <a:rPr sz="1450" b="0" i="0">
-                <a:solidFill>
-                  <a:srgbClr val="C9D4E6"/>
-                </a:solidFill>
-                <a:latin typeface="Segoe UI"/>
-              </a:rPr>
-              <a:t>Architecture checks, test suites, BDD &amp; functional acceptance — before “certified customer release.”</a:t>
-            </a:r>
-          </a:p>
-        </p:txBody>
-      </p:sp>
-      <p:sp>
-        <p:nvSpPr>
-          <p:cNvPr id="22" name="TextBox 21"/>
-          <p:cNvSpPr txBox="1"/>
-          <p:nvPr/>
-        </p:nvSpPr>
-        <p:spPr>
-          <a:xfrm>
-            <a:off x="11338560" y="6400800"/>
-            <a:ext cx="640080" cy="365760"/>
-          </a:xfrm>
-          <a:prstGeom prst="rect">
-            <a:avLst/>
-          </a:prstGeom>
-          <a:noFill/>
-        </p:spPr>
-        <p:txBody>
-          <a:bodyPr wrap="square" anchor="t" lIns="0" rIns="0" tIns="0" bIns="0">
-            <a:spAutoFit/>
-          </a:bodyPr>
-          <a:lstStyle/>
-          <a:p>
             <a:pPr algn="r">
               <a:lnSpc>
                 <a:spcPct val="100000"/>
@@ -8308,7 +8210,7 @@
           <a:noFill/>
         </p:spPr>
         <p:txBody>
-          <a:bodyPr wrap="square" anchor="t" lIns="0" rIns="0" tIns="0" bIns="0">
+          <a:bodyPr wrap="square" lIns="0" tIns="0" rIns="0" bIns="0" anchor="t">
             <a:spAutoFit/>
           </a:bodyPr>
           <a:lstStyle/>
@@ -8345,7 +8247,7 @@
 </file>
 
 <file path=ppt/slides/slide6.xml><?xml version="1.0" encoding="utf-8"?>
-<p:sld xmlns:a="http://schemas.openxmlformats.org/drawingml/2006/main" xmlns:p="http://schemas.openxmlformats.org/presentationml/2006/main" xmlns:r="http://schemas.openxmlformats.org/officeDocument/2006/relationships">
+<p:sld xmlns:a="http://schemas.openxmlformats.org/drawingml/2006/main" xmlns:r="http://schemas.openxmlformats.org/officeDocument/2006/relationships" xmlns:p="http://schemas.openxmlformats.org/presentationml/2006/main">
   <p:cSld>
     <p:bg>
       <p:bgPr>
@@ -8361,7 +8263,14 @@
         <p:cNvGrpSpPr/>
         <p:nvPr/>
       </p:nvGrpSpPr>
-      <p:grpSpPr/>
+      <p:grpSpPr>
+        <a:xfrm>
+          <a:off x="0" y="0"/>
+          <a:ext cx="0" cy="0"/>
+          <a:chOff x="0" y="0"/>
+          <a:chExt cx="0" cy="0"/>
+        </a:xfrm>
+      </p:grpSpPr>
       <p:sp>
         <p:nvSpPr>
           <p:cNvPr id="2" name="Rectangle 1"/>
@@ -8403,6 +8312,7 @@
           <a:lstStyle/>
           <a:p>
             <a:pPr algn="ctr"/>
+            <a:endParaRPr/>
           </a:p>
         </p:txBody>
       </p:sp>
@@ -8423,7 +8333,7 @@
           <a:noFill/>
         </p:spPr>
         <p:txBody>
-          <a:bodyPr wrap="square" anchor="t" lIns="0" rIns="0" tIns="0" bIns="0">
+          <a:bodyPr wrap="square" lIns="0" tIns="0" rIns="0" bIns="0" anchor="t">
             <a:spAutoFit/>
           </a:bodyPr>
           <a:lstStyle/>
@@ -8468,7 +8378,7 @@
           <a:noFill/>
         </p:spPr>
         <p:txBody>
-          <a:bodyPr wrap="square" anchor="t" lIns="0" rIns="0" tIns="0" bIns="0">
+          <a:bodyPr wrap="square" lIns="0" tIns="0" rIns="0" bIns="0" anchor="t">
             <a:spAutoFit/>
           </a:bodyPr>
           <a:lstStyle/>
@@ -8498,14 +8408,194 @@
       </p:sp>
       <p:sp>
         <p:nvSpPr>
-          <p:cNvPr id="5" name="Rectangle 4"/>
+          <p:cNvPr id="6" name="Rectangle 5"/>
           <p:cNvSpPr/>
           <p:nvPr/>
         </p:nvSpPr>
         <p:spPr>
           <a:xfrm>
-            <a:off x="640080" y="1572768"/>
-            <a:ext cx="822960" cy="64008"/>
+            <a:off x="640080" y="1828800"/>
+            <a:ext cx="1874519" cy="603504"/>
+          </a:xfrm>
+          <a:prstGeom prst="rect">
+            <a:avLst/>
+          </a:prstGeom>
+          <a:solidFill>
+            <a:srgbClr val="0E2444"/>
+          </a:solidFill>
+          <a:ln>
+            <a:noFill/>
+          </a:ln>
+          <a:effectLst/>
+        </p:spPr>
+        <p:style>
+          <a:lnRef idx="1">
+            <a:schemeClr val="accent1"/>
+          </a:lnRef>
+          <a:fillRef idx="3">
+            <a:schemeClr val="accent1"/>
+          </a:fillRef>
+          <a:effectRef idx="2">
+            <a:schemeClr val="accent1"/>
+          </a:effectRef>
+          <a:fontRef idx="minor">
+            <a:schemeClr val="lt1"/>
+          </a:fontRef>
+        </p:style>
+        <p:txBody>
+          <a:bodyPr rtlCol="0" anchor="ctr"/>
+          <a:lstStyle/>
+          <a:p>
+            <a:pPr algn="ctr"/>
+            <a:endParaRPr/>
+          </a:p>
+        </p:txBody>
+      </p:sp>
+      <p:sp>
+        <p:nvSpPr>
+          <p:cNvPr id="7" name="TextBox 6"/>
+          <p:cNvSpPr txBox="1"/>
+          <p:nvPr/>
+        </p:nvSpPr>
+        <p:spPr>
+          <a:xfrm>
+            <a:off x="804672" y="1828800"/>
+            <a:ext cx="1600199" cy="603504"/>
+          </a:xfrm>
+          <a:prstGeom prst="rect">
+            <a:avLst/>
+          </a:prstGeom>
+          <a:noFill/>
+        </p:spPr>
+        <p:txBody>
+          <a:bodyPr wrap="square" lIns="0" tIns="0" rIns="0" bIns="0" anchor="ctr">
+            <a:spAutoFit/>
+          </a:bodyPr>
+          <a:lstStyle/>
+          <a:p>
+            <a:pPr algn="l">
+              <a:lnSpc>
+                <a:spcPct val="95000"/>
+              </a:lnSpc>
+              <a:spcBef>
+                <a:spcPts val="0"/>
+              </a:spcBef>
+              <a:spcAft>
+                <a:spcPts val="600"/>
+              </a:spcAft>
+            </a:pPr>
+            <a:r>
+              <a:rPr sz="1350" b="1" i="0">
+                <a:solidFill>
+                  <a:srgbClr val="FFFFFF"/>
+                </a:solidFill>
+                <a:latin typeface="Segoe UI"/>
+              </a:rPr>
+              <a:t>Dimension</a:t>
+            </a:r>
+          </a:p>
+        </p:txBody>
+      </p:sp>
+      <p:sp>
+        <p:nvSpPr>
+          <p:cNvPr id="8" name="Rectangle 7"/>
+          <p:cNvSpPr/>
+          <p:nvPr/>
+        </p:nvSpPr>
+        <p:spPr>
+          <a:xfrm>
+            <a:off x="2514599" y="1828800"/>
+            <a:ext cx="4572000" cy="603504"/>
+          </a:xfrm>
+          <a:prstGeom prst="rect">
+            <a:avLst/>
+          </a:prstGeom>
+          <a:solidFill>
+            <a:srgbClr val="122A4D"/>
+          </a:solidFill>
+          <a:ln>
+            <a:noFill/>
+          </a:ln>
+          <a:effectLst/>
+        </p:spPr>
+        <p:style>
+          <a:lnRef idx="1">
+            <a:schemeClr val="accent1"/>
+          </a:lnRef>
+          <a:fillRef idx="3">
+            <a:schemeClr val="accent1"/>
+          </a:fillRef>
+          <a:effectRef idx="2">
+            <a:schemeClr val="accent1"/>
+          </a:effectRef>
+          <a:fontRef idx="minor">
+            <a:schemeClr val="lt1"/>
+          </a:fontRef>
+        </p:style>
+        <p:txBody>
+          <a:bodyPr rtlCol="0" anchor="ctr"/>
+          <a:lstStyle/>
+          <a:p>
+            <a:pPr algn="ctr"/>
+            <a:endParaRPr/>
+          </a:p>
+        </p:txBody>
+      </p:sp>
+      <p:sp>
+        <p:nvSpPr>
+          <p:cNvPr id="9" name="TextBox 8"/>
+          <p:cNvSpPr txBox="1"/>
+          <p:nvPr/>
+        </p:nvSpPr>
+        <p:spPr>
+          <a:xfrm>
+            <a:off x="2679191" y="1828800"/>
+            <a:ext cx="4297680" cy="603504"/>
+          </a:xfrm>
+          <a:prstGeom prst="rect">
+            <a:avLst/>
+          </a:prstGeom>
+          <a:noFill/>
+        </p:spPr>
+        <p:txBody>
+          <a:bodyPr wrap="square" lIns="0" tIns="0" rIns="0" bIns="0" anchor="ctr">
+            <a:spAutoFit/>
+          </a:bodyPr>
+          <a:lstStyle/>
+          <a:p>
+            <a:pPr algn="l">
+              <a:lnSpc>
+                <a:spcPct val="95000"/>
+              </a:lnSpc>
+              <a:spcBef>
+                <a:spcPts val="0"/>
+              </a:spcBef>
+              <a:spcAft>
+                <a:spcPts val="600"/>
+              </a:spcAft>
+            </a:pPr>
+            <a:r>
+              <a:rPr sz="1400" b="1" i="0">
+                <a:solidFill>
+                  <a:srgbClr val="FFFFFF"/>
+                </a:solidFill>
+                <a:latin typeface="Segoe UI"/>
+              </a:rPr>
+              <a:t>Factory AI · Cursor · Claude CLI · Antigravity</a:t>
+            </a:r>
+          </a:p>
+        </p:txBody>
+      </p:sp>
+      <p:sp>
+        <p:nvSpPr>
+          <p:cNvPr id="10" name="Rectangle 9"/>
+          <p:cNvSpPr/>
+          <p:nvPr/>
+        </p:nvSpPr>
+        <p:spPr>
+          <a:xfrm>
+            <a:off x="7086599" y="1828800"/>
+            <a:ext cx="4572000" cy="603504"/>
           </a:xfrm>
           <a:prstGeom prst="rect">
             <a:avLst/>
@@ -8537,25 +8627,71 @@
           <a:lstStyle/>
           <a:p>
             <a:pPr algn="ctr"/>
-          </a:p>
-        </p:txBody>
-      </p:sp>
-      <p:sp>
-        <p:nvSpPr>
-          <p:cNvPr id="6" name="Rectangle 5"/>
+            <a:endParaRPr/>
+          </a:p>
+        </p:txBody>
+      </p:sp>
+      <p:sp>
+        <p:nvSpPr>
+          <p:cNvPr id="11" name="TextBox 10"/>
+          <p:cNvSpPr txBox="1"/>
+          <p:nvPr/>
+        </p:nvSpPr>
+        <p:spPr>
+          <a:xfrm>
+            <a:off x="7251191" y="1828800"/>
+            <a:ext cx="4297680" cy="603504"/>
+          </a:xfrm>
+          <a:prstGeom prst="rect">
+            <a:avLst/>
+          </a:prstGeom>
+          <a:noFill/>
+        </p:spPr>
+        <p:txBody>
+          <a:bodyPr wrap="square" lIns="0" tIns="0" rIns="0" bIns="0" anchor="ctr">
+            <a:spAutoFit/>
+          </a:bodyPr>
+          <a:lstStyle/>
+          <a:p>
+            <a:pPr algn="l">
+              <a:lnSpc>
+                <a:spcPct val="95000"/>
+              </a:lnSpc>
+              <a:spcBef>
+                <a:spcPts val="0"/>
+              </a:spcBef>
+              <a:spcAft>
+                <a:spcPts val="600"/>
+              </a:spcAft>
+            </a:pPr>
+            <a:r>
+              <a:rPr sz="1400" b="1" i="0">
+                <a:solidFill>
+                  <a:srgbClr val="0B1F3A"/>
+                </a:solidFill>
+                <a:latin typeface="Segoe UI"/>
+              </a:rPr>
+              <a:t>ProjexCloud + Projexlight</a:t>
+            </a:r>
+          </a:p>
+        </p:txBody>
+      </p:sp>
+      <p:sp>
+        <p:nvSpPr>
+          <p:cNvPr id="12" name="Rectangle 11"/>
           <p:cNvSpPr/>
           <p:nvPr/>
         </p:nvSpPr>
         <p:spPr>
           <a:xfrm>
-            <a:off x="640080" y="1828800"/>
+            <a:off x="640080" y="2432304"/>
             <a:ext cx="1874519" cy="603504"/>
           </a:xfrm>
           <a:prstGeom prst="rect">
             <a:avLst/>
           </a:prstGeom>
           <a:solidFill>
-            <a:srgbClr val="0E2444"/>
+            <a:srgbClr val="0A1B33"/>
           </a:solidFill>
           <a:ln>
             <a:noFill/>
@@ -8581,18 +8717,19 @@
           <a:lstStyle/>
           <a:p>
             <a:pPr algn="ctr"/>
-          </a:p>
-        </p:txBody>
-      </p:sp>
-      <p:sp>
-        <p:nvSpPr>
-          <p:cNvPr id="7" name="TextBox 6"/>
+            <a:endParaRPr/>
+          </a:p>
+        </p:txBody>
+      </p:sp>
+      <p:sp>
+        <p:nvSpPr>
+          <p:cNvPr id="13" name="TextBox 12"/>
           <p:cNvSpPr txBox="1"/>
           <p:nvPr/>
         </p:nvSpPr>
         <p:spPr>
           <a:xfrm>
-            <a:off x="804672" y="1828800"/>
+            <a:off x="804672" y="2432304"/>
             <a:ext cx="1600199" cy="603504"/>
           </a:xfrm>
           <a:prstGeom prst="rect">
@@ -8601,7 +8738,7 @@
           <a:noFill/>
         </p:spPr>
         <p:txBody>
-          <a:bodyPr wrap="square" anchor="ctr" lIns="0" rIns="0" tIns="0" bIns="0">
+          <a:bodyPr wrap="square" lIns="0" tIns="0" rIns="0" bIns="0" anchor="ctr">
             <a:spAutoFit/>
           </a:bodyPr>
           <a:lstStyle/>
@@ -8624,20 +8761,20 @@
                 </a:solidFill>
                 <a:latin typeface="Segoe UI"/>
               </a:rPr>
-              <a:t>Dimension</a:t>
-            </a:r>
-          </a:p>
-        </p:txBody>
-      </p:sp>
-      <p:sp>
-        <p:nvSpPr>
-          <p:cNvPr id="8" name="Rectangle 7"/>
+              <a:t>What it is</a:t>
+            </a:r>
+          </a:p>
+        </p:txBody>
+      </p:sp>
+      <p:sp>
+        <p:nvSpPr>
+          <p:cNvPr id="14" name="Rectangle 13"/>
           <p:cNvSpPr/>
           <p:nvPr/>
         </p:nvSpPr>
         <p:spPr>
           <a:xfrm>
-            <a:off x="2514599" y="1828800"/>
+            <a:off x="2514599" y="2432304"/>
             <a:ext cx="4572000" cy="603504"/>
           </a:xfrm>
           <a:prstGeom prst="rect">
@@ -8670,18 +8807,19 @@
           <a:lstStyle/>
           <a:p>
             <a:pPr algn="ctr"/>
-          </a:p>
-        </p:txBody>
-      </p:sp>
-      <p:sp>
-        <p:nvSpPr>
-          <p:cNvPr id="9" name="TextBox 8"/>
+            <a:endParaRPr/>
+          </a:p>
+        </p:txBody>
+      </p:sp>
+      <p:sp>
+        <p:nvSpPr>
+          <p:cNvPr id="15" name="TextBox 14"/>
           <p:cNvSpPr txBox="1"/>
           <p:nvPr/>
         </p:nvSpPr>
         <p:spPr>
           <a:xfrm>
-            <a:off x="2679191" y="1828800"/>
+            <a:off x="2679191" y="2432304"/>
             <a:ext cx="4297680" cy="603504"/>
           </a:xfrm>
           <a:prstGeom prst="rect">
@@ -8690,7 +8828,7 @@
           <a:noFill/>
         </p:spPr>
         <p:txBody>
-          <a:bodyPr wrap="square" anchor="ctr" lIns="0" rIns="0" tIns="0" bIns="0">
+          <a:bodyPr wrap="square" lIns="0" tIns="0" rIns="0" bIns="0" anchor="ctr">
             <a:spAutoFit/>
           </a:bodyPr>
           <a:lstStyle/>
@@ -8707,27 +8845,72 @@
               </a:spcAft>
             </a:pPr>
             <a:r>
-              <a:rPr sz="1400" b="1" i="0">
-                <a:solidFill>
-                  <a:srgbClr val="FFFFFF"/>
-                </a:solidFill>
-                <a:latin typeface="Segoe UI"/>
-              </a:rPr>
-              <a:t>Factory AI · Cursor · Claude CLI · Antigravity</a:t>
-            </a:r>
-          </a:p>
-        </p:txBody>
-      </p:sp>
-      <p:sp>
-        <p:nvSpPr>
-          <p:cNvPr id="10" name="Rectangle 9"/>
+              <a:rPr sz="1350" b="0" i="0">
+                <a:solidFill>
+                  <a:srgbClr val="C9D4E6"/>
+                </a:solidFill>
+                <a:latin typeface="Segoe UI"/>
+              </a:rPr>
+              <a:t>Coding agents that plan tasks &amp; generate code</a:t>
+            </a:r>
+          </a:p>
+        </p:txBody>
+      </p:sp>
+      <p:sp>
+        <p:nvSpPr>
+          <p:cNvPr id="16" name="Rectangle 15"/>
           <p:cNvSpPr/>
           <p:nvPr/>
         </p:nvSpPr>
         <p:spPr>
           <a:xfrm>
-            <a:off x="7086599" y="1828800"/>
+            <a:off x="7086599" y="2432304"/>
             <a:ext cx="4572000" cy="603504"/>
+          </a:xfrm>
+          <a:prstGeom prst="rect">
+            <a:avLst/>
+          </a:prstGeom>
+          <a:solidFill>
+            <a:srgbClr val="102444"/>
+          </a:solidFill>
+          <a:ln>
+            <a:noFill/>
+          </a:ln>
+          <a:effectLst/>
+        </p:spPr>
+        <p:style>
+          <a:lnRef idx="1">
+            <a:schemeClr val="accent1"/>
+          </a:lnRef>
+          <a:fillRef idx="3">
+            <a:schemeClr val="accent1"/>
+          </a:fillRef>
+          <a:effectRef idx="2">
+            <a:schemeClr val="accent1"/>
+          </a:effectRef>
+          <a:fontRef idx="minor">
+            <a:schemeClr val="lt1"/>
+          </a:fontRef>
+        </p:style>
+        <p:txBody>
+          <a:bodyPr rtlCol="0" anchor="ctr"/>
+          <a:lstStyle/>
+          <a:p>
+            <a:pPr algn="ctr"/>
+            <a:endParaRPr/>
+          </a:p>
+        </p:txBody>
+      </p:sp>
+      <p:sp>
+        <p:nvSpPr>
+          <p:cNvPr id="17" name="Rectangle 16"/>
+          <p:cNvSpPr/>
+          <p:nvPr/>
+        </p:nvSpPr>
+        <p:spPr>
+          <a:xfrm>
+            <a:off x="7086599" y="2432304"/>
+            <a:ext cx="54864" cy="603504"/>
           </a:xfrm>
           <a:prstGeom prst="rect">
             <a:avLst/>
@@ -8759,18 +8942,19 @@
           <a:lstStyle/>
           <a:p>
             <a:pPr algn="ctr"/>
-          </a:p>
-        </p:txBody>
-      </p:sp>
-      <p:sp>
-        <p:nvSpPr>
-          <p:cNvPr id="11" name="TextBox 10"/>
+            <a:endParaRPr/>
+          </a:p>
+        </p:txBody>
+      </p:sp>
+      <p:sp>
+        <p:nvSpPr>
+          <p:cNvPr id="18" name="TextBox 17"/>
           <p:cNvSpPr txBox="1"/>
           <p:nvPr/>
         </p:nvSpPr>
         <p:spPr>
           <a:xfrm>
-            <a:off x="7251191" y="1828800"/>
+            <a:off x="7251191" y="2432304"/>
             <a:ext cx="4297680" cy="603504"/>
           </a:xfrm>
           <a:prstGeom prst="rect">
@@ -8779,7 +8963,7 @@
           <a:noFill/>
         </p:spPr>
         <p:txBody>
-          <a:bodyPr wrap="square" anchor="ctr" lIns="0" rIns="0" tIns="0" bIns="0">
+          <a:bodyPr wrap="square" lIns="0" tIns="0" rIns="0" bIns="0" anchor="ctr">
             <a:spAutoFit/>
           </a:bodyPr>
           <a:lstStyle/>
@@ -8796,26 +8980,26 @@
               </a:spcAft>
             </a:pPr>
             <a:r>
-              <a:rPr sz="1400" b="1" i="0">
-                <a:solidFill>
-                  <a:srgbClr val="0B1F3A"/>
-                </a:solidFill>
-                <a:latin typeface="Segoe UI"/>
-              </a:rPr>
-              <a:t>ProjexCloud + Projexlight</a:t>
-            </a:r>
-          </a:p>
-        </p:txBody>
-      </p:sp>
-      <p:sp>
-        <p:nvSpPr>
-          <p:cNvPr id="12" name="Rectangle 11"/>
+              <a:rPr sz="1350" b="0" i="0">
+                <a:solidFill>
+                  <a:srgbClr val="FFFFFF"/>
+                </a:solidFill>
+                <a:latin typeface="Segoe UI"/>
+              </a:rPr>
+              <a:t>Control plane that drives &amp; governs those agents</a:t>
+            </a:r>
+          </a:p>
+        </p:txBody>
+      </p:sp>
+      <p:sp>
+        <p:nvSpPr>
+          <p:cNvPr id="19" name="Rectangle 18"/>
           <p:cNvSpPr/>
           <p:nvPr/>
         </p:nvSpPr>
         <p:spPr>
           <a:xfrm>
-            <a:off x="640080" y="2432304"/>
+            <a:off x="640080" y="3035808"/>
             <a:ext cx="1874519" cy="603504"/>
           </a:xfrm>
           <a:prstGeom prst="rect">
@@ -8848,18 +9032,19 @@
           <a:lstStyle/>
           <a:p>
             <a:pPr algn="ctr"/>
-          </a:p>
-        </p:txBody>
-      </p:sp>
-      <p:sp>
-        <p:nvSpPr>
-          <p:cNvPr id="13" name="TextBox 12"/>
+            <a:endParaRPr/>
+          </a:p>
+        </p:txBody>
+      </p:sp>
+      <p:sp>
+        <p:nvSpPr>
+          <p:cNvPr id="20" name="TextBox 19"/>
           <p:cNvSpPr txBox="1"/>
           <p:nvPr/>
         </p:nvSpPr>
         <p:spPr>
           <a:xfrm>
-            <a:off x="804672" y="2432304"/>
+            <a:off x="804672" y="3035808"/>
             <a:ext cx="1600199" cy="603504"/>
           </a:xfrm>
           <a:prstGeom prst="rect">
@@ -8868,7 +9053,7 @@
           <a:noFill/>
         </p:spPr>
         <p:txBody>
-          <a:bodyPr wrap="square" anchor="ctr" lIns="0" rIns="0" tIns="0" bIns="0">
+          <a:bodyPr wrap="square" lIns="0" tIns="0" rIns="0" bIns="0" anchor="ctr">
             <a:spAutoFit/>
           </a:bodyPr>
           <a:lstStyle/>
@@ -8891,20 +9076,335 @@
                 </a:solidFill>
                 <a:latin typeface="Segoe UI"/>
               </a:rPr>
-              <a:t>What it is</a:t>
-            </a:r>
-          </a:p>
-        </p:txBody>
-      </p:sp>
-      <p:sp>
-        <p:nvSpPr>
-          <p:cNvPr id="14" name="Rectangle 13"/>
+              <a:t>Planning</a:t>
+            </a:r>
+          </a:p>
+        </p:txBody>
+      </p:sp>
+      <p:sp>
+        <p:nvSpPr>
+          <p:cNvPr id="21" name="Rectangle 20"/>
           <p:cNvSpPr/>
           <p:nvPr/>
         </p:nvSpPr>
         <p:spPr>
           <a:xfrm>
-            <a:off x="2514599" y="2432304"/>
+            <a:off x="2514599" y="3035808"/>
+            <a:ext cx="4572000" cy="603504"/>
+          </a:xfrm>
+          <a:prstGeom prst="rect">
+            <a:avLst/>
+          </a:prstGeom>
+          <a:solidFill>
+            <a:srgbClr val="0D203D"/>
+          </a:solidFill>
+          <a:ln>
+            <a:noFill/>
+          </a:ln>
+          <a:effectLst/>
+        </p:spPr>
+        <p:style>
+          <a:lnRef idx="1">
+            <a:schemeClr val="accent1"/>
+          </a:lnRef>
+          <a:fillRef idx="3">
+            <a:schemeClr val="accent1"/>
+          </a:fillRef>
+          <a:effectRef idx="2">
+            <a:schemeClr val="accent1"/>
+          </a:effectRef>
+          <a:fontRef idx="minor">
+            <a:schemeClr val="lt1"/>
+          </a:fontRef>
+        </p:style>
+        <p:txBody>
+          <a:bodyPr rtlCol="0" anchor="ctr"/>
+          <a:lstStyle/>
+          <a:p>
+            <a:pPr algn="ctr"/>
+            <a:endParaRPr/>
+          </a:p>
+        </p:txBody>
+      </p:sp>
+      <p:sp>
+        <p:nvSpPr>
+          <p:cNvPr id="22" name="TextBox 21"/>
+          <p:cNvSpPr txBox="1"/>
+          <p:nvPr/>
+        </p:nvSpPr>
+        <p:spPr>
+          <a:xfrm>
+            <a:off x="2679191" y="3035808"/>
+            <a:ext cx="4297680" cy="603504"/>
+          </a:xfrm>
+          <a:prstGeom prst="rect">
+            <a:avLst/>
+          </a:prstGeom>
+          <a:noFill/>
+        </p:spPr>
+        <p:txBody>
+          <a:bodyPr wrap="square" lIns="0" tIns="0" rIns="0" bIns="0" anchor="ctr">
+            <a:spAutoFit/>
+          </a:bodyPr>
+          <a:lstStyle/>
+          <a:p>
+            <a:pPr algn="l">
+              <a:lnSpc>
+                <a:spcPct val="95000"/>
+              </a:lnSpc>
+              <a:spcBef>
+                <a:spcPts val="0"/>
+              </a:spcBef>
+              <a:spcAft>
+                <a:spcPts val="600"/>
+              </a:spcAft>
+            </a:pPr>
+            <a:r>
+              <a:rPr sz="1350" b="0" i="0">
+                <a:solidFill>
+                  <a:srgbClr val="C9D4E6"/>
+                </a:solidFill>
+                <a:latin typeface="Segoe UI"/>
+              </a:rPr>
+              <a:t>Agent invents its own opaque plan from prompts</a:t>
+            </a:r>
+          </a:p>
+        </p:txBody>
+      </p:sp>
+      <p:sp>
+        <p:nvSpPr>
+          <p:cNvPr id="23" name="Rectangle 22"/>
+          <p:cNvSpPr/>
+          <p:nvPr/>
+        </p:nvSpPr>
+        <p:spPr>
+          <a:xfrm>
+            <a:off x="7086599" y="3035808"/>
+            <a:ext cx="4572000" cy="603504"/>
+          </a:xfrm>
+          <a:prstGeom prst="rect">
+            <a:avLst/>
+          </a:prstGeom>
+          <a:solidFill>
+            <a:srgbClr val="102444"/>
+          </a:solidFill>
+          <a:ln>
+            <a:noFill/>
+          </a:ln>
+          <a:effectLst/>
+        </p:spPr>
+        <p:style>
+          <a:lnRef idx="1">
+            <a:schemeClr val="accent1"/>
+          </a:lnRef>
+          <a:fillRef idx="3">
+            <a:schemeClr val="accent1"/>
+          </a:fillRef>
+          <a:effectRef idx="2">
+            <a:schemeClr val="accent1"/>
+          </a:effectRef>
+          <a:fontRef idx="minor">
+            <a:schemeClr val="lt1"/>
+          </a:fontRef>
+        </p:style>
+        <p:txBody>
+          <a:bodyPr rtlCol="0" anchor="ctr"/>
+          <a:lstStyle/>
+          <a:p>
+            <a:pPr algn="ctr"/>
+            <a:endParaRPr/>
+          </a:p>
+        </p:txBody>
+      </p:sp>
+      <p:sp>
+        <p:nvSpPr>
+          <p:cNvPr id="24" name="Rectangle 23"/>
+          <p:cNvSpPr/>
+          <p:nvPr/>
+        </p:nvSpPr>
+        <p:spPr>
+          <a:xfrm>
+            <a:off x="7086599" y="3035808"/>
+            <a:ext cx="54864" cy="603504"/>
+          </a:xfrm>
+          <a:prstGeom prst="rect">
+            <a:avLst/>
+          </a:prstGeom>
+          <a:solidFill>
+            <a:srgbClr val="27D3C4"/>
+          </a:solidFill>
+          <a:ln>
+            <a:noFill/>
+          </a:ln>
+          <a:effectLst/>
+        </p:spPr>
+        <p:style>
+          <a:lnRef idx="1">
+            <a:schemeClr val="accent1"/>
+          </a:lnRef>
+          <a:fillRef idx="3">
+            <a:schemeClr val="accent1"/>
+          </a:fillRef>
+          <a:effectRef idx="2">
+            <a:schemeClr val="accent1"/>
+          </a:effectRef>
+          <a:fontRef idx="minor">
+            <a:schemeClr val="lt1"/>
+          </a:fontRef>
+        </p:style>
+        <p:txBody>
+          <a:bodyPr rtlCol="0" anchor="ctr"/>
+          <a:lstStyle/>
+          <a:p>
+            <a:pPr algn="ctr"/>
+            <a:endParaRPr/>
+          </a:p>
+        </p:txBody>
+      </p:sp>
+      <p:sp>
+        <p:nvSpPr>
+          <p:cNvPr id="25" name="TextBox 24"/>
+          <p:cNvSpPr txBox="1"/>
+          <p:nvPr/>
+        </p:nvSpPr>
+        <p:spPr>
+          <a:xfrm>
+            <a:off x="7251191" y="3035808"/>
+            <a:ext cx="4297680" cy="603504"/>
+          </a:xfrm>
+          <a:prstGeom prst="rect">
+            <a:avLst/>
+          </a:prstGeom>
+          <a:noFill/>
+        </p:spPr>
+        <p:txBody>
+          <a:bodyPr wrap="square" lIns="0" tIns="0" rIns="0" bIns="0" anchor="ctr">
+            <a:spAutoFit/>
+          </a:bodyPr>
+          <a:lstStyle/>
+          <a:p>
+            <a:pPr algn="l">
+              <a:lnSpc>
+                <a:spcPct val="95000"/>
+              </a:lnSpc>
+              <a:spcBef>
+                <a:spcPts val="0"/>
+              </a:spcBef>
+              <a:spcAft>
+                <a:spcPts val="600"/>
+              </a:spcAft>
+            </a:pPr>
+            <a:r>
+              <a:rPr sz="1350" b="0" i="0">
+                <a:solidFill>
+                  <a:srgbClr val="FFFFFF"/>
+                </a:solidFill>
+                <a:latin typeface="Segoe UI"/>
+              </a:rPr>
+              <a:t>Visible plan at task / scenario / feature level</a:t>
+            </a:r>
+          </a:p>
+        </p:txBody>
+      </p:sp>
+      <p:sp>
+        <p:nvSpPr>
+          <p:cNvPr id="26" name="Rectangle 25"/>
+          <p:cNvSpPr/>
+          <p:nvPr/>
+        </p:nvSpPr>
+        <p:spPr>
+          <a:xfrm>
+            <a:off x="640080" y="3639312"/>
+            <a:ext cx="1874519" cy="603504"/>
+          </a:xfrm>
+          <a:prstGeom prst="rect">
+            <a:avLst/>
+          </a:prstGeom>
+          <a:solidFill>
+            <a:srgbClr val="0A1B33"/>
+          </a:solidFill>
+          <a:ln>
+            <a:noFill/>
+          </a:ln>
+          <a:effectLst/>
+        </p:spPr>
+        <p:style>
+          <a:lnRef idx="1">
+            <a:schemeClr val="accent1"/>
+          </a:lnRef>
+          <a:fillRef idx="3">
+            <a:schemeClr val="accent1"/>
+          </a:fillRef>
+          <a:effectRef idx="2">
+            <a:schemeClr val="accent1"/>
+          </a:effectRef>
+          <a:fontRef idx="minor">
+            <a:schemeClr val="lt1"/>
+          </a:fontRef>
+        </p:style>
+        <p:txBody>
+          <a:bodyPr rtlCol="0" anchor="ctr"/>
+          <a:lstStyle/>
+          <a:p>
+            <a:pPr algn="ctr"/>
+            <a:endParaRPr/>
+          </a:p>
+        </p:txBody>
+      </p:sp>
+      <p:sp>
+        <p:nvSpPr>
+          <p:cNvPr id="27" name="TextBox 26"/>
+          <p:cNvSpPr txBox="1"/>
+          <p:nvPr/>
+        </p:nvSpPr>
+        <p:spPr>
+          <a:xfrm>
+            <a:off x="804672" y="3639312"/>
+            <a:ext cx="1600199" cy="603504"/>
+          </a:xfrm>
+          <a:prstGeom prst="rect">
+            <a:avLst/>
+          </a:prstGeom>
+          <a:noFill/>
+        </p:spPr>
+        <p:txBody>
+          <a:bodyPr wrap="square" lIns="0" tIns="0" rIns="0" bIns="0" anchor="ctr">
+            <a:spAutoFit/>
+          </a:bodyPr>
+          <a:lstStyle/>
+          <a:p>
+            <a:pPr algn="l">
+              <a:lnSpc>
+                <a:spcPct val="95000"/>
+              </a:lnSpc>
+              <a:spcBef>
+                <a:spcPts val="0"/>
+              </a:spcBef>
+              <a:spcAft>
+                <a:spcPts val="600"/>
+              </a:spcAft>
+            </a:pPr>
+            <a:r>
+              <a:rPr sz="1350" b="1" i="0">
+                <a:solidFill>
+                  <a:srgbClr val="FFFFFF"/>
+                </a:solidFill>
+                <a:latin typeface="Segoe UI"/>
+              </a:rPr>
+              <a:t>Driving</a:t>
+            </a:r>
+          </a:p>
+        </p:txBody>
+      </p:sp>
+      <p:sp>
+        <p:nvSpPr>
+          <p:cNvPr id="28" name="Rectangle 27"/>
+          <p:cNvSpPr/>
+          <p:nvPr/>
+        </p:nvSpPr>
+        <p:spPr>
+          <a:xfrm>
+            <a:off x="2514599" y="3639312"/>
             <a:ext cx="4572000" cy="603504"/>
           </a:xfrm>
           <a:prstGeom prst="rect">
@@ -8937,18 +9437,19 @@
           <a:lstStyle/>
           <a:p>
             <a:pPr algn="ctr"/>
-          </a:p>
-        </p:txBody>
-      </p:sp>
-      <p:sp>
-        <p:nvSpPr>
-          <p:cNvPr id="15" name="TextBox 14"/>
+            <a:endParaRPr/>
+          </a:p>
+        </p:txBody>
+      </p:sp>
+      <p:sp>
+        <p:nvSpPr>
+          <p:cNvPr id="29" name="TextBox 28"/>
           <p:cNvSpPr txBox="1"/>
           <p:nvPr/>
         </p:nvSpPr>
         <p:spPr>
           <a:xfrm>
-            <a:off x="2679191" y="2432304"/>
+            <a:off x="2679191" y="3639312"/>
             <a:ext cx="4297680" cy="603504"/>
           </a:xfrm>
           <a:prstGeom prst="rect">
@@ -8957,7 +9458,7 @@
           <a:noFill/>
         </p:spPr>
         <p:txBody>
-          <a:bodyPr wrap="square" anchor="ctr" lIns="0" rIns="0" tIns="0" bIns="0">
+          <a:bodyPr wrap="square" lIns="0" tIns="0" rIns="0" bIns="0" anchor="ctr">
             <a:spAutoFit/>
           </a:bodyPr>
           <a:lstStyle/>
@@ -8980,20 +9481,20 @@
                 </a:solidFill>
                 <a:latin typeface="Segoe UI"/>
               </a:rPr>
-              <a:t>Coding agents that plan tasks &amp; generate code</a:t>
-            </a:r>
-          </a:p>
-        </p:txBody>
-      </p:sp>
-      <p:sp>
-        <p:nvSpPr>
-          <p:cNvPr id="16" name="Rectangle 15"/>
+              <a:t>Prompt-heavy — repeated manual prompting</a:t>
+            </a:r>
+          </a:p>
+        </p:txBody>
+      </p:sp>
+      <p:sp>
+        <p:nvSpPr>
+          <p:cNvPr id="30" name="Rectangle 29"/>
           <p:cNvSpPr/>
           <p:nvPr/>
         </p:nvSpPr>
         <p:spPr>
           <a:xfrm>
-            <a:off x="7086599" y="2432304"/>
+            <a:off x="7086599" y="3639312"/>
             <a:ext cx="4572000" cy="603504"/>
           </a:xfrm>
           <a:prstGeom prst="rect">
@@ -9026,18 +9527,19 @@
           <a:lstStyle/>
           <a:p>
             <a:pPr algn="ctr"/>
-          </a:p>
-        </p:txBody>
-      </p:sp>
-      <p:sp>
-        <p:nvSpPr>
-          <p:cNvPr id="17" name="Rectangle 16"/>
+            <a:endParaRPr/>
+          </a:p>
+        </p:txBody>
+      </p:sp>
+      <p:sp>
+        <p:nvSpPr>
+          <p:cNvPr id="31" name="Rectangle 30"/>
           <p:cNvSpPr/>
           <p:nvPr/>
         </p:nvSpPr>
         <p:spPr>
           <a:xfrm>
-            <a:off x="7086599" y="2432304"/>
+            <a:off x="7086599" y="3639312"/>
             <a:ext cx="54864" cy="603504"/>
           </a:xfrm>
           <a:prstGeom prst="rect">
@@ -9070,18 +9572,19 @@
           <a:lstStyle/>
           <a:p>
             <a:pPr algn="ctr"/>
-          </a:p>
-        </p:txBody>
-      </p:sp>
-      <p:sp>
-        <p:nvSpPr>
-          <p:cNvPr id="18" name="TextBox 17"/>
+            <a:endParaRPr/>
+          </a:p>
+        </p:txBody>
+      </p:sp>
+      <p:sp>
+        <p:nvSpPr>
+          <p:cNvPr id="32" name="TextBox 31"/>
           <p:cNvSpPr txBox="1"/>
           <p:nvPr/>
         </p:nvSpPr>
         <p:spPr>
           <a:xfrm>
-            <a:off x="7251191" y="2432304"/>
+            <a:off x="7251191" y="3639312"/>
             <a:ext cx="4297680" cy="603504"/>
           </a:xfrm>
           <a:prstGeom prst="rect">
@@ -9090,7 +9593,7 @@
           <a:noFill/>
         </p:spPr>
         <p:txBody>
-          <a:bodyPr wrap="square" anchor="ctr" lIns="0" rIns="0" tIns="0" bIns="0">
+          <a:bodyPr wrap="square" lIns="0" tIns="0" rIns="0" bIns="0" anchor="ctr">
             <a:spAutoFit/>
           </a:bodyPr>
           <a:lstStyle/>
@@ -9113,20 +9616,20 @@
                 </a:solidFill>
                 <a:latin typeface="Segoe UI"/>
               </a:rPr>
-              <a:t>Control plane that drives &amp; governs those agents</a:t>
-            </a:r>
-          </a:p>
-        </p:txBody>
-      </p:sp>
-      <p:sp>
-        <p:nvSpPr>
-          <p:cNvPr id="19" name="Rectangle 18"/>
+              <a:t>Prompt-light — structured blueprint instructions</a:t>
+            </a:r>
+          </a:p>
+        </p:txBody>
+      </p:sp>
+      <p:sp>
+        <p:nvSpPr>
+          <p:cNvPr id="33" name="Rectangle 32"/>
           <p:cNvSpPr/>
           <p:nvPr/>
         </p:nvSpPr>
         <p:spPr>
           <a:xfrm>
-            <a:off x="640080" y="3035808"/>
+            <a:off x="640080" y="4242816"/>
             <a:ext cx="1874519" cy="603504"/>
           </a:xfrm>
           <a:prstGeom prst="rect">
@@ -9159,18 +9662,19 @@
           <a:lstStyle/>
           <a:p>
             <a:pPr algn="ctr"/>
-          </a:p>
-        </p:txBody>
-      </p:sp>
-      <p:sp>
-        <p:nvSpPr>
-          <p:cNvPr id="20" name="TextBox 19"/>
+            <a:endParaRPr/>
+          </a:p>
+        </p:txBody>
+      </p:sp>
+      <p:sp>
+        <p:nvSpPr>
+          <p:cNvPr id="34" name="TextBox 33"/>
           <p:cNvSpPr txBox="1"/>
           <p:nvPr/>
         </p:nvSpPr>
         <p:spPr>
           <a:xfrm>
-            <a:off x="804672" y="3035808"/>
+            <a:off x="804672" y="4242816"/>
             <a:ext cx="1600199" cy="603504"/>
           </a:xfrm>
           <a:prstGeom prst="rect">
@@ -9179,7 +9683,7 @@
           <a:noFill/>
         </p:spPr>
         <p:txBody>
-          <a:bodyPr wrap="square" anchor="ctr" lIns="0" rIns="0" tIns="0" bIns="0">
+          <a:bodyPr wrap="square" lIns="0" tIns="0" rIns="0" bIns="0" anchor="ctr">
             <a:spAutoFit/>
           </a:bodyPr>
           <a:lstStyle/>
@@ -9202,20 +9706,20 @@
                 </a:solidFill>
                 <a:latin typeface="Segoe UI"/>
               </a:rPr>
-              <a:t>Planning</a:t>
-            </a:r>
-          </a:p>
-        </p:txBody>
-      </p:sp>
-      <p:sp>
-        <p:nvSpPr>
-          <p:cNvPr id="21" name="Rectangle 20"/>
+              <a:t>Validation</a:t>
+            </a:r>
+          </a:p>
+        </p:txBody>
+      </p:sp>
+      <p:sp>
+        <p:nvSpPr>
+          <p:cNvPr id="35" name="Rectangle 34"/>
           <p:cNvSpPr/>
           <p:nvPr/>
         </p:nvSpPr>
         <p:spPr>
           <a:xfrm>
-            <a:off x="2514599" y="3035808"/>
+            <a:off x="2514599" y="4242816"/>
             <a:ext cx="4572000" cy="603504"/>
           </a:xfrm>
           <a:prstGeom prst="rect">
@@ -9248,18 +9752,19 @@
           <a:lstStyle/>
           <a:p>
             <a:pPr algn="ctr"/>
-          </a:p>
-        </p:txBody>
-      </p:sp>
-      <p:sp>
-        <p:nvSpPr>
-          <p:cNvPr id="22" name="TextBox 21"/>
+            <a:endParaRPr/>
+          </a:p>
+        </p:txBody>
+      </p:sp>
+      <p:sp>
+        <p:nvSpPr>
+          <p:cNvPr id="36" name="TextBox 35"/>
           <p:cNvSpPr txBox="1"/>
           <p:nvPr/>
         </p:nvSpPr>
         <p:spPr>
           <a:xfrm>
-            <a:off x="2679191" y="3035808"/>
+            <a:off x="2679191" y="4242816"/>
             <a:ext cx="4297680" cy="603504"/>
           </a:xfrm>
           <a:prstGeom prst="rect">
@@ -9268,7 +9773,7 @@
           <a:noFill/>
         </p:spPr>
         <p:txBody>
-          <a:bodyPr wrap="square" anchor="ctr" lIns="0" rIns="0" tIns="0" bIns="0">
+          <a:bodyPr wrap="square" lIns="0" tIns="0" rIns="0" bIns="0" anchor="ctr">
             <a:spAutoFit/>
           </a:bodyPr>
           <a:lstStyle/>
@@ -9291,20 +9796,20 @@
                 </a:solidFill>
                 <a:latin typeface="Segoe UI"/>
               </a:rPr>
-              <a:t>Agent invents its own opaque plan from prompts</a:t>
-            </a:r>
-          </a:p>
-        </p:txBody>
-      </p:sp>
-      <p:sp>
-        <p:nvSpPr>
-          <p:cNvPr id="23" name="Rectangle 22"/>
+              <a:t>Issues surface later in QA or production</a:t>
+            </a:r>
+          </a:p>
+        </p:txBody>
+      </p:sp>
+      <p:sp>
+        <p:nvSpPr>
+          <p:cNvPr id="37" name="Rectangle 36"/>
           <p:cNvSpPr/>
           <p:nvPr/>
         </p:nvSpPr>
         <p:spPr>
           <a:xfrm>
-            <a:off x="7086599" y="3035808"/>
+            <a:off x="7086599" y="4242816"/>
             <a:ext cx="4572000" cy="603504"/>
           </a:xfrm>
           <a:prstGeom prst="rect">
@@ -9337,18 +9842,19 @@
           <a:lstStyle/>
           <a:p>
             <a:pPr algn="ctr"/>
-          </a:p>
-        </p:txBody>
-      </p:sp>
-      <p:sp>
-        <p:nvSpPr>
-          <p:cNvPr id="24" name="Rectangle 23"/>
+            <a:endParaRPr/>
+          </a:p>
+        </p:txBody>
+      </p:sp>
+      <p:sp>
+        <p:nvSpPr>
+          <p:cNvPr id="38" name="Rectangle 37"/>
           <p:cNvSpPr/>
           <p:nvPr/>
         </p:nvSpPr>
         <p:spPr>
           <a:xfrm>
-            <a:off x="7086599" y="3035808"/>
+            <a:off x="7086599" y="4242816"/>
             <a:ext cx="54864" cy="603504"/>
           </a:xfrm>
           <a:prstGeom prst="rect">
@@ -9381,18 +9887,19 @@
           <a:lstStyle/>
           <a:p>
             <a:pPr algn="ctr"/>
-          </a:p>
-        </p:txBody>
-      </p:sp>
-      <p:sp>
-        <p:nvSpPr>
-          <p:cNvPr id="25" name="TextBox 24"/>
+            <a:endParaRPr/>
+          </a:p>
+        </p:txBody>
+      </p:sp>
+      <p:sp>
+        <p:nvSpPr>
+          <p:cNvPr id="39" name="TextBox 38"/>
           <p:cNvSpPr txBox="1"/>
           <p:nvPr/>
         </p:nvSpPr>
         <p:spPr>
           <a:xfrm>
-            <a:off x="7251191" y="3035808"/>
+            <a:off x="7251191" y="4242816"/>
             <a:ext cx="4297680" cy="603504"/>
           </a:xfrm>
           <a:prstGeom prst="rect">
@@ -9401,7 +9908,7 @@
           <a:noFill/>
         </p:spPr>
         <p:txBody>
-          <a:bodyPr wrap="square" anchor="ctr" lIns="0" rIns="0" tIns="0" bIns="0">
+          <a:bodyPr wrap="square" lIns="0" tIns="0" rIns="0" bIns="0" anchor="ctr">
             <a:spAutoFit/>
           </a:bodyPr>
           <a:lstStyle/>
@@ -9424,20 +9931,20 @@
                 </a:solidFill>
                 <a:latin typeface="Segoe UI"/>
               </a:rPr>
-              <a:t>Visible plan at task / scenario / feature level</a:t>
-            </a:r>
-          </a:p>
-        </p:txBody>
-      </p:sp>
-      <p:sp>
-        <p:nvSpPr>
-          <p:cNvPr id="26" name="Rectangle 25"/>
+              <a:t>Tests + BDD + auto-fix on each unit before merge</a:t>
+            </a:r>
+          </a:p>
+        </p:txBody>
+      </p:sp>
+      <p:sp>
+        <p:nvSpPr>
+          <p:cNvPr id="40" name="Rectangle 39"/>
           <p:cNvSpPr/>
           <p:nvPr/>
         </p:nvSpPr>
         <p:spPr>
           <a:xfrm>
-            <a:off x="640080" y="3639312"/>
+            <a:off x="640080" y="4846320"/>
             <a:ext cx="1874519" cy="603504"/>
           </a:xfrm>
           <a:prstGeom prst="rect">
@@ -9470,18 +9977,19 @@
           <a:lstStyle/>
           <a:p>
             <a:pPr algn="ctr"/>
-          </a:p>
-        </p:txBody>
-      </p:sp>
-      <p:sp>
-        <p:nvSpPr>
-          <p:cNvPr id="27" name="TextBox 26"/>
+            <a:endParaRPr/>
+          </a:p>
+        </p:txBody>
+      </p:sp>
+      <p:sp>
+        <p:nvSpPr>
+          <p:cNvPr id="41" name="TextBox 40"/>
           <p:cNvSpPr txBox="1"/>
           <p:nvPr/>
         </p:nvSpPr>
         <p:spPr>
           <a:xfrm>
-            <a:off x="804672" y="3639312"/>
+            <a:off x="804672" y="4846320"/>
             <a:ext cx="1600199" cy="603504"/>
           </a:xfrm>
           <a:prstGeom prst="rect">
@@ -9490,7 +9998,7 @@
           <a:noFill/>
         </p:spPr>
         <p:txBody>
-          <a:bodyPr wrap="square" anchor="ctr" lIns="0" rIns="0" tIns="0" bIns="0">
+          <a:bodyPr wrap="square" lIns="0" tIns="0" rIns="0" bIns="0" anchor="ctr">
             <a:spAutoFit/>
           </a:bodyPr>
           <a:lstStyle/>
@@ -9513,20 +10021,20 @@
                 </a:solidFill>
                 <a:latin typeface="Segoe UI"/>
               </a:rPr>
-              <a:t>Driving</a:t>
-            </a:r>
-          </a:p>
-        </p:txBody>
-      </p:sp>
-      <p:sp>
-        <p:nvSpPr>
-          <p:cNvPr id="28" name="Rectangle 27"/>
+              <a:t>Token cost</a:t>
+            </a:r>
+          </a:p>
+        </p:txBody>
+      </p:sp>
+      <p:sp>
+        <p:nvSpPr>
+          <p:cNvPr id="42" name="Rectangle 41"/>
           <p:cNvSpPr/>
           <p:nvPr/>
         </p:nvSpPr>
         <p:spPr>
           <a:xfrm>
-            <a:off x="2514599" y="3639312"/>
+            <a:off x="2514599" y="4846320"/>
             <a:ext cx="4572000" cy="603504"/>
           </a:xfrm>
           <a:prstGeom prst="rect">
@@ -9559,18 +10067,19 @@
           <a:lstStyle/>
           <a:p>
             <a:pPr algn="ctr"/>
-          </a:p>
-        </p:txBody>
-      </p:sp>
-      <p:sp>
-        <p:nvSpPr>
-          <p:cNvPr id="29" name="TextBox 28"/>
+            <a:endParaRPr/>
+          </a:p>
+        </p:txBody>
+      </p:sp>
+      <p:sp>
+        <p:nvSpPr>
+          <p:cNvPr id="43" name="TextBox 42"/>
           <p:cNvSpPr txBox="1"/>
           <p:nvPr/>
         </p:nvSpPr>
         <p:spPr>
           <a:xfrm>
-            <a:off x="2679191" y="3639312"/>
+            <a:off x="2679191" y="4846320"/>
             <a:ext cx="4297680" cy="603504"/>
           </a:xfrm>
           <a:prstGeom prst="rect">
@@ -9579,7 +10088,7 @@
           <a:noFill/>
         </p:spPr>
         <p:txBody>
-          <a:bodyPr wrap="square" anchor="ctr" lIns="0" rIns="0" tIns="0" bIns="0">
+          <a:bodyPr wrap="square" lIns="0" tIns="0" rIns="0" bIns="0" anchor="ctr">
             <a:spAutoFit/>
           </a:bodyPr>
           <a:lstStyle/>
@@ -9602,20 +10111,20 @@
                 </a:solidFill>
                 <a:latin typeface="Segoe UI"/>
               </a:rPr>
-              <a:t>Prompt-heavy — repeated manual prompting</a:t>
-            </a:r>
-          </a:p>
-        </p:txBody>
-      </p:sp>
-      <p:sp>
-        <p:nvSpPr>
-          <p:cNvPr id="30" name="Rectangle 29"/>
+              <a:t>Agent swarms → six-figure monthly bills</a:t>
+            </a:r>
+          </a:p>
+        </p:txBody>
+      </p:sp>
+      <p:sp>
+        <p:nvSpPr>
+          <p:cNvPr id="44" name="Rectangle 43"/>
           <p:cNvSpPr/>
           <p:nvPr/>
         </p:nvSpPr>
         <p:spPr>
           <a:xfrm>
-            <a:off x="7086599" y="3639312"/>
+            <a:off x="7086599" y="4846320"/>
             <a:ext cx="4572000" cy="603504"/>
           </a:xfrm>
           <a:prstGeom prst="rect">
@@ -9648,18 +10157,19 @@
           <a:lstStyle/>
           <a:p>
             <a:pPr algn="ctr"/>
-          </a:p>
-        </p:txBody>
-      </p:sp>
-      <p:sp>
-        <p:nvSpPr>
-          <p:cNvPr id="31" name="Rectangle 30"/>
+            <a:endParaRPr/>
+          </a:p>
+        </p:txBody>
+      </p:sp>
+      <p:sp>
+        <p:nvSpPr>
+          <p:cNvPr id="45" name="Rectangle 44"/>
           <p:cNvSpPr/>
           <p:nvPr/>
         </p:nvSpPr>
         <p:spPr>
           <a:xfrm>
-            <a:off x="7086599" y="3639312"/>
+            <a:off x="7086599" y="4846320"/>
             <a:ext cx="54864" cy="603504"/>
           </a:xfrm>
           <a:prstGeom prst="rect">
@@ -9692,18 +10202,19 @@
           <a:lstStyle/>
           <a:p>
             <a:pPr algn="ctr"/>
-          </a:p>
-        </p:txBody>
-      </p:sp>
-      <p:sp>
-        <p:nvSpPr>
-          <p:cNvPr id="32" name="TextBox 31"/>
+            <a:endParaRPr/>
+          </a:p>
+        </p:txBody>
+      </p:sp>
+      <p:sp>
+        <p:nvSpPr>
+          <p:cNvPr id="46" name="TextBox 45"/>
           <p:cNvSpPr txBox="1"/>
           <p:nvPr/>
         </p:nvSpPr>
         <p:spPr>
           <a:xfrm>
-            <a:off x="7251191" y="3639312"/>
+            <a:off x="7251191" y="4846320"/>
             <a:ext cx="4297680" cy="603504"/>
           </a:xfrm>
           <a:prstGeom prst="rect">
@@ -9712,7 +10223,7 @@
           <a:noFill/>
         </p:spPr>
         <p:txBody>
-          <a:bodyPr wrap="square" anchor="ctr" lIns="0" rIns="0" tIns="0" bIns="0">
+          <a:bodyPr wrap="square" lIns="0" tIns="0" rIns="0" bIns="0" anchor="ctr">
             <a:spAutoFit/>
           </a:bodyPr>
           <a:lstStyle/>
@@ -9735,20 +10246,20 @@
                 </a:solidFill>
                 <a:latin typeface="Segoe UI"/>
               </a:rPr>
-              <a:t>Prompt-light — structured blueprint instructions</a:t>
-            </a:r>
-          </a:p>
-        </p:txBody>
-      </p:sp>
-      <p:sp>
-        <p:nvSpPr>
-          <p:cNvPr id="33" name="Rectangle 32"/>
+              <a:t>Controlled pipeline → far lower effective cost</a:t>
+            </a:r>
+          </a:p>
+        </p:txBody>
+      </p:sp>
+      <p:sp>
+        <p:nvSpPr>
+          <p:cNvPr id="47" name="Rectangle 46"/>
           <p:cNvSpPr/>
           <p:nvPr/>
         </p:nvSpPr>
         <p:spPr>
           <a:xfrm>
-            <a:off x="640080" y="4242816"/>
+            <a:off x="640080" y="5449824"/>
             <a:ext cx="1874519" cy="603504"/>
           </a:xfrm>
           <a:prstGeom prst="rect">
@@ -9781,18 +10292,19 @@
           <a:lstStyle/>
           <a:p>
             <a:pPr algn="ctr"/>
-          </a:p>
-        </p:txBody>
-      </p:sp>
-      <p:sp>
-        <p:nvSpPr>
-          <p:cNvPr id="34" name="TextBox 33"/>
+            <a:endParaRPr/>
+          </a:p>
+        </p:txBody>
+      </p:sp>
+      <p:sp>
+        <p:nvSpPr>
+          <p:cNvPr id="48" name="TextBox 47"/>
           <p:cNvSpPr txBox="1"/>
           <p:nvPr/>
         </p:nvSpPr>
         <p:spPr>
           <a:xfrm>
-            <a:off x="804672" y="4242816"/>
+            <a:off x="804672" y="5449824"/>
             <a:ext cx="1600199" cy="603504"/>
           </a:xfrm>
           <a:prstGeom prst="rect">
@@ -9801,7 +10313,7 @@
           <a:noFill/>
         </p:spPr>
         <p:txBody>
-          <a:bodyPr wrap="square" anchor="ctr" lIns="0" rIns="0" tIns="0" bIns="0">
+          <a:bodyPr wrap="square" lIns="0" tIns="0" rIns="0" bIns="0" anchor="ctr">
             <a:spAutoFit/>
           </a:bodyPr>
           <a:lstStyle/>
@@ -9824,20 +10336,20 @@
                 </a:solidFill>
                 <a:latin typeface="Segoe UI"/>
               </a:rPr>
-              <a:t>Validation</a:t>
-            </a:r>
-          </a:p>
-        </p:txBody>
-      </p:sp>
-      <p:sp>
-        <p:nvSpPr>
-          <p:cNvPr id="35" name="Rectangle 34"/>
+              <a:t>Focus</a:t>
+            </a:r>
+          </a:p>
+        </p:txBody>
+      </p:sp>
+      <p:sp>
+        <p:nvSpPr>
+          <p:cNvPr id="49" name="Rectangle 48"/>
           <p:cNvSpPr/>
           <p:nvPr/>
         </p:nvSpPr>
         <p:spPr>
           <a:xfrm>
-            <a:off x="2514599" y="4242816"/>
+            <a:off x="2514599" y="5449824"/>
             <a:ext cx="4572000" cy="603504"/>
           </a:xfrm>
           <a:prstGeom prst="rect">
@@ -9870,18 +10382,19 @@
           <a:lstStyle/>
           <a:p>
             <a:pPr algn="ctr"/>
-          </a:p>
-        </p:txBody>
-      </p:sp>
-      <p:sp>
-        <p:nvSpPr>
-          <p:cNvPr id="36" name="TextBox 35"/>
+            <a:endParaRPr/>
+          </a:p>
+        </p:txBody>
+      </p:sp>
+      <p:sp>
+        <p:nvSpPr>
+          <p:cNvPr id="50" name="TextBox 49"/>
           <p:cNvSpPr txBox="1"/>
           <p:nvPr/>
         </p:nvSpPr>
         <p:spPr>
           <a:xfrm>
-            <a:off x="2679191" y="4242816"/>
+            <a:off x="2679191" y="5449824"/>
             <a:ext cx="4297680" cy="603504"/>
           </a:xfrm>
           <a:prstGeom prst="rect">
@@ -9890,7 +10403,7 @@
           <a:noFill/>
         </p:spPr>
         <p:txBody>
-          <a:bodyPr wrap="square" anchor="ctr" lIns="0" rIns="0" tIns="0" bIns="0">
+          <a:bodyPr wrap="square" lIns="0" tIns="0" rIns="0" bIns="0" anchor="ctr">
             <a:spAutoFit/>
           </a:bodyPr>
           <a:lstStyle/>
@@ -9913,20 +10426,20 @@
                 </a:solidFill>
                 <a:latin typeface="Segoe UI"/>
               </a:rPr>
-              <a:t>Issues surface later in QA or production</a:t>
-            </a:r>
-          </a:p>
-        </p:txBody>
-      </p:sp>
-      <p:sp>
-        <p:nvSpPr>
-          <p:cNvPr id="37" name="Rectangle 36"/>
+              <a:t>Generic software-dev productivity</a:t>
+            </a:r>
+          </a:p>
+        </p:txBody>
+      </p:sp>
+      <p:sp>
+        <p:nvSpPr>
+          <p:cNvPr id="51" name="Rectangle 50"/>
           <p:cNvSpPr/>
           <p:nvPr/>
         </p:nvSpPr>
         <p:spPr>
           <a:xfrm>
-            <a:off x="7086599" y="4242816"/>
+            <a:off x="7086599" y="5449824"/>
             <a:ext cx="4572000" cy="603504"/>
           </a:xfrm>
           <a:prstGeom prst="rect">
@@ -9959,18 +10472,19 @@
           <a:lstStyle/>
           <a:p>
             <a:pPr algn="ctr"/>
-          </a:p>
-        </p:txBody>
-      </p:sp>
-      <p:sp>
-        <p:nvSpPr>
-          <p:cNvPr id="38" name="Rectangle 37"/>
+            <a:endParaRPr/>
+          </a:p>
+        </p:txBody>
+      </p:sp>
+      <p:sp>
+        <p:nvSpPr>
+          <p:cNvPr id="52" name="Rectangle 51"/>
           <p:cNvSpPr/>
           <p:nvPr/>
         </p:nvSpPr>
         <p:spPr>
           <a:xfrm>
-            <a:off x="7086599" y="4242816"/>
+            <a:off x="7086599" y="5449824"/>
             <a:ext cx="54864" cy="603504"/>
           </a:xfrm>
           <a:prstGeom prst="rect">
@@ -10003,18 +10517,19 @@
           <a:lstStyle/>
           <a:p>
             <a:pPr algn="ctr"/>
-          </a:p>
-        </p:txBody>
-      </p:sp>
-      <p:sp>
-        <p:nvSpPr>
-          <p:cNvPr id="39" name="TextBox 38"/>
+            <a:endParaRPr/>
+          </a:p>
+        </p:txBody>
+      </p:sp>
+      <p:sp>
+        <p:nvSpPr>
+          <p:cNvPr id="53" name="TextBox 52"/>
           <p:cNvSpPr txBox="1"/>
           <p:nvPr/>
         </p:nvSpPr>
         <p:spPr>
           <a:xfrm>
-            <a:off x="7251191" y="4242816"/>
+            <a:off x="7251191" y="5449824"/>
             <a:ext cx="4297680" cy="603504"/>
           </a:xfrm>
           <a:prstGeom prst="rect">
@@ -10023,7 +10538,7 @@
           <a:noFill/>
         </p:spPr>
         <p:txBody>
-          <a:bodyPr wrap="square" anchor="ctr" lIns="0" rIns="0" tIns="0" bIns="0">
+          <a:bodyPr wrap="square" lIns="0" tIns="0" rIns="0" bIns="0" anchor="ctr">
             <a:spAutoFit/>
           </a:bodyPr>
           <a:lstStyle/>
@@ -10046,65 +10561,21 @@
                 </a:solidFill>
                 <a:latin typeface="Segoe UI"/>
               </a:rPr>
-              <a:t>Tests + BDD + auto-fix on each unit before merge</a:t>
-            </a:r>
-          </a:p>
-        </p:txBody>
-      </p:sp>
-      <p:sp>
-        <p:nvSpPr>
-          <p:cNvPr id="40" name="Rectangle 39"/>
-          <p:cNvSpPr/>
-          <p:nvPr/>
-        </p:nvSpPr>
-        <p:spPr>
-          <a:xfrm>
-            <a:off x="640080" y="4846320"/>
-            <a:ext cx="1874519" cy="603504"/>
-          </a:xfrm>
-          <a:prstGeom prst="rect">
-            <a:avLst/>
-          </a:prstGeom>
-          <a:solidFill>
-            <a:srgbClr val="0A1B33"/>
-          </a:solidFill>
-          <a:ln>
-            <a:noFill/>
-          </a:ln>
-          <a:effectLst/>
-        </p:spPr>
-        <p:style>
-          <a:lnRef idx="1">
-            <a:schemeClr val="accent1"/>
-          </a:lnRef>
-          <a:fillRef idx="3">
-            <a:schemeClr val="accent1"/>
-          </a:fillRef>
-          <a:effectRef idx="2">
-            <a:schemeClr val="accent1"/>
-          </a:effectRef>
-          <a:fontRef idx="minor">
-            <a:schemeClr val="lt1"/>
-          </a:fontRef>
-        </p:style>
-        <p:txBody>
-          <a:bodyPr rtlCol="0" anchor="ctr"/>
-          <a:lstStyle/>
-          <a:p>
-            <a:pPr algn="ctr"/>
-          </a:p>
-        </p:txBody>
-      </p:sp>
-      <p:sp>
-        <p:nvSpPr>
-          <p:cNvPr id="41" name="TextBox 40"/>
+              <a:t>Robotics, factories &amp; industrial multi-tenant SaaS</a:t>
+            </a:r>
+          </a:p>
+        </p:txBody>
+      </p:sp>
+      <p:sp>
+        <p:nvSpPr>
+          <p:cNvPr id="54" name="TextBox 53"/>
           <p:cNvSpPr txBox="1"/>
           <p:nvPr/>
         </p:nvSpPr>
         <p:spPr>
           <a:xfrm>
-            <a:off x="804672" y="4846320"/>
-            <a:ext cx="1600199" cy="603504"/>
+            <a:off x="640080" y="6263640"/>
+            <a:ext cx="10972800" cy="457200"/>
           </a:xfrm>
           <a:prstGeom prst="rect">
             <a:avLst/>
@@ -10112,14 +10583,14 @@
           <a:noFill/>
         </p:spPr>
         <p:txBody>
-          <a:bodyPr wrap="square" anchor="ctr" lIns="0" rIns="0" tIns="0" bIns="0">
+          <a:bodyPr wrap="square" lIns="0" tIns="0" rIns="0" bIns="0" anchor="t">
             <a:spAutoFit/>
           </a:bodyPr>
           <a:lstStyle/>
           <a:p>
             <a:pPr algn="l">
               <a:lnSpc>
-                <a:spcPct val="95000"/>
+                <a:spcPct val="100000"/>
               </a:lnSpc>
               <a:spcBef>
                 <a:spcPts val="0"/>
@@ -10129,71 +10600,36 @@
               </a:spcAft>
             </a:pPr>
             <a:r>
-              <a:rPr sz="1350" b="1" i="0">
-                <a:solidFill>
-                  <a:srgbClr val="FFFFFF"/>
-                </a:solidFill>
-                <a:latin typeface="Segoe UI"/>
-              </a:rPr>
-              <a:t>Token cost</a:t>
-            </a:r>
-          </a:p>
-        </p:txBody>
-      </p:sp>
-      <p:sp>
-        <p:nvSpPr>
-          <p:cNvPr id="42" name="Rectangle 41"/>
-          <p:cNvSpPr/>
-          <p:nvPr/>
-        </p:nvSpPr>
-        <p:spPr>
-          <a:xfrm>
-            <a:off x="2514599" y="4846320"/>
-            <a:ext cx="4572000" cy="603504"/>
-          </a:xfrm>
-          <a:prstGeom prst="rect">
-            <a:avLst/>
-          </a:prstGeom>
-          <a:solidFill>
-            <a:srgbClr val="122A4D"/>
-          </a:solidFill>
-          <a:ln>
-            <a:noFill/>
-          </a:ln>
-          <a:effectLst/>
-        </p:spPr>
-        <p:style>
-          <a:lnRef idx="1">
-            <a:schemeClr val="accent1"/>
-          </a:lnRef>
-          <a:fillRef idx="3">
-            <a:schemeClr val="accent1"/>
-          </a:fillRef>
-          <a:effectRef idx="2">
-            <a:schemeClr val="accent1"/>
-          </a:effectRef>
-          <a:fontRef idx="minor">
-            <a:schemeClr val="lt1"/>
-          </a:fontRef>
-        </p:style>
-        <p:txBody>
-          <a:bodyPr rtlCol="0" anchor="ctr"/>
-          <a:lstStyle/>
-          <a:p>
-            <a:pPr algn="ctr"/>
-          </a:p>
-        </p:txBody>
-      </p:sp>
-      <p:sp>
-        <p:nvSpPr>
-          <p:cNvPr id="43" name="TextBox 42"/>
+              <a:rPr sz="1500" b="1" i="0">
+                <a:solidFill>
+                  <a:srgbClr val="27D3C4"/>
+                </a:solidFill>
+                <a:latin typeface="Segoe UI"/>
+              </a:rPr>
+              <a:t>They are the engines. </a:t>
+            </a:r>
+            <a:r>
+              <a:rPr sz="1500" b="0" i="0">
+                <a:solidFill>
+                  <a:srgbClr val="C9D4E6"/>
+                </a:solidFill>
+                <a:latin typeface="Segoe UI"/>
+              </a:rPr>
+              <a:t>Projexlight is the driver and governor — and ProjexCloud is the industrial data layer agents don't provide.</a:t>
+            </a:r>
+          </a:p>
+        </p:txBody>
+      </p:sp>
+      <p:sp>
+        <p:nvSpPr>
+          <p:cNvPr id="55" name="TextBox 54"/>
           <p:cNvSpPr txBox="1"/>
           <p:nvPr/>
         </p:nvSpPr>
         <p:spPr>
           <a:xfrm>
-            <a:off x="2679191" y="4846320"/>
-            <a:ext cx="4297680" cy="603504"/>
+            <a:off x="11338560" y="6400800"/>
+            <a:ext cx="640080" cy="365760"/>
           </a:xfrm>
           <a:prstGeom prst="rect">
             <a:avLst/>
@@ -10201,554 +10637,11 @@
           <a:noFill/>
         </p:spPr>
         <p:txBody>
-          <a:bodyPr wrap="square" anchor="ctr" lIns="0" rIns="0" tIns="0" bIns="0">
+          <a:bodyPr wrap="square" lIns="0" tIns="0" rIns="0" bIns="0" anchor="t">
             <a:spAutoFit/>
           </a:bodyPr>
           <a:lstStyle/>
           <a:p>
-            <a:pPr algn="l">
-              <a:lnSpc>
-                <a:spcPct val="95000"/>
-              </a:lnSpc>
-              <a:spcBef>
-                <a:spcPts val="0"/>
-              </a:spcBef>
-              <a:spcAft>
-                <a:spcPts val="600"/>
-              </a:spcAft>
-            </a:pPr>
-            <a:r>
-              <a:rPr sz="1350" b="0" i="0">
-                <a:solidFill>
-                  <a:srgbClr val="C9D4E6"/>
-                </a:solidFill>
-                <a:latin typeface="Segoe UI"/>
-              </a:rPr>
-              <a:t>Agent swarms → six-figure monthly bills</a:t>
-            </a:r>
-          </a:p>
-        </p:txBody>
-      </p:sp>
-      <p:sp>
-        <p:nvSpPr>
-          <p:cNvPr id="44" name="Rectangle 43"/>
-          <p:cNvSpPr/>
-          <p:nvPr/>
-        </p:nvSpPr>
-        <p:spPr>
-          <a:xfrm>
-            <a:off x="7086599" y="4846320"/>
-            <a:ext cx="4572000" cy="603504"/>
-          </a:xfrm>
-          <a:prstGeom prst="rect">
-            <a:avLst/>
-          </a:prstGeom>
-          <a:solidFill>
-            <a:srgbClr val="102444"/>
-          </a:solidFill>
-          <a:ln>
-            <a:noFill/>
-          </a:ln>
-          <a:effectLst/>
-        </p:spPr>
-        <p:style>
-          <a:lnRef idx="1">
-            <a:schemeClr val="accent1"/>
-          </a:lnRef>
-          <a:fillRef idx="3">
-            <a:schemeClr val="accent1"/>
-          </a:fillRef>
-          <a:effectRef idx="2">
-            <a:schemeClr val="accent1"/>
-          </a:effectRef>
-          <a:fontRef idx="minor">
-            <a:schemeClr val="lt1"/>
-          </a:fontRef>
-        </p:style>
-        <p:txBody>
-          <a:bodyPr rtlCol="0" anchor="ctr"/>
-          <a:lstStyle/>
-          <a:p>
-            <a:pPr algn="ctr"/>
-          </a:p>
-        </p:txBody>
-      </p:sp>
-      <p:sp>
-        <p:nvSpPr>
-          <p:cNvPr id="45" name="Rectangle 44"/>
-          <p:cNvSpPr/>
-          <p:nvPr/>
-        </p:nvSpPr>
-        <p:spPr>
-          <a:xfrm>
-            <a:off x="7086599" y="4846320"/>
-            <a:ext cx="54864" cy="603504"/>
-          </a:xfrm>
-          <a:prstGeom prst="rect">
-            <a:avLst/>
-          </a:prstGeom>
-          <a:solidFill>
-            <a:srgbClr val="27D3C4"/>
-          </a:solidFill>
-          <a:ln>
-            <a:noFill/>
-          </a:ln>
-          <a:effectLst/>
-        </p:spPr>
-        <p:style>
-          <a:lnRef idx="1">
-            <a:schemeClr val="accent1"/>
-          </a:lnRef>
-          <a:fillRef idx="3">
-            <a:schemeClr val="accent1"/>
-          </a:fillRef>
-          <a:effectRef idx="2">
-            <a:schemeClr val="accent1"/>
-          </a:effectRef>
-          <a:fontRef idx="minor">
-            <a:schemeClr val="lt1"/>
-          </a:fontRef>
-        </p:style>
-        <p:txBody>
-          <a:bodyPr rtlCol="0" anchor="ctr"/>
-          <a:lstStyle/>
-          <a:p>
-            <a:pPr algn="ctr"/>
-          </a:p>
-        </p:txBody>
-      </p:sp>
-      <p:sp>
-        <p:nvSpPr>
-          <p:cNvPr id="46" name="TextBox 45"/>
-          <p:cNvSpPr txBox="1"/>
-          <p:nvPr/>
-        </p:nvSpPr>
-        <p:spPr>
-          <a:xfrm>
-            <a:off x="7251191" y="4846320"/>
-            <a:ext cx="4297680" cy="603504"/>
-          </a:xfrm>
-          <a:prstGeom prst="rect">
-            <a:avLst/>
-          </a:prstGeom>
-          <a:noFill/>
-        </p:spPr>
-        <p:txBody>
-          <a:bodyPr wrap="square" anchor="ctr" lIns="0" rIns="0" tIns="0" bIns="0">
-            <a:spAutoFit/>
-          </a:bodyPr>
-          <a:lstStyle/>
-          <a:p>
-            <a:pPr algn="l">
-              <a:lnSpc>
-                <a:spcPct val="95000"/>
-              </a:lnSpc>
-              <a:spcBef>
-                <a:spcPts val="0"/>
-              </a:spcBef>
-              <a:spcAft>
-                <a:spcPts val="600"/>
-              </a:spcAft>
-            </a:pPr>
-            <a:r>
-              <a:rPr sz="1350" b="0" i="0">
-                <a:solidFill>
-                  <a:srgbClr val="FFFFFF"/>
-                </a:solidFill>
-                <a:latin typeface="Segoe UI"/>
-              </a:rPr>
-              <a:t>Controlled pipeline → far lower effective cost</a:t>
-            </a:r>
-          </a:p>
-        </p:txBody>
-      </p:sp>
-      <p:sp>
-        <p:nvSpPr>
-          <p:cNvPr id="47" name="Rectangle 46"/>
-          <p:cNvSpPr/>
-          <p:nvPr/>
-        </p:nvSpPr>
-        <p:spPr>
-          <a:xfrm>
-            <a:off x="640080" y="5449824"/>
-            <a:ext cx="1874519" cy="603504"/>
-          </a:xfrm>
-          <a:prstGeom prst="rect">
-            <a:avLst/>
-          </a:prstGeom>
-          <a:solidFill>
-            <a:srgbClr val="0A1B33"/>
-          </a:solidFill>
-          <a:ln>
-            <a:noFill/>
-          </a:ln>
-          <a:effectLst/>
-        </p:spPr>
-        <p:style>
-          <a:lnRef idx="1">
-            <a:schemeClr val="accent1"/>
-          </a:lnRef>
-          <a:fillRef idx="3">
-            <a:schemeClr val="accent1"/>
-          </a:fillRef>
-          <a:effectRef idx="2">
-            <a:schemeClr val="accent1"/>
-          </a:effectRef>
-          <a:fontRef idx="minor">
-            <a:schemeClr val="lt1"/>
-          </a:fontRef>
-        </p:style>
-        <p:txBody>
-          <a:bodyPr rtlCol="0" anchor="ctr"/>
-          <a:lstStyle/>
-          <a:p>
-            <a:pPr algn="ctr"/>
-          </a:p>
-        </p:txBody>
-      </p:sp>
-      <p:sp>
-        <p:nvSpPr>
-          <p:cNvPr id="48" name="TextBox 47"/>
-          <p:cNvSpPr txBox="1"/>
-          <p:nvPr/>
-        </p:nvSpPr>
-        <p:spPr>
-          <a:xfrm>
-            <a:off x="804672" y="5449824"/>
-            <a:ext cx="1600199" cy="603504"/>
-          </a:xfrm>
-          <a:prstGeom prst="rect">
-            <a:avLst/>
-          </a:prstGeom>
-          <a:noFill/>
-        </p:spPr>
-        <p:txBody>
-          <a:bodyPr wrap="square" anchor="ctr" lIns="0" rIns="0" tIns="0" bIns="0">
-            <a:spAutoFit/>
-          </a:bodyPr>
-          <a:lstStyle/>
-          <a:p>
-            <a:pPr algn="l">
-              <a:lnSpc>
-                <a:spcPct val="95000"/>
-              </a:lnSpc>
-              <a:spcBef>
-                <a:spcPts val="0"/>
-              </a:spcBef>
-              <a:spcAft>
-                <a:spcPts val="600"/>
-              </a:spcAft>
-            </a:pPr>
-            <a:r>
-              <a:rPr sz="1350" b="1" i="0">
-                <a:solidFill>
-                  <a:srgbClr val="FFFFFF"/>
-                </a:solidFill>
-                <a:latin typeface="Segoe UI"/>
-              </a:rPr>
-              <a:t>Focus</a:t>
-            </a:r>
-          </a:p>
-        </p:txBody>
-      </p:sp>
-      <p:sp>
-        <p:nvSpPr>
-          <p:cNvPr id="49" name="Rectangle 48"/>
-          <p:cNvSpPr/>
-          <p:nvPr/>
-        </p:nvSpPr>
-        <p:spPr>
-          <a:xfrm>
-            <a:off x="2514599" y="5449824"/>
-            <a:ext cx="4572000" cy="603504"/>
-          </a:xfrm>
-          <a:prstGeom prst="rect">
-            <a:avLst/>
-          </a:prstGeom>
-          <a:solidFill>
-            <a:srgbClr val="0D203D"/>
-          </a:solidFill>
-          <a:ln>
-            <a:noFill/>
-          </a:ln>
-          <a:effectLst/>
-        </p:spPr>
-        <p:style>
-          <a:lnRef idx="1">
-            <a:schemeClr val="accent1"/>
-          </a:lnRef>
-          <a:fillRef idx="3">
-            <a:schemeClr val="accent1"/>
-          </a:fillRef>
-          <a:effectRef idx="2">
-            <a:schemeClr val="accent1"/>
-          </a:effectRef>
-          <a:fontRef idx="minor">
-            <a:schemeClr val="lt1"/>
-          </a:fontRef>
-        </p:style>
-        <p:txBody>
-          <a:bodyPr rtlCol="0" anchor="ctr"/>
-          <a:lstStyle/>
-          <a:p>
-            <a:pPr algn="ctr"/>
-          </a:p>
-        </p:txBody>
-      </p:sp>
-      <p:sp>
-        <p:nvSpPr>
-          <p:cNvPr id="50" name="TextBox 49"/>
-          <p:cNvSpPr txBox="1"/>
-          <p:nvPr/>
-        </p:nvSpPr>
-        <p:spPr>
-          <a:xfrm>
-            <a:off x="2679191" y="5449824"/>
-            <a:ext cx="4297680" cy="603504"/>
-          </a:xfrm>
-          <a:prstGeom prst="rect">
-            <a:avLst/>
-          </a:prstGeom>
-          <a:noFill/>
-        </p:spPr>
-        <p:txBody>
-          <a:bodyPr wrap="square" anchor="ctr" lIns="0" rIns="0" tIns="0" bIns="0">
-            <a:spAutoFit/>
-          </a:bodyPr>
-          <a:lstStyle/>
-          <a:p>
-            <a:pPr algn="l">
-              <a:lnSpc>
-                <a:spcPct val="95000"/>
-              </a:lnSpc>
-              <a:spcBef>
-                <a:spcPts val="0"/>
-              </a:spcBef>
-              <a:spcAft>
-                <a:spcPts val="600"/>
-              </a:spcAft>
-            </a:pPr>
-            <a:r>
-              <a:rPr sz="1350" b="0" i="0">
-                <a:solidFill>
-                  <a:srgbClr val="C9D4E6"/>
-                </a:solidFill>
-                <a:latin typeface="Segoe UI"/>
-              </a:rPr>
-              <a:t>Generic software-dev productivity</a:t>
-            </a:r>
-          </a:p>
-        </p:txBody>
-      </p:sp>
-      <p:sp>
-        <p:nvSpPr>
-          <p:cNvPr id="51" name="Rectangle 50"/>
-          <p:cNvSpPr/>
-          <p:nvPr/>
-        </p:nvSpPr>
-        <p:spPr>
-          <a:xfrm>
-            <a:off x="7086599" y="5449824"/>
-            <a:ext cx="4572000" cy="603504"/>
-          </a:xfrm>
-          <a:prstGeom prst="rect">
-            <a:avLst/>
-          </a:prstGeom>
-          <a:solidFill>
-            <a:srgbClr val="102444"/>
-          </a:solidFill>
-          <a:ln>
-            <a:noFill/>
-          </a:ln>
-          <a:effectLst/>
-        </p:spPr>
-        <p:style>
-          <a:lnRef idx="1">
-            <a:schemeClr val="accent1"/>
-          </a:lnRef>
-          <a:fillRef idx="3">
-            <a:schemeClr val="accent1"/>
-          </a:fillRef>
-          <a:effectRef idx="2">
-            <a:schemeClr val="accent1"/>
-          </a:effectRef>
-          <a:fontRef idx="minor">
-            <a:schemeClr val="lt1"/>
-          </a:fontRef>
-        </p:style>
-        <p:txBody>
-          <a:bodyPr rtlCol="0" anchor="ctr"/>
-          <a:lstStyle/>
-          <a:p>
-            <a:pPr algn="ctr"/>
-          </a:p>
-        </p:txBody>
-      </p:sp>
-      <p:sp>
-        <p:nvSpPr>
-          <p:cNvPr id="52" name="Rectangle 51"/>
-          <p:cNvSpPr/>
-          <p:nvPr/>
-        </p:nvSpPr>
-        <p:spPr>
-          <a:xfrm>
-            <a:off x="7086599" y="5449824"/>
-            <a:ext cx="54864" cy="603504"/>
-          </a:xfrm>
-          <a:prstGeom prst="rect">
-            <a:avLst/>
-          </a:prstGeom>
-          <a:solidFill>
-            <a:srgbClr val="27D3C4"/>
-          </a:solidFill>
-          <a:ln>
-            <a:noFill/>
-          </a:ln>
-          <a:effectLst/>
-        </p:spPr>
-        <p:style>
-          <a:lnRef idx="1">
-            <a:schemeClr val="accent1"/>
-          </a:lnRef>
-          <a:fillRef idx="3">
-            <a:schemeClr val="accent1"/>
-          </a:fillRef>
-          <a:effectRef idx="2">
-            <a:schemeClr val="accent1"/>
-          </a:effectRef>
-          <a:fontRef idx="minor">
-            <a:schemeClr val="lt1"/>
-          </a:fontRef>
-        </p:style>
-        <p:txBody>
-          <a:bodyPr rtlCol="0" anchor="ctr"/>
-          <a:lstStyle/>
-          <a:p>
-            <a:pPr algn="ctr"/>
-          </a:p>
-        </p:txBody>
-      </p:sp>
-      <p:sp>
-        <p:nvSpPr>
-          <p:cNvPr id="53" name="TextBox 52"/>
-          <p:cNvSpPr txBox="1"/>
-          <p:nvPr/>
-        </p:nvSpPr>
-        <p:spPr>
-          <a:xfrm>
-            <a:off x="7251191" y="5449824"/>
-            <a:ext cx="4297680" cy="603504"/>
-          </a:xfrm>
-          <a:prstGeom prst="rect">
-            <a:avLst/>
-          </a:prstGeom>
-          <a:noFill/>
-        </p:spPr>
-        <p:txBody>
-          <a:bodyPr wrap="square" anchor="ctr" lIns="0" rIns="0" tIns="0" bIns="0">
-            <a:spAutoFit/>
-          </a:bodyPr>
-          <a:lstStyle/>
-          <a:p>
-            <a:pPr algn="l">
-              <a:lnSpc>
-                <a:spcPct val="95000"/>
-              </a:lnSpc>
-              <a:spcBef>
-                <a:spcPts val="0"/>
-              </a:spcBef>
-              <a:spcAft>
-                <a:spcPts val="600"/>
-              </a:spcAft>
-            </a:pPr>
-            <a:r>
-              <a:rPr sz="1350" b="0" i="0">
-                <a:solidFill>
-                  <a:srgbClr val="FFFFFF"/>
-                </a:solidFill>
-                <a:latin typeface="Segoe UI"/>
-              </a:rPr>
-              <a:t>Robotics, factories &amp; industrial multi-tenant SaaS</a:t>
-            </a:r>
-          </a:p>
-        </p:txBody>
-      </p:sp>
-      <p:sp>
-        <p:nvSpPr>
-          <p:cNvPr id="54" name="TextBox 53"/>
-          <p:cNvSpPr txBox="1"/>
-          <p:nvPr/>
-        </p:nvSpPr>
-        <p:spPr>
-          <a:xfrm>
-            <a:off x="640080" y="6263640"/>
-            <a:ext cx="10972800" cy="457200"/>
-          </a:xfrm>
-          <a:prstGeom prst="rect">
-            <a:avLst/>
-          </a:prstGeom>
-          <a:noFill/>
-        </p:spPr>
-        <p:txBody>
-          <a:bodyPr wrap="square" anchor="t" lIns="0" rIns="0" tIns="0" bIns="0">
-            <a:spAutoFit/>
-          </a:bodyPr>
-          <a:lstStyle/>
-          <a:p>
-            <a:pPr algn="l">
-              <a:lnSpc>
-                <a:spcPct val="100000"/>
-              </a:lnSpc>
-              <a:spcBef>
-                <a:spcPts val="0"/>
-              </a:spcBef>
-              <a:spcAft>
-                <a:spcPts val="600"/>
-              </a:spcAft>
-            </a:pPr>
-            <a:r>
-              <a:rPr sz="1500" b="1" i="0">
-                <a:solidFill>
-                  <a:srgbClr val="27D3C4"/>
-                </a:solidFill>
-                <a:latin typeface="Segoe UI"/>
-              </a:rPr>
-              <a:t>They are the engines. </a:t>
-            </a:r>
-            <a:r>
-              <a:rPr sz="1500" b="0" i="0">
-                <a:solidFill>
-                  <a:srgbClr val="C9D4E6"/>
-                </a:solidFill>
-                <a:latin typeface="Segoe UI"/>
-              </a:rPr>
-              <a:t>Projexlight is the driver and governor — and ProjexCloud is the industrial data layer agents don't provide.</a:t>
-            </a:r>
-          </a:p>
-        </p:txBody>
-      </p:sp>
-      <p:sp>
-        <p:nvSpPr>
-          <p:cNvPr id="55" name="TextBox 54"/>
-          <p:cNvSpPr txBox="1"/>
-          <p:nvPr/>
-        </p:nvSpPr>
-        <p:spPr>
-          <a:xfrm>
-            <a:off x="11338560" y="6400800"/>
-            <a:ext cx="640080" cy="365760"/>
-          </a:xfrm>
-          <a:prstGeom prst="rect">
-            <a:avLst/>
-          </a:prstGeom>
-          <a:noFill/>
-        </p:spPr>
-        <p:txBody>
-          <a:bodyPr wrap="square" anchor="t" lIns="0" rIns="0" tIns="0" bIns="0">
-            <a:spAutoFit/>
-          </a:bodyPr>
-          <a:lstStyle/>
-          <a:p>
             <a:pPr algn="r">
               <a:lnSpc>
                 <a:spcPct val="100000"/>
@@ -10789,7 +10682,7 @@
           <a:noFill/>
         </p:spPr>
         <p:txBody>
-          <a:bodyPr wrap="square" anchor="t" lIns="0" rIns="0" tIns="0" bIns="0">
+          <a:bodyPr wrap="square" lIns="0" tIns="0" rIns="0" bIns="0" anchor="t">
             <a:spAutoFit/>
           </a:bodyPr>
           <a:lstStyle/>
@@ -10826,7 +10719,7 @@
 </file>
 
 <file path=ppt/slides/slide7.xml><?xml version="1.0" encoding="utf-8"?>
-<p:sld xmlns:a="http://schemas.openxmlformats.org/drawingml/2006/main" xmlns:p="http://schemas.openxmlformats.org/presentationml/2006/main" xmlns:r="http://schemas.openxmlformats.org/officeDocument/2006/relationships">
+<p:sld xmlns:a="http://schemas.openxmlformats.org/drawingml/2006/main" xmlns:r="http://schemas.openxmlformats.org/officeDocument/2006/relationships" xmlns:p="http://schemas.openxmlformats.org/presentationml/2006/main">
   <p:cSld>
     <p:bg>
       <p:bgPr>
@@ -10842,7 +10735,14 @@
         <p:cNvGrpSpPr/>
         <p:nvPr/>
       </p:nvGrpSpPr>
-      <p:grpSpPr/>
+      <p:grpSpPr>
+        <a:xfrm>
+          <a:off x="0" y="0"/>
+          <a:ext cx="0" cy="0"/>
+          <a:chOff x="0" y="0"/>
+          <a:chExt cx="0" cy="0"/>
+        </a:xfrm>
+      </p:grpSpPr>
       <p:sp>
         <p:nvSpPr>
           <p:cNvPr id="2" name="Rectangle 1"/>
@@ -10884,6 +10784,7 @@
           <a:lstStyle/>
           <a:p>
             <a:pPr algn="ctr"/>
+            <a:endParaRPr/>
           </a:p>
         </p:txBody>
       </p:sp>
@@ -10904,7 +10805,7 @@
           <a:noFill/>
         </p:spPr>
         <p:txBody>
-          <a:bodyPr wrap="square" anchor="t" lIns="0" rIns="0" tIns="0" bIns="0">
+          <a:bodyPr wrap="square" lIns="0" tIns="0" rIns="0" bIns="0" anchor="t">
             <a:spAutoFit/>
           </a:bodyPr>
           <a:lstStyle/>
@@ -10949,7 +10850,7 @@
           <a:noFill/>
         </p:spPr>
         <p:txBody>
-          <a:bodyPr wrap="square" anchor="t" lIns="0" rIns="0" tIns="0" bIns="0">
+          <a:bodyPr wrap="square" lIns="0" tIns="0" rIns="0" bIns="0" anchor="t">
             <a:spAutoFit/>
           </a:bodyPr>
           <a:lstStyle/>
@@ -10979,14 +10880,338 @@
       </p:sp>
       <p:sp>
         <p:nvSpPr>
-          <p:cNvPr id="5" name="Rectangle 4"/>
+          <p:cNvPr id="6" name="Rounded Rectangle 5"/>
           <p:cNvSpPr/>
           <p:nvPr/>
         </p:nvSpPr>
         <p:spPr>
           <a:xfrm>
-            <a:off x="640080" y="1691640"/>
-            <a:ext cx="822960" cy="64008"/>
+            <a:off x="640080" y="2057400"/>
+            <a:ext cx="5120640" cy="3200400"/>
+          </a:xfrm>
+          <a:prstGeom prst="roundRect">
+            <a:avLst/>
+          </a:prstGeom>
+          <a:solidFill>
+            <a:srgbClr val="2A1C0A"/>
+          </a:solidFill>
+          <a:ln>
+            <a:noFill/>
+          </a:ln>
+          <a:effectLst/>
+        </p:spPr>
+        <p:style>
+          <a:lnRef idx="1">
+            <a:schemeClr val="accent1"/>
+          </a:lnRef>
+          <a:fillRef idx="3">
+            <a:schemeClr val="accent1"/>
+          </a:fillRef>
+          <a:effectRef idx="2">
+            <a:schemeClr val="accent1"/>
+          </a:effectRef>
+          <a:fontRef idx="minor">
+            <a:schemeClr val="lt1"/>
+          </a:fontRef>
+        </p:style>
+        <p:txBody>
+          <a:bodyPr rtlCol="0" anchor="ctr"/>
+          <a:lstStyle/>
+          <a:p>
+            <a:pPr algn="ctr"/>
+            <a:endParaRPr/>
+          </a:p>
+        </p:txBody>
+      </p:sp>
+      <p:sp>
+        <p:nvSpPr>
+          <p:cNvPr id="7" name="Rectangle 6"/>
+          <p:cNvSpPr/>
+          <p:nvPr/>
+        </p:nvSpPr>
+        <p:spPr>
+          <a:xfrm>
+            <a:off x="640080" y="2057400"/>
+            <a:ext cx="5120640" cy="109728"/>
+          </a:xfrm>
+          <a:prstGeom prst="rect">
+            <a:avLst/>
+          </a:prstGeom>
+          <a:solidFill>
+            <a:srgbClr val="FFB33E"/>
+          </a:solidFill>
+          <a:ln>
+            <a:noFill/>
+          </a:ln>
+          <a:effectLst/>
+        </p:spPr>
+        <p:style>
+          <a:lnRef idx="1">
+            <a:schemeClr val="accent1"/>
+          </a:lnRef>
+          <a:fillRef idx="3">
+            <a:schemeClr val="accent1"/>
+          </a:fillRef>
+          <a:effectRef idx="2">
+            <a:schemeClr val="accent1"/>
+          </a:effectRef>
+          <a:fontRef idx="minor">
+            <a:schemeClr val="lt1"/>
+          </a:fontRef>
+        </p:style>
+        <p:txBody>
+          <a:bodyPr rtlCol="0" anchor="ctr"/>
+          <a:lstStyle/>
+          <a:p>
+            <a:pPr algn="ctr"/>
+            <a:endParaRPr/>
+          </a:p>
+        </p:txBody>
+      </p:sp>
+      <p:sp>
+        <p:nvSpPr>
+          <p:cNvPr id="8" name="TextBox 7"/>
+          <p:cNvSpPr txBox="1"/>
+          <p:nvPr/>
+        </p:nvSpPr>
+        <p:spPr>
+          <a:xfrm>
+            <a:off x="914400" y="2331720"/>
+            <a:ext cx="4572000" cy="457200"/>
+          </a:xfrm>
+          <a:prstGeom prst="rect">
+            <a:avLst/>
+          </a:prstGeom>
+          <a:noFill/>
+        </p:spPr>
+        <p:txBody>
+          <a:bodyPr wrap="square" lIns="0" tIns="0" rIns="0" bIns="0" anchor="t">
+            <a:spAutoFit/>
+          </a:bodyPr>
+          <a:lstStyle/>
+          <a:p>
+            <a:pPr algn="l">
+              <a:lnSpc>
+                <a:spcPct val="100000"/>
+              </a:lnSpc>
+              <a:spcBef>
+                <a:spcPts val="0"/>
+              </a:spcBef>
+              <a:spcAft>
+                <a:spcPts val="600"/>
+              </a:spcAft>
+            </a:pPr>
+            <a:r>
+              <a:rPr sz="1300" b="1" i="0">
+                <a:solidFill>
+                  <a:srgbClr val="FFB33E"/>
+                </a:solidFill>
+                <a:latin typeface="Segoe UI"/>
+              </a:rPr>
+              <a:t>REAL-WORLD EXAMPLE</a:t>
+            </a:r>
+          </a:p>
+        </p:txBody>
+      </p:sp>
+      <p:sp>
+        <p:nvSpPr>
+          <p:cNvPr id="9" name="TextBox 8"/>
+          <p:cNvSpPr txBox="1"/>
+          <p:nvPr/>
+        </p:nvSpPr>
+        <p:spPr>
+          <a:xfrm>
+            <a:off x="914400" y="2788920"/>
+            <a:ext cx="4572000" cy="914400"/>
+          </a:xfrm>
+          <a:prstGeom prst="rect">
+            <a:avLst/>
+          </a:prstGeom>
+          <a:noFill/>
+        </p:spPr>
+        <p:txBody>
+          <a:bodyPr wrap="square" lIns="0" tIns="0" rIns="0" bIns="0" anchor="t">
+            <a:spAutoFit/>
+          </a:bodyPr>
+          <a:lstStyle/>
+          <a:p>
+            <a:pPr algn="l">
+              <a:lnSpc>
+                <a:spcPct val="100000"/>
+              </a:lnSpc>
+              <a:spcBef>
+                <a:spcPts val="0"/>
+              </a:spcBef>
+              <a:spcAft>
+                <a:spcPts val="600"/>
+              </a:spcAft>
+            </a:pPr>
+            <a:r>
+              <a:rPr sz="6200" b="1" i="0">
+                <a:solidFill>
+                  <a:srgbClr val="FFFFFF"/>
+                </a:solidFill>
+                <a:latin typeface="Segoe UI"/>
+              </a:rPr>
+              <a:t>$200K</a:t>
+            </a:r>
+            <a:r>
+              <a:rPr sz="2800" b="1" i="0">
+                <a:solidFill>
+                  <a:srgbClr val="FFB33E"/>
+                </a:solidFill>
+                <a:latin typeface="Segoe UI"/>
+              </a:rPr>
+              <a:t>/mo</a:t>
+            </a:r>
+          </a:p>
+        </p:txBody>
+      </p:sp>
+      <p:sp>
+        <p:nvSpPr>
+          <p:cNvPr id="10" name="TextBox 9"/>
+          <p:cNvSpPr txBox="1"/>
+          <p:nvPr/>
+        </p:nvSpPr>
+        <p:spPr>
+          <a:xfrm>
+            <a:off x="914400" y="3794760"/>
+            <a:ext cx="4572000" cy="457200"/>
+          </a:xfrm>
+          <a:prstGeom prst="rect">
+            <a:avLst/>
+          </a:prstGeom>
+          <a:noFill/>
+        </p:spPr>
+        <p:txBody>
+          <a:bodyPr wrap="square" lIns="0" tIns="0" rIns="0" bIns="0" anchor="t">
+            <a:spAutoFit/>
+          </a:bodyPr>
+          <a:lstStyle/>
+          <a:p>
+            <a:pPr algn="l">
+              <a:lnSpc>
+                <a:spcPct val="100000"/>
+              </a:lnSpc>
+              <a:spcBef>
+                <a:spcPts val="0"/>
+              </a:spcBef>
+              <a:spcAft>
+                <a:spcPts val="600"/>
+              </a:spcAft>
+            </a:pPr>
+            <a:r>
+              <a:rPr sz="1800" b="1" i="0">
+                <a:solidFill>
+                  <a:srgbClr val="C9D4E6"/>
+                </a:solidFill>
+                <a:latin typeface="Segoe UI"/>
+              </a:rPr>
+              <a:t>≈ $2M per year in token spend</a:t>
+            </a:r>
+          </a:p>
+        </p:txBody>
+      </p:sp>
+      <p:sp>
+        <p:nvSpPr>
+          <p:cNvPr id="11" name="TextBox 10"/>
+          <p:cNvSpPr txBox="1"/>
+          <p:nvPr/>
+        </p:nvSpPr>
+        <p:spPr>
+          <a:xfrm>
+            <a:off x="914400" y="4297680"/>
+            <a:ext cx="4480560" cy="914400"/>
+          </a:xfrm>
+          <a:prstGeom prst="rect">
+            <a:avLst/>
+          </a:prstGeom>
+          <a:noFill/>
+        </p:spPr>
+        <p:txBody>
+          <a:bodyPr wrap="square" lIns="0" tIns="0" rIns="0" bIns="0" anchor="t">
+            <a:spAutoFit/>
+          </a:bodyPr>
+          <a:lstStyle/>
+          <a:p>
+            <a:pPr algn="l">
+              <a:lnSpc>
+                <a:spcPct val="110000"/>
+              </a:lnSpc>
+              <a:spcBef>
+                <a:spcPts val="0"/>
+              </a:spcBef>
+              <a:spcAft>
+                <a:spcPts val="600"/>
+              </a:spcAft>
+            </a:pPr>
+            <a:r>
+              <a:rPr sz="1400" b="0" i="0">
+                <a:solidFill>
+                  <a:srgbClr val="8A98B0"/>
+                </a:solidFill>
+                <a:latin typeface="Segoe UI"/>
+              </a:rPr>
+              <a:t>Reported by a Facebook AI developer — driven by 15–20 parallel agents, agent swarms and constant rework.</a:t>
+            </a:r>
+          </a:p>
+        </p:txBody>
+      </p:sp>
+      <p:sp>
+        <p:nvSpPr>
+          <p:cNvPr id="12" name="Rounded Rectangle 11"/>
+          <p:cNvSpPr/>
+          <p:nvPr/>
+        </p:nvSpPr>
+        <p:spPr>
+          <a:xfrm>
+            <a:off x="5989320" y="2057400"/>
+            <a:ext cx="5669280" cy="3200400"/>
+          </a:xfrm>
+          <a:prstGeom prst="roundRect">
+            <a:avLst/>
+          </a:prstGeom>
+          <a:solidFill>
+            <a:srgbClr val="122A4D"/>
+          </a:solidFill>
+          <a:ln>
+            <a:noFill/>
+          </a:ln>
+          <a:effectLst/>
+        </p:spPr>
+        <p:style>
+          <a:lnRef idx="1">
+            <a:schemeClr val="accent1"/>
+          </a:lnRef>
+          <a:fillRef idx="3">
+            <a:schemeClr val="accent1"/>
+          </a:fillRef>
+          <a:effectRef idx="2">
+            <a:schemeClr val="accent1"/>
+          </a:effectRef>
+          <a:fontRef idx="minor">
+            <a:schemeClr val="lt1"/>
+          </a:fontRef>
+        </p:style>
+        <p:txBody>
+          <a:bodyPr rtlCol="0" anchor="ctr"/>
+          <a:lstStyle/>
+          <a:p>
+            <a:pPr algn="ctr"/>
+            <a:endParaRPr/>
+          </a:p>
+        </p:txBody>
+      </p:sp>
+      <p:sp>
+        <p:nvSpPr>
+          <p:cNvPr id="13" name="Rectangle 12"/>
+          <p:cNvSpPr/>
+          <p:nvPr/>
+        </p:nvSpPr>
+        <p:spPr>
+          <a:xfrm>
+            <a:off x="5989320" y="2057400"/>
+            <a:ext cx="5669280" cy="109728"/>
           </a:xfrm>
           <a:prstGeom prst="rect">
             <a:avLst/>
@@ -11018,107 +11243,20 @@
           <a:lstStyle/>
           <a:p>
             <a:pPr algn="ctr"/>
-          </a:p>
-        </p:txBody>
-      </p:sp>
-      <p:sp>
-        <p:nvSpPr>
-          <p:cNvPr id="6" name="Rounded Rectangle 5"/>
-          <p:cNvSpPr/>
-          <p:nvPr/>
-        </p:nvSpPr>
-        <p:spPr>
-          <a:xfrm>
-            <a:off x="640080" y="2057400"/>
-            <a:ext cx="5120640" cy="3200400"/>
-          </a:xfrm>
-          <a:prstGeom prst="roundRect">
-            <a:avLst/>
-          </a:prstGeom>
-          <a:solidFill>
-            <a:srgbClr val="2A1C0A"/>
-          </a:solidFill>
-          <a:ln>
-            <a:noFill/>
-          </a:ln>
-          <a:effectLst/>
-        </p:spPr>
-        <p:style>
-          <a:lnRef idx="1">
-            <a:schemeClr val="accent1"/>
-          </a:lnRef>
-          <a:fillRef idx="3">
-            <a:schemeClr val="accent1"/>
-          </a:fillRef>
-          <a:effectRef idx="2">
-            <a:schemeClr val="accent1"/>
-          </a:effectRef>
-          <a:fontRef idx="minor">
-            <a:schemeClr val="lt1"/>
-          </a:fontRef>
-        </p:style>
-        <p:txBody>
-          <a:bodyPr rtlCol="0" anchor="ctr"/>
-          <a:lstStyle/>
-          <a:p>
-            <a:pPr algn="ctr"/>
-          </a:p>
-        </p:txBody>
-      </p:sp>
-      <p:sp>
-        <p:nvSpPr>
-          <p:cNvPr id="7" name="Rectangle 6"/>
-          <p:cNvSpPr/>
-          <p:nvPr/>
-        </p:nvSpPr>
-        <p:spPr>
-          <a:xfrm>
-            <a:off x="640080" y="2057400"/>
-            <a:ext cx="5120640" cy="109728"/>
-          </a:xfrm>
-          <a:prstGeom prst="rect">
-            <a:avLst/>
-          </a:prstGeom>
-          <a:solidFill>
-            <a:srgbClr val="FFB33E"/>
-          </a:solidFill>
-          <a:ln>
-            <a:noFill/>
-          </a:ln>
-          <a:effectLst/>
-        </p:spPr>
-        <p:style>
-          <a:lnRef idx="1">
-            <a:schemeClr val="accent1"/>
-          </a:lnRef>
-          <a:fillRef idx="3">
-            <a:schemeClr val="accent1"/>
-          </a:fillRef>
-          <a:effectRef idx="2">
-            <a:schemeClr val="accent1"/>
-          </a:effectRef>
-          <a:fontRef idx="minor">
-            <a:schemeClr val="lt1"/>
-          </a:fontRef>
-        </p:style>
-        <p:txBody>
-          <a:bodyPr rtlCol="0" anchor="ctr"/>
-          <a:lstStyle/>
-          <a:p>
-            <a:pPr algn="ctr"/>
-          </a:p>
-        </p:txBody>
-      </p:sp>
-      <p:sp>
-        <p:nvSpPr>
-          <p:cNvPr id="8" name="TextBox 7"/>
+            <a:endParaRPr/>
+          </a:p>
+        </p:txBody>
+      </p:sp>
+      <p:sp>
+        <p:nvSpPr>
+          <p:cNvPr id="14" name="TextBox 13"/>
           <p:cNvSpPr txBox="1"/>
           <p:nvPr/>
         </p:nvSpPr>
         <p:spPr>
           <a:xfrm>
-            <a:off x="914400" y="2331720"/>
-            <a:ext cx="4572000" cy="457200"/>
+            <a:off x="6309360" y="2286000"/>
+            <a:ext cx="5120640" cy="457200"/>
           </a:xfrm>
           <a:prstGeom prst="rect">
             <a:avLst/>
@@ -11126,7 +11264,7 @@
           <a:noFill/>
         </p:spPr>
         <p:txBody>
-          <a:bodyPr wrap="square" anchor="t" lIns="0" rIns="0" tIns="0" bIns="0">
+          <a:bodyPr wrap="square" lIns="0" tIns="0" rIns="0" bIns="0" anchor="t">
             <a:spAutoFit/>
           </a:bodyPr>
           <a:lstStyle/>
@@ -11143,27 +11281,27 @@
               </a:spcAft>
             </a:pPr>
             <a:r>
-              <a:rPr sz="1300" b="1" i="0">
-                <a:solidFill>
-                  <a:srgbClr val="FFB33E"/>
-                </a:solidFill>
-                <a:latin typeface="Segoe UI"/>
-              </a:rPr>
-              <a:t>REAL-WORLD EXAMPLE</a:t>
-            </a:r>
-          </a:p>
-        </p:txBody>
-      </p:sp>
-      <p:sp>
-        <p:nvSpPr>
-          <p:cNvPr id="9" name="TextBox 8"/>
+              <a:rPr sz="1800" b="1" i="0">
+                <a:solidFill>
+                  <a:srgbClr val="27D3C4"/>
+                </a:solidFill>
+                <a:latin typeface="Segoe UI"/>
+              </a:rPr>
+              <a:t>How Projexlight keeps cost under control</a:t>
+            </a:r>
+          </a:p>
+        </p:txBody>
+      </p:sp>
+      <p:sp>
+        <p:nvSpPr>
+          <p:cNvPr id="15" name="TextBox 14"/>
           <p:cNvSpPr txBox="1"/>
           <p:nvPr/>
         </p:nvSpPr>
         <p:spPr>
           <a:xfrm>
-            <a:off x="914400" y="2788920"/>
-            <a:ext cx="4572000" cy="914400"/>
+            <a:off x="6309360" y="2880360"/>
+            <a:ext cx="5120640" cy="2194560"/>
           </a:xfrm>
           <a:prstGeom prst="rect">
             <a:avLst/>
@@ -11171,53 +11309,132 @@
           <a:noFill/>
         </p:spPr>
         <p:txBody>
-          <a:bodyPr wrap="square" anchor="t" lIns="0" rIns="0" tIns="0" bIns="0">
+          <a:bodyPr wrap="square" lIns="0" tIns="0" rIns="0" bIns="0">
             <a:spAutoFit/>
           </a:bodyPr>
           <a:lstStyle/>
           <a:p>
-            <a:pPr algn="l">
-              <a:lnSpc>
-                <a:spcPct val="100000"/>
-              </a:lnSpc>
-              <a:spcBef>
-                <a:spcPts val="0"/>
-              </a:spcBef>
-              <a:spcAft>
-                <a:spcPts val="600"/>
-              </a:spcAft>
-            </a:pPr>
-            <a:r>
-              <a:rPr sz="6200" b="1" i="0">
-                <a:solidFill>
-                  <a:srgbClr val="FFFFFF"/>
-                </a:solidFill>
-                <a:latin typeface="Segoe UI"/>
-              </a:rPr>
-              <a:t>$200K</a:t>
-            </a:r>
-            <a:r>
-              <a:rPr sz="2800" b="1" i="0">
-                <a:solidFill>
-                  <a:srgbClr val="FFB33E"/>
-                </a:solidFill>
-                <a:latin typeface="Segoe UI"/>
-              </a:rPr>
-              <a:t>/mo</a:t>
-            </a:r>
-          </a:p>
-        </p:txBody>
-      </p:sp>
-      <p:sp>
-        <p:nvSpPr>
-          <p:cNvPr id="10" name="TextBox 9"/>
+            <a:pPr>
+              <a:lnSpc>
+                <a:spcPct val="105000"/>
+              </a:lnSpc>
+              <a:spcBef>
+                <a:spcPts val="0"/>
+              </a:spcBef>
+              <a:spcAft>
+                <a:spcPts val="1200"/>
+              </a:spcAft>
+            </a:pPr>
+            <a:r>
+              <a:rPr sz="1550" b="0">
+                <a:solidFill>
+                  <a:srgbClr val="C9D4E6"/>
+                </a:solidFill>
+                <a:latin typeface="Segoe UI"/>
+              </a:rPr>
+              <a:t>•  Orchestrates a controlled pipeline — not an agent swarm</a:t>
+            </a:r>
+          </a:p>
+          <a:p>
+            <a:pPr>
+              <a:lnSpc>
+                <a:spcPct val="105000"/>
+              </a:lnSpc>
+              <a:spcBef>
+                <a:spcPts val="0"/>
+              </a:spcBef>
+              <a:spcAft>
+                <a:spcPts val="1200"/>
+              </a:spcAft>
+            </a:pPr>
+            <a:r>
+              <a:rPr sz="1550" b="0">
+                <a:solidFill>
+                  <a:srgbClr val="C9D4E6"/>
+                </a:solidFill>
+                <a:latin typeface="Segoe UI"/>
+              </a:rPr>
+              <a:t>•  Cuts rework with early validation &amp; auto-fix at task level</a:t>
+            </a:r>
+          </a:p>
+          <a:p>
+            <a:pPr>
+              <a:lnSpc>
+                <a:spcPct val="105000"/>
+              </a:lnSpc>
+              <a:spcBef>
+                <a:spcPts val="0"/>
+              </a:spcBef>
+              <a:spcAft>
+                <a:spcPts val="1200"/>
+              </a:spcAft>
+            </a:pPr>
+            <a:r>
+              <a:rPr sz="1550" b="0">
+                <a:solidFill>
+                  <a:srgbClr val="C9D4E6"/>
+                </a:solidFill>
+                <a:latin typeface="Segoe UI"/>
+              </a:rPr>
+              <a:t>•  Encodes design into blueprints — not repeated prompts</a:t>
+            </a:r>
+          </a:p>
+          <a:p>
+            <a:pPr>
+              <a:lnSpc>
+                <a:spcPct val="105000"/>
+              </a:lnSpc>
+              <a:spcBef>
+                <a:spcPts val="0"/>
+              </a:spcBef>
+              <a:spcAft>
+                <a:spcPts val="1200"/>
+              </a:spcAft>
+            </a:pPr>
+            <a:r>
+              <a:rPr sz="1550" b="0">
+                <a:solidFill>
+                  <a:srgbClr val="C9D4E6"/>
+                </a:solidFill>
+                <a:latin typeface="Segoe UI"/>
+              </a:rPr>
+              <a:t>•  Minimizes prompt churn and variance</a:t>
+            </a:r>
+          </a:p>
+          <a:p>
+            <a:pPr>
+              <a:lnSpc>
+                <a:spcPct val="105000"/>
+              </a:lnSpc>
+              <a:spcBef>
+                <a:spcPts val="0"/>
+              </a:spcBef>
+              <a:spcAft>
+                <a:spcPts val="1200"/>
+              </a:spcAft>
+            </a:pPr>
+            <a:r>
+              <a:rPr sz="1550" b="0">
+                <a:solidFill>
+                  <a:srgbClr val="C9D4E6"/>
+                </a:solidFill>
+                <a:latin typeface="Segoe UI"/>
+              </a:rPr>
+              <a:t>•  Up to ~3× productivity by eliminating wasted cycles</a:t>
+            </a:r>
+          </a:p>
+        </p:txBody>
+      </p:sp>
+      <p:sp>
+        <p:nvSpPr>
+          <p:cNvPr id="16" name="TextBox 15"/>
           <p:cNvSpPr txBox="1"/>
           <p:nvPr/>
         </p:nvSpPr>
         <p:spPr>
           <a:xfrm>
-            <a:off x="914400" y="3794760"/>
-            <a:ext cx="4572000" cy="457200"/>
+            <a:off x="640080" y="5623560"/>
+            <a:ext cx="10972800" cy="548640"/>
           </a:xfrm>
           <a:prstGeom prst="rect">
             <a:avLst/>
@@ -11225,7 +11442,7 @@
           <a:noFill/>
         </p:spPr>
         <p:txBody>
-          <a:bodyPr wrap="square" anchor="t" lIns="0" rIns="0" tIns="0" bIns="0">
+          <a:bodyPr wrap="square" lIns="0" tIns="0" rIns="0" bIns="0" anchor="t">
             <a:spAutoFit/>
           </a:bodyPr>
           <a:lstStyle/>
@@ -11242,27 +11459,36 @@
               </a:spcAft>
             </a:pPr>
             <a:r>
-              <a:rPr sz="1800" b="1" i="0">
+              <a:rPr sz="1700" b="1" i="0">
+                <a:solidFill>
+                  <a:srgbClr val="FFFFFF"/>
+                </a:solidFill>
+                <a:latin typeface="Segoe UI"/>
+              </a:rPr>
+              <a:t>Far lower effective token cost per developer</a:t>
+            </a:r>
+            <a:r>
+              <a:rPr sz="1700" b="0" i="0">
                 <a:solidFill>
                   <a:srgbClr val="C9D4E6"/>
                 </a:solidFill>
                 <a:latin typeface="Segoe UI"/>
               </a:rPr>
-              <a:t>≈ $2M per year in token spend</a:t>
-            </a:r>
-          </a:p>
-        </p:txBody>
-      </p:sp>
-      <p:sp>
-        <p:nvSpPr>
-          <p:cNvPr id="11" name="TextBox 10"/>
+              <a:t>  vs. unmanaged multi-agent setups.</a:t>
+            </a:r>
+          </a:p>
+        </p:txBody>
+      </p:sp>
+      <p:sp>
+        <p:nvSpPr>
+          <p:cNvPr id="17" name="TextBox 16"/>
           <p:cNvSpPr txBox="1"/>
           <p:nvPr/>
         </p:nvSpPr>
         <p:spPr>
           <a:xfrm>
-            <a:off x="914400" y="4297680"/>
-            <a:ext cx="4480560" cy="914400"/>
+            <a:off x="11338560" y="6400800"/>
+            <a:ext cx="640080" cy="365760"/>
           </a:xfrm>
           <a:prstGeom prst="rect">
             <a:avLst/>
@@ -11270,376 +11496,11 @@
           <a:noFill/>
         </p:spPr>
         <p:txBody>
-          <a:bodyPr wrap="square" anchor="t" lIns="0" rIns="0" tIns="0" bIns="0">
+          <a:bodyPr wrap="square" lIns="0" tIns="0" rIns="0" bIns="0" anchor="t">
             <a:spAutoFit/>
           </a:bodyPr>
           <a:lstStyle/>
           <a:p>
-            <a:pPr algn="l">
-              <a:lnSpc>
-                <a:spcPct val="110000"/>
-              </a:lnSpc>
-              <a:spcBef>
-                <a:spcPts val="0"/>
-              </a:spcBef>
-              <a:spcAft>
-                <a:spcPts val="600"/>
-              </a:spcAft>
-            </a:pPr>
-            <a:r>
-              <a:rPr sz="1400" b="0" i="0">
-                <a:solidFill>
-                  <a:srgbClr val="8A98B0"/>
-                </a:solidFill>
-                <a:latin typeface="Segoe UI"/>
-              </a:rPr>
-              <a:t>Reported by a Facebook AI developer — driven by 15–20 parallel agents, agent swarms and constant rework.</a:t>
-            </a:r>
-          </a:p>
-        </p:txBody>
-      </p:sp>
-      <p:sp>
-        <p:nvSpPr>
-          <p:cNvPr id="12" name="Rounded Rectangle 11"/>
-          <p:cNvSpPr/>
-          <p:nvPr/>
-        </p:nvSpPr>
-        <p:spPr>
-          <a:xfrm>
-            <a:off x="5989320" y="2057400"/>
-            <a:ext cx="5669280" cy="3200400"/>
-          </a:xfrm>
-          <a:prstGeom prst="roundRect">
-            <a:avLst/>
-          </a:prstGeom>
-          <a:solidFill>
-            <a:srgbClr val="122A4D"/>
-          </a:solidFill>
-          <a:ln>
-            <a:noFill/>
-          </a:ln>
-          <a:effectLst/>
-        </p:spPr>
-        <p:style>
-          <a:lnRef idx="1">
-            <a:schemeClr val="accent1"/>
-          </a:lnRef>
-          <a:fillRef idx="3">
-            <a:schemeClr val="accent1"/>
-          </a:fillRef>
-          <a:effectRef idx="2">
-            <a:schemeClr val="accent1"/>
-          </a:effectRef>
-          <a:fontRef idx="minor">
-            <a:schemeClr val="lt1"/>
-          </a:fontRef>
-        </p:style>
-        <p:txBody>
-          <a:bodyPr rtlCol="0" anchor="ctr"/>
-          <a:lstStyle/>
-          <a:p>
-            <a:pPr algn="ctr"/>
-          </a:p>
-        </p:txBody>
-      </p:sp>
-      <p:sp>
-        <p:nvSpPr>
-          <p:cNvPr id="13" name="Rectangle 12"/>
-          <p:cNvSpPr/>
-          <p:nvPr/>
-        </p:nvSpPr>
-        <p:spPr>
-          <a:xfrm>
-            <a:off x="5989320" y="2057400"/>
-            <a:ext cx="5669280" cy="109728"/>
-          </a:xfrm>
-          <a:prstGeom prst="rect">
-            <a:avLst/>
-          </a:prstGeom>
-          <a:solidFill>
-            <a:srgbClr val="27D3C4"/>
-          </a:solidFill>
-          <a:ln>
-            <a:noFill/>
-          </a:ln>
-          <a:effectLst/>
-        </p:spPr>
-        <p:style>
-          <a:lnRef idx="1">
-            <a:schemeClr val="accent1"/>
-          </a:lnRef>
-          <a:fillRef idx="3">
-            <a:schemeClr val="accent1"/>
-          </a:fillRef>
-          <a:effectRef idx="2">
-            <a:schemeClr val="accent1"/>
-          </a:effectRef>
-          <a:fontRef idx="minor">
-            <a:schemeClr val="lt1"/>
-          </a:fontRef>
-        </p:style>
-        <p:txBody>
-          <a:bodyPr rtlCol="0" anchor="ctr"/>
-          <a:lstStyle/>
-          <a:p>
-            <a:pPr algn="ctr"/>
-          </a:p>
-        </p:txBody>
-      </p:sp>
-      <p:sp>
-        <p:nvSpPr>
-          <p:cNvPr id="14" name="TextBox 13"/>
-          <p:cNvSpPr txBox="1"/>
-          <p:nvPr/>
-        </p:nvSpPr>
-        <p:spPr>
-          <a:xfrm>
-            <a:off x="6309360" y="2286000"/>
-            <a:ext cx="5120640" cy="457200"/>
-          </a:xfrm>
-          <a:prstGeom prst="rect">
-            <a:avLst/>
-          </a:prstGeom>
-          <a:noFill/>
-        </p:spPr>
-        <p:txBody>
-          <a:bodyPr wrap="square" anchor="t" lIns="0" rIns="0" tIns="0" bIns="0">
-            <a:spAutoFit/>
-          </a:bodyPr>
-          <a:lstStyle/>
-          <a:p>
-            <a:pPr algn="l">
-              <a:lnSpc>
-                <a:spcPct val="100000"/>
-              </a:lnSpc>
-              <a:spcBef>
-                <a:spcPts val="0"/>
-              </a:spcBef>
-              <a:spcAft>
-                <a:spcPts val="600"/>
-              </a:spcAft>
-            </a:pPr>
-            <a:r>
-              <a:rPr sz="1800" b="1" i="0">
-                <a:solidFill>
-                  <a:srgbClr val="27D3C4"/>
-                </a:solidFill>
-                <a:latin typeface="Segoe UI"/>
-              </a:rPr>
-              <a:t>How Projexlight keeps cost under control</a:t>
-            </a:r>
-          </a:p>
-        </p:txBody>
-      </p:sp>
-      <p:sp>
-        <p:nvSpPr>
-          <p:cNvPr id="15" name="TextBox 14"/>
-          <p:cNvSpPr txBox="1"/>
-          <p:nvPr/>
-        </p:nvSpPr>
-        <p:spPr>
-          <a:xfrm>
-            <a:off x="6309360" y="2880360"/>
-            <a:ext cx="5120640" cy="2194560"/>
-          </a:xfrm>
-          <a:prstGeom prst="rect">
-            <a:avLst/>
-          </a:prstGeom>
-          <a:noFill/>
-        </p:spPr>
-        <p:txBody>
-          <a:bodyPr wrap="square" lIns="0" rIns="0" tIns="0" bIns="0">
-            <a:spAutoFit/>
-          </a:bodyPr>
-          <a:lstStyle/>
-          <a:p>
-            <a:pPr>
-              <a:lnSpc>
-                <a:spcPct val="105000"/>
-              </a:lnSpc>
-              <a:spcBef>
-                <a:spcPts val="0"/>
-              </a:spcBef>
-              <a:spcAft>
-                <a:spcPts val="1200"/>
-              </a:spcAft>
-            </a:pPr>
-            <a:r>
-              <a:rPr sz="1550" b="0">
-                <a:solidFill>
-                  <a:srgbClr val="C9D4E6"/>
-                </a:solidFill>
-                <a:latin typeface="Segoe UI"/>
-              </a:rPr>
-              <a:t>•  Orchestrates a controlled pipeline — not an agent swarm</a:t>
-            </a:r>
-          </a:p>
-          <a:p>
-            <a:pPr>
-              <a:lnSpc>
-                <a:spcPct val="105000"/>
-              </a:lnSpc>
-              <a:spcBef>
-                <a:spcPts val="0"/>
-              </a:spcBef>
-              <a:spcAft>
-                <a:spcPts val="1200"/>
-              </a:spcAft>
-            </a:pPr>
-            <a:r>
-              <a:rPr sz="1550" b="0">
-                <a:solidFill>
-                  <a:srgbClr val="C9D4E6"/>
-                </a:solidFill>
-                <a:latin typeface="Segoe UI"/>
-              </a:rPr>
-              <a:t>•  Cuts rework with early validation &amp; auto-fix at task level</a:t>
-            </a:r>
-          </a:p>
-          <a:p>
-            <a:pPr>
-              <a:lnSpc>
-                <a:spcPct val="105000"/>
-              </a:lnSpc>
-              <a:spcBef>
-                <a:spcPts val="0"/>
-              </a:spcBef>
-              <a:spcAft>
-                <a:spcPts val="1200"/>
-              </a:spcAft>
-            </a:pPr>
-            <a:r>
-              <a:rPr sz="1550" b="0">
-                <a:solidFill>
-                  <a:srgbClr val="C9D4E6"/>
-                </a:solidFill>
-                <a:latin typeface="Segoe UI"/>
-              </a:rPr>
-              <a:t>•  Encodes design into blueprints — not repeated prompts</a:t>
-            </a:r>
-          </a:p>
-          <a:p>
-            <a:pPr>
-              <a:lnSpc>
-                <a:spcPct val="105000"/>
-              </a:lnSpc>
-              <a:spcBef>
-                <a:spcPts val="0"/>
-              </a:spcBef>
-              <a:spcAft>
-                <a:spcPts val="1200"/>
-              </a:spcAft>
-            </a:pPr>
-            <a:r>
-              <a:rPr sz="1550" b="0">
-                <a:solidFill>
-                  <a:srgbClr val="C9D4E6"/>
-                </a:solidFill>
-                <a:latin typeface="Segoe UI"/>
-              </a:rPr>
-              <a:t>•  Minimizes prompt churn and variance</a:t>
-            </a:r>
-          </a:p>
-          <a:p>
-            <a:pPr>
-              <a:lnSpc>
-                <a:spcPct val="105000"/>
-              </a:lnSpc>
-              <a:spcBef>
-                <a:spcPts val="0"/>
-              </a:spcBef>
-              <a:spcAft>
-                <a:spcPts val="1200"/>
-              </a:spcAft>
-            </a:pPr>
-            <a:r>
-              <a:rPr sz="1550" b="0">
-                <a:solidFill>
-                  <a:srgbClr val="C9D4E6"/>
-                </a:solidFill>
-                <a:latin typeface="Segoe UI"/>
-              </a:rPr>
-              <a:t>•  Up to ~3× productivity by eliminating wasted cycles</a:t>
-            </a:r>
-          </a:p>
-        </p:txBody>
-      </p:sp>
-      <p:sp>
-        <p:nvSpPr>
-          <p:cNvPr id="16" name="TextBox 15"/>
-          <p:cNvSpPr txBox="1"/>
-          <p:nvPr/>
-        </p:nvSpPr>
-        <p:spPr>
-          <a:xfrm>
-            <a:off x="640080" y="5623560"/>
-            <a:ext cx="10972800" cy="548640"/>
-          </a:xfrm>
-          <a:prstGeom prst="rect">
-            <a:avLst/>
-          </a:prstGeom>
-          <a:noFill/>
-        </p:spPr>
-        <p:txBody>
-          <a:bodyPr wrap="square" anchor="t" lIns="0" rIns="0" tIns="0" bIns="0">
-            <a:spAutoFit/>
-          </a:bodyPr>
-          <a:lstStyle/>
-          <a:p>
-            <a:pPr algn="l">
-              <a:lnSpc>
-                <a:spcPct val="100000"/>
-              </a:lnSpc>
-              <a:spcBef>
-                <a:spcPts val="0"/>
-              </a:spcBef>
-              <a:spcAft>
-                <a:spcPts val="600"/>
-              </a:spcAft>
-            </a:pPr>
-            <a:r>
-              <a:rPr sz="1700" b="1" i="0">
-                <a:solidFill>
-                  <a:srgbClr val="FFFFFF"/>
-                </a:solidFill>
-                <a:latin typeface="Segoe UI"/>
-              </a:rPr>
-              <a:t>Far lower effective token cost per developer</a:t>
-            </a:r>
-            <a:r>
-              <a:rPr sz="1700" b="0" i="0">
-                <a:solidFill>
-                  <a:srgbClr val="C9D4E6"/>
-                </a:solidFill>
-                <a:latin typeface="Segoe UI"/>
-              </a:rPr>
-              <a:t>  vs. unmanaged multi-agent setups.</a:t>
-            </a:r>
-          </a:p>
-        </p:txBody>
-      </p:sp>
-      <p:sp>
-        <p:nvSpPr>
-          <p:cNvPr id="17" name="TextBox 16"/>
-          <p:cNvSpPr txBox="1"/>
-          <p:nvPr/>
-        </p:nvSpPr>
-        <p:spPr>
-          <a:xfrm>
-            <a:off x="11338560" y="6400800"/>
-            <a:ext cx="640080" cy="365760"/>
-          </a:xfrm>
-          <a:prstGeom prst="rect">
-            <a:avLst/>
-          </a:prstGeom>
-          <a:noFill/>
-        </p:spPr>
-        <p:txBody>
-          <a:bodyPr wrap="square" anchor="t" lIns="0" rIns="0" tIns="0" bIns="0">
-            <a:spAutoFit/>
-          </a:bodyPr>
-          <a:lstStyle/>
-          <a:p>
             <a:pPr algn="r">
               <a:lnSpc>
                 <a:spcPct val="100000"/>
@@ -11680,7 +11541,7 @@
           <a:noFill/>
         </p:spPr>
         <p:txBody>
-          <a:bodyPr wrap="square" anchor="t" lIns="0" rIns="0" tIns="0" bIns="0">
+          <a:bodyPr wrap="square" lIns="0" tIns="0" rIns="0" bIns="0" anchor="t">
             <a:spAutoFit/>
           </a:bodyPr>
           <a:lstStyle/>
@@ -11717,7 +11578,7 @@
 </file>
 
 <file path=ppt/slides/slide8.xml><?xml version="1.0" encoding="utf-8"?>
-<p:sld xmlns:a="http://schemas.openxmlformats.org/drawingml/2006/main" xmlns:p="http://schemas.openxmlformats.org/presentationml/2006/main" xmlns:r="http://schemas.openxmlformats.org/officeDocument/2006/relationships">
+<p:sld xmlns:a="http://schemas.openxmlformats.org/drawingml/2006/main" xmlns:r="http://schemas.openxmlformats.org/officeDocument/2006/relationships" xmlns:p="http://schemas.openxmlformats.org/presentationml/2006/main">
   <p:cSld>
     <p:bg>
       <p:bgPr>
@@ -11733,7 +11594,14 @@
         <p:cNvGrpSpPr/>
         <p:nvPr/>
       </p:nvGrpSpPr>
-      <p:grpSpPr/>
+      <p:grpSpPr>
+        <a:xfrm>
+          <a:off x="0" y="0"/>
+          <a:ext cx="0" cy="0"/>
+          <a:chOff x="0" y="0"/>
+          <a:chExt cx="0" cy="0"/>
+        </a:xfrm>
+      </p:grpSpPr>
       <p:sp>
         <p:nvSpPr>
           <p:cNvPr id="2" name="Rectangle 1"/>
@@ -11775,6 +11643,7 @@
           <a:lstStyle/>
           <a:p>
             <a:pPr algn="ctr"/>
+            <a:endParaRPr/>
           </a:p>
         </p:txBody>
       </p:sp>
@@ -11795,7 +11664,7 @@
           <a:noFill/>
         </p:spPr>
         <p:txBody>
-          <a:bodyPr wrap="square" anchor="t" lIns="0" rIns="0" tIns="0" bIns="0">
+          <a:bodyPr wrap="square" lIns="0" tIns="0" rIns="0" bIns="0" anchor="t">
             <a:spAutoFit/>
           </a:bodyPr>
           <a:lstStyle/>
@@ -11840,7 +11709,7 @@
           <a:noFill/>
         </p:spPr>
         <p:txBody>
-          <a:bodyPr wrap="square" anchor="t" lIns="0" rIns="0" tIns="0" bIns="0">
+          <a:bodyPr wrap="square" lIns="0" tIns="0" rIns="0" bIns="0" anchor="t">
             <a:spAutoFit/>
           </a:bodyPr>
           <a:lstStyle/>
@@ -11870,14 +11739,374 @@
       </p:sp>
       <p:sp>
         <p:nvSpPr>
-          <p:cNvPr id="5" name="Rectangle 4"/>
+          <p:cNvPr id="6" name="Rounded Rectangle 5"/>
           <p:cNvSpPr/>
           <p:nvPr/>
         </p:nvSpPr>
         <p:spPr>
           <a:xfrm>
-            <a:off x="640080" y="1691640"/>
-            <a:ext cx="822960" cy="64008"/>
+            <a:off x="640080" y="2148840"/>
+            <a:ext cx="2697480" cy="2743200"/>
+          </a:xfrm>
+          <a:prstGeom prst="roundRect">
+            <a:avLst/>
+          </a:prstGeom>
+          <a:solidFill>
+            <a:srgbClr val="122A4D"/>
+          </a:solidFill>
+          <a:ln>
+            <a:noFill/>
+          </a:ln>
+          <a:effectLst/>
+        </p:spPr>
+        <p:style>
+          <a:lnRef idx="1">
+            <a:schemeClr val="accent1"/>
+          </a:lnRef>
+          <a:fillRef idx="3">
+            <a:schemeClr val="accent1"/>
+          </a:fillRef>
+          <a:effectRef idx="2">
+            <a:schemeClr val="accent1"/>
+          </a:effectRef>
+          <a:fontRef idx="minor">
+            <a:schemeClr val="lt1"/>
+          </a:fontRef>
+        </p:style>
+        <p:txBody>
+          <a:bodyPr rtlCol="0" anchor="ctr"/>
+          <a:lstStyle/>
+          <a:p>
+            <a:pPr algn="ctr"/>
+            <a:endParaRPr/>
+          </a:p>
+        </p:txBody>
+      </p:sp>
+      <p:sp>
+        <p:nvSpPr>
+          <p:cNvPr id="7" name="Rectangle 6"/>
+          <p:cNvSpPr/>
+          <p:nvPr/>
+        </p:nvSpPr>
+        <p:spPr>
+          <a:xfrm>
+            <a:off x="640080" y="2148840"/>
+            <a:ext cx="2697480" cy="109728"/>
+          </a:xfrm>
+          <a:prstGeom prst="rect">
+            <a:avLst/>
+          </a:prstGeom>
+          <a:solidFill>
+            <a:srgbClr val="2E6BF0"/>
+          </a:solidFill>
+          <a:ln>
+            <a:noFill/>
+          </a:ln>
+          <a:effectLst/>
+        </p:spPr>
+        <p:style>
+          <a:lnRef idx="1">
+            <a:schemeClr val="accent1"/>
+          </a:lnRef>
+          <a:fillRef idx="3">
+            <a:schemeClr val="accent1"/>
+          </a:fillRef>
+          <a:effectRef idx="2">
+            <a:schemeClr val="accent1"/>
+          </a:effectRef>
+          <a:fontRef idx="minor">
+            <a:schemeClr val="lt1"/>
+          </a:fontRef>
+        </p:style>
+        <p:txBody>
+          <a:bodyPr rtlCol="0" anchor="ctr"/>
+          <a:lstStyle/>
+          <a:p>
+            <a:pPr algn="ctr"/>
+            <a:endParaRPr/>
+          </a:p>
+        </p:txBody>
+      </p:sp>
+      <p:sp>
+        <p:nvSpPr>
+          <p:cNvPr id="8" name="Oval 7"/>
+          <p:cNvSpPr/>
+          <p:nvPr/>
+        </p:nvSpPr>
+        <p:spPr>
+          <a:xfrm>
+            <a:off x="960120" y="2423160"/>
+            <a:ext cx="640080" cy="640080"/>
+          </a:xfrm>
+          <a:prstGeom prst="ellipse">
+            <a:avLst/>
+          </a:prstGeom>
+          <a:solidFill>
+            <a:srgbClr val="2E6BF0"/>
+          </a:solidFill>
+          <a:ln>
+            <a:noFill/>
+          </a:ln>
+          <a:effectLst/>
+        </p:spPr>
+        <p:style>
+          <a:lnRef idx="1">
+            <a:schemeClr val="accent1"/>
+          </a:lnRef>
+          <a:fillRef idx="3">
+            <a:schemeClr val="accent1"/>
+          </a:fillRef>
+          <a:effectRef idx="2">
+            <a:schemeClr val="accent1"/>
+          </a:effectRef>
+          <a:fontRef idx="minor">
+            <a:schemeClr val="lt1"/>
+          </a:fontRef>
+        </p:style>
+        <p:txBody>
+          <a:bodyPr rtlCol="0" anchor="ctr"/>
+          <a:lstStyle/>
+          <a:p>
+            <a:pPr algn="ctr"/>
+            <a:endParaRPr/>
+          </a:p>
+        </p:txBody>
+      </p:sp>
+      <p:sp>
+        <p:nvSpPr>
+          <p:cNvPr id="9" name="TextBox 8"/>
+          <p:cNvSpPr txBox="1"/>
+          <p:nvPr/>
+        </p:nvSpPr>
+        <p:spPr>
+          <a:xfrm>
+            <a:off x="960120" y="2432304"/>
+            <a:ext cx="640080" cy="640080"/>
+          </a:xfrm>
+          <a:prstGeom prst="rect">
+            <a:avLst/>
+          </a:prstGeom>
+          <a:noFill/>
+        </p:spPr>
+        <p:txBody>
+          <a:bodyPr wrap="square" lIns="0" tIns="0" rIns="0" bIns="0" anchor="ctr">
+            <a:spAutoFit/>
+          </a:bodyPr>
+          <a:lstStyle/>
+          <a:p>
+            <a:pPr algn="ctr">
+              <a:lnSpc>
+                <a:spcPct val="100000"/>
+              </a:lnSpc>
+              <a:spcBef>
+                <a:spcPts val="0"/>
+              </a:spcBef>
+              <a:spcAft>
+                <a:spcPts val="600"/>
+              </a:spcAft>
+            </a:pPr>
+            <a:r>
+              <a:rPr sz="2400" b="1" i="0">
+                <a:solidFill>
+                  <a:srgbClr val="0B1F3A"/>
+                </a:solidFill>
+                <a:latin typeface="Segoe UI"/>
+              </a:rPr>
+              <a:t>1</a:t>
+            </a:r>
+          </a:p>
+        </p:txBody>
+      </p:sp>
+      <p:sp>
+        <p:nvSpPr>
+          <p:cNvPr id="10" name="TextBox 9"/>
+          <p:cNvSpPr txBox="1"/>
+          <p:nvPr/>
+        </p:nvSpPr>
+        <p:spPr>
+          <a:xfrm>
+            <a:off x="960120" y="3246120"/>
+            <a:ext cx="2194560" cy="457200"/>
+          </a:xfrm>
+          <a:prstGeom prst="rect">
+            <a:avLst/>
+          </a:prstGeom>
+          <a:noFill/>
+        </p:spPr>
+        <p:txBody>
+          <a:bodyPr wrap="square" lIns="0" tIns="0" rIns="0" bIns="0" anchor="t">
+            <a:spAutoFit/>
+          </a:bodyPr>
+          <a:lstStyle/>
+          <a:p>
+            <a:pPr algn="l">
+              <a:lnSpc>
+                <a:spcPct val="100000"/>
+              </a:lnSpc>
+              <a:spcBef>
+                <a:spcPts val="0"/>
+              </a:spcBef>
+              <a:spcAft>
+                <a:spcPts val="600"/>
+              </a:spcAft>
+            </a:pPr>
+            <a:r>
+              <a:rPr sz="2000" b="1" i="0">
+                <a:solidFill>
+                  <a:srgbClr val="FFFFFF"/>
+                </a:solidFill>
+                <a:latin typeface="Segoe UI"/>
+              </a:rPr>
+              <a:t>Capture</a:t>
+            </a:r>
+          </a:p>
+        </p:txBody>
+      </p:sp>
+      <p:sp>
+        <p:nvSpPr>
+          <p:cNvPr id="11" name="TextBox 10"/>
+          <p:cNvSpPr txBox="1"/>
+          <p:nvPr/>
+        </p:nvSpPr>
+        <p:spPr>
+          <a:xfrm>
+            <a:off x="960120" y="3703320"/>
+            <a:ext cx="2194560" cy="1097280"/>
+          </a:xfrm>
+          <a:prstGeom prst="rect">
+            <a:avLst/>
+          </a:prstGeom>
+          <a:noFill/>
+        </p:spPr>
+        <p:txBody>
+          <a:bodyPr wrap="square" lIns="0" tIns="0" rIns="0" bIns="0" anchor="t">
+            <a:spAutoFit/>
+          </a:bodyPr>
+          <a:lstStyle/>
+          <a:p>
+            <a:pPr algn="l">
+              <a:lnSpc>
+                <a:spcPct val="108000"/>
+              </a:lnSpc>
+              <a:spcBef>
+                <a:spcPts val="0"/>
+              </a:spcBef>
+              <a:spcAft>
+                <a:spcPts val="600"/>
+              </a:spcAft>
+            </a:pPr>
+            <a:r>
+              <a:rPr sz="1350" b="0" i="0">
+                <a:solidFill>
+                  <a:srgbClr val="C9D4E6"/>
+                </a:solidFill>
+                <a:latin typeface="Segoe UI"/>
+              </a:rPr>
+              <a:t>Robot &amp; factory sensor streams land in ProjexCloud's petabyte-ready, multi-tenant backbone.</a:t>
+            </a:r>
+          </a:p>
+        </p:txBody>
+      </p:sp>
+      <p:sp>
+        <p:nvSpPr>
+          <p:cNvPr id="12" name="TextBox 11"/>
+          <p:cNvSpPr txBox="1"/>
+          <p:nvPr/>
+        </p:nvSpPr>
+        <p:spPr>
+          <a:xfrm>
+            <a:off x="3291840" y="3291840"/>
+            <a:ext cx="320040" cy="457200"/>
+          </a:xfrm>
+          <a:prstGeom prst="rect">
+            <a:avLst/>
+          </a:prstGeom>
+          <a:noFill/>
+        </p:spPr>
+        <p:txBody>
+          <a:bodyPr wrap="square" lIns="0" tIns="0" rIns="0" bIns="0" anchor="t">
+            <a:spAutoFit/>
+          </a:bodyPr>
+          <a:lstStyle/>
+          <a:p>
+            <a:pPr algn="ctr">
+              <a:lnSpc>
+                <a:spcPct val="100000"/>
+              </a:lnSpc>
+              <a:spcBef>
+                <a:spcPts val="0"/>
+              </a:spcBef>
+              <a:spcAft>
+                <a:spcPts val="600"/>
+              </a:spcAft>
+            </a:pPr>
+            <a:r>
+              <a:rPr sz="2200" b="1" i="0">
+                <a:solidFill>
+                  <a:srgbClr val="8A98B0"/>
+                </a:solidFill>
+                <a:latin typeface="Segoe UI"/>
+              </a:rPr>
+              <a:t>→</a:t>
+            </a:r>
+          </a:p>
+        </p:txBody>
+      </p:sp>
+      <p:sp>
+        <p:nvSpPr>
+          <p:cNvPr id="13" name="Rounded Rectangle 12"/>
+          <p:cNvSpPr/>
+          <p:nvPr/>
+        </p:nvSpPr>
+        <p:spPr>
+          <a:xfrm>
+            <a:off x="3502152" y="2148840"/>
+            <a:ext cx="2697480" cy="2743200"/>
+          </a:xfrm>
+          <a:prstGeom prst="roundRect">
+            <a:avLst/>
+          </a:prstGeom>
+          <a:solidFill>
+            <a:srgbClr val="122A4D"/>
+          </a:solidFill>
+          <a:ln>
+            <a:noFill/>
+          </a:ln>
+          <a:effectLst/>
+        </p:spPr>
+        <p:style>
+          <a:lnRef idx="1">
+            <a:schemeClr val="accent1"/>
+          </a:lnRef>
+          <a:fillRef idx="3">
+            <a:schemeClr val="accent1"/>
+          </a:fillRef>
+          <a:effectRef idx="2">
+            <a:schemeClr val="accent1"/>
+          </a:effectRef>
+          <a:fontRef idx="minor">
+            <a:schemeClr val="lt1"/>
+          </a:fontRef>
+        </p:style>
+        <p:txBody>
+          <a:bodyPr rtlCol="0" anchor="ctr"/>
+          <a:lstStyle/>
+          <a:p>
+            <a:pPr algn="ctr"/>
+            <a:endParaRPr/>
+          </a:p>
+        </p:txBody>
+      </p:sp>
+      <p:sp>
+        <p:nvSpPr>
+          <p:cNvPr id="14" name="Rectangle 13"/>
+          <p:cNvSpPr/>
+          <p:nvPr/>
+        </p:nvSpPr>
+        <p:spPr>
+          <a:xfrm>
+            <a:off x="3502152" y="2148840"/>
+            <a:ext cx="2697480" cy="109728"/>
           </a:xfrm>
           <a:prstGeom prst="rect">
             <a:avLst/>
@@ -11909,18 +12138,244 @@
           <a:lstStyle/>
           <a:p>
             <a:pPr algn="ctr"/>
-          </a:p>
-        </p:txBody>
-      </p:sp>
-      <p:sp>
-        <p:nvSpPr>
-          <p:cNvPr id="6" name="Rounded Rectangle 5"/>
+            <a:endParaRPr/>
+          </a:p>
+        </p:txBody>
+      </p:sp>
+      <p:sp>
+        <p:nvSpPr>
+          <p:cNvPr id="15" name="Oval 14"/>
           <p:cNvSpPr/>
           <p:nvPr/>
         </p:nvSpPr>
         <p:spPr>
           <a:xfrm>
-            <a:off x="640080" y="2148840"/>
+            <a:off x="3822192" y="2423160"/>
+            <a:ext cx="640080" cy="640080"/>
+          </a:xfrm>
+          <a:prstGeom prst="ellipse">
+            <a:avLst/>
+          </a:prstGeom>
+          <a:solidFill>
+            <a:srgbClr val="27D3C4"/>
+          </a:solidFill>
+          <a:ln>
+            <a:noFill/>
+          </a:ln>
+          <a:effectLst/>
+        </p:spPr>
+        <p:style>
+          <a:lnRef idx="1">
+            <a:schemeClr val="accent1"/>
+          </a:lnRef>
+          <a:fillRef idx="3">
+            <a:schemeClr val="accent1"/>
+          </a:fillRef>
+          <a:effectRef idx="2">
+            <a:schemeClr val="accent1"/>
+          </a:effectRef>
+          <a:fontRef idx="minor">
+            <a:schemeClr val="lt1"/>
+          </a:fontRef>
+        </p:style>
+        <p:txBody>
+          <a:bodyPr rtlCol="0" anchor="ctr"/>
+          <a:lstStyle/>
+          <a:p>
+            <a:pPr algn="ctr"/>
+            <a:endParaRPr/>
+          </a:p>
+        </p:txBody>
+      </p:sp>
+      <p:sp>
+        <p:nvSpPr>
+          <p:cNvPr id="16" name="TextBox 15"/>
+          <p:cNvSpPr txBox="1"/>
+          <p:nvPr/>
+        </p:nvSpPr>
+        <p:spPr>
+          <a:xfrm>
+            <a:off x="3822192" y="2432304"/>
+            <a:ext cx="640080" cy="640080"/>
+          </a:xfrm>
+          <a:prstGeom prst="rect">
+            <a:avLst/>
+          </a:prstGeom>
+          <a:noFill/>
+        </p:spPr>
+        <p:txBody>
+          <a:bodyPr wrap="square" lIns="0" tIns="0" rIns="0" bIns="0" anchor="ctr">
+            <a:spAutoFit/>
+          </a:bodyPr>
+          <a:lstStyle/>
+          <a:p>
+            <a:pPr algn="ctr">
+              <a:lnSpc>
+                <a:spcPct val="100000"/>
+              </a:lnSpc>
+              <a:spcBef>
+                <a:spcPts val="0"/>
+              </a:spcBef>
+              <a:spcAft>
+                <a:spcPts val="600"/>
+              </a:spcAft>
+            </a:pPr>
+            <a:r>
+              <a:rPr sz="2400" b="1" i="0">
+                <a:solidFill>
+                  <a:srgbClr val="0B1F3A"/>
+                </a:solidFill>
+                <a:latin typeface="Segoe UI"/>
+              </a:rPr>
+              <a:t>2</a:t>
+            </a:r>
+          </a:p>
+        </p:txBody>
+      </p:sp>
+      <p:sp>
+        <p:nvSpPr>
+          <p:cNvPr id="17" name="TextBox 16"/>
+          <p:cNvSpPr txBox="1"/>
+          <p:nvPr/>
+        </p:nvSpPr>
+        <p:spPr>
+          <a:xfrm>
+            <a:off x="3822192" y="3246120"/>
+            <a:ext cx="2194560" cy="457200"/>
+          </a:xfrm>
+          <a:prstGeom prst="rect">
+            <a:avLst/>
+          </a:prstGeom>
+          <a:noFill/>
+        </p:spPr>
+        <p:txBody>
+          <a:bodyPr wrap="square" lIns="0" tIns="0" rIns="0" bIns="0" anchor="t">
+            <a:spAutoFit/>
+          </a:bodyPr>
+          <a:lstStyle/>
+          <a:p>
+            <a:pPr algn="l">
+              <a:lnSpc>
+                <a:spcPct val="100000"/>
+              </a:lnSpc>
+              <a:spcBef>
+                <a:spcPts val="0"/>
+              </a:spcBef>
+              <a:spcAft>
+                <a:spcPts val="600"/>
+              </a:spcAft>
+            </a:pPr>
+            <a:r>
+              <a:rPr sz="2000" b="1" i="0">
+                <a:solidFill>
+                  <a:srgbClr val="FFFFFF"/>
+                </a:solidFill>
+                <a:latin typeface="Segoe UI"/>
+              </a:rPr>
+              <a:t>Govern</a:t>
+            </a:r>
+          </a:p>
+        </p:txBody>
+      </p:sp>
+      <p:sp>
+        <p:nvSpPr>
+          <p:cNvPr id="18" name="TextBox 17"/>
+          <p:cNvSpPr txBox="1"/>
+          <p:nvPr/>
+        </p:nvSpPr>
+        <p:spPr>
+          <a:xfrm>
+            <a:off x="3822192" y="3703320"/>
+            <a:ext cx="2194560" cy="1097280"/>
+          </a:xfrm>
+          <a:prstGeom prst="rect">
+            <a:avLst/>
+          </a:prstGeom>
+          <a:noFill/>
+        </p:spPr>
+        <p:txBody>
+          <a:bodyPr wrap="square" lIns="0" tIns="0" rIns="0" bIns="0" anchor="t">
+            <a:spAutoFit/>
+          </a:bodyPr>
+          <a:lstStyle/>
+          <a:p>
+            <a:pPr algn="l">
+              <a:lnSpc>
+                <a:spcPct val="108000"/>
+              </a:lnSpc>
+              <a:spcBef>
+                <a:spcPts val="0"/>
+              </a:spcBef>
+              <a:spcAft>
+                <a:spcPts val="600"/>
+              </a:spcAft>
+            </a:pPr>
+            <a:r>
+              <a:rPr sz="1350" b="0" i="0">
+                <a:solidFill>
+                  <a:srgbClr val="C9D4E6"/>
+                </a:solidFill>
+                <a:latin typeface="Segoe UI"/>
+              </a:rPr>
+              <a:t>AI models &amp; copilots run via the AI Gateway with guardrails, audit and per-tenant control.</a:t>
+            </a:r>
+          </a:p>
+        </p:txBody>
+      </p:sp>
+      <p:sp>
+        <p:nvSpPr>
+          <p:cNvPr id="19" name="TextBox 18"/>
+          <p:cNvSpPr txBox="1"/>
+          <p:nvPr/>
+        </p:nvSpPr>
+        <p:spPr>
+          <a:xfrm>
+            <a:off x="6153912" y="3291840"/>
+            <a:ext cx="320040" cy="457200"/>
+          </a:xfrm>
+          <a:prstGeom prst="rect">
+            <a:avLst/>
+          </a:prstGeom>
+          <a:noFill/>
+        </p:spPr>
+        <p:txBody>
+          <a:bodyPr wrap="square" lIns="0" tIns="0" rIns="0" bIns="0" anchor="t">
+            <a:spAutoFit/>
+          </a:bodyPr>
+          <a:lstStyle/>
+          <a:p>
+            <a:pPr algn="ctr">
+              <a:lnSpc>
+                <a:spcPct val="100000"/>
+              </a:lnSpc>
+              <a:spcBef>
+                <a:spcPts val="0"/>
+              </a:spcBef>
+              <a:spcAft>
+                <a:spcPts val="600"/>
+              </a:spcAft>
+            </a:pPr>
+            <a:r>
+              <a:rPr sz="2200" b="1" i="0">
+                <a:solidFill>
+                  <a:srgbClr val="8A98B0"/>
+                </a:solidFill>
+                <a:latin typeface="Segoe UI"/>
+              </a:rPr>
+              <a:t>→</a:t>
+            </a:r>
+          </a:p>
+        </p:txBody>
+      </p:sp>
+      <p:sp>
+        <p:nvSpPr>
+          <p:cNvPr id="20" name="Rounded Rectangle 19"/>
+          <p:cNvSpPr/>
+          <p:nvPr/>
+        </p:nvSpPr>
+        <p:spPr>
+          <a:xfrm>
+            <a:off x="6364224" y="2148840"/>
             <a:ext cx="2697480" cy="2743200"/>
           </a:xfrm>
           <a:prstGeom prst="roundRect">
@@ -11953,25 +12408,26 @@
           <a:lstStyle/>
           <a:p>
             <a:pPr algn="ctr"/>
-          </a:p>
-        </p:txBody>
-      </p:sp>
-      <p:sp>
-        <p:nvSpPr>
-          <p:cNvPr id="7" name="Rectangle 6"/>
+            <a:endParaRPr/>
+          </a:p>
+        </p:txBody>
+      </p:sp>
+      <p:sp>
+        <p:nvSpPr>
+          <p:cNvPr id="21" name="Rectangle 20"/>
           <p:cNvSpPr/>
           <p:nvPr/>
         </p:nvSpPr>
         <p:spPr>
           <a:xfrm>
-            <a:off x="640080" y="2148840"/>
+            <a:off x="6364224" y="2148840"/>
             <a:ext cx="2697480" cy="109728"/>
           </a:xfrm>
           <a:prstGeom prst="rect">
             <a:avLst/>
           </a:prstGeom>
           <a:solidFill>
-            <a:srgbClr val="2E6BF0"/>
+            <a:srgbClr val="35C759"/>
           </a:solidFill>
           <a:ln>
             <a:noFill/>
@@ -11997,25 +12453,26 @@
           <a:lstStyle/>
           <a:p>
             <a:pPr algn="ctr"/>
-          </a:p>
-        </p:txBody>
-      </p:sp>
-      <p:sp>
-        <p:nvSpPr>
-          <p:cNvPr id="8" name="Oval 7"/>
+            <a:endParaRPr/>
+          </a:p>
+        </p:txBody>
+      </p:sp>
+      <p:sp>
+        <p:nvSpPr>
+          <p:cNvPr id="22" name="Oval 21"/>
           <p:cNvSpPr/>
           <p:nvPr/>
         </p:nvSpPr>
         <p:spPr>
           <a:xfrm>
-            <a:off x="960120" y="2423160"/>
+            <a:off x="6684264" y="2423160"/>
             <a:ext cx="640080" cy="640080"/>
           </a:xfrm>
           <a:prstGeom prst="ellipse">
             <a:avLst/>
           </a:prstGeom>
           <a:solidFill>
-            <a:srgbClr val="2E6BF0"/>
+            <a:srgbClr val="35C759"/>
           </a:solidFill>
           <a:ln>
             <a:noFill/>
@@ -12041,18 +12498,19 @@
           <a:lstStyle/>
           <a:p>
             <a:pPr algn="ctr"/>
-          </a:p>
-        </p:txBody>
-      </p:sp>
-      <p:sp>
-        <p:nvSpPr>
-          <p:cNvPr id="9" name="TextBox 8"/>
+            <a:endParaRPr/>
+          </a:p>
+        </p:txBody>
+      </p:sp>
+      <p:sp>
+        <p:nvSpPr>
+          <p:cNvPr id="23" name="TextBox 22"/>
           <p:cNvSpPr txBox="1"/>
           <p:nvPr/>
         </p:nvSpPr>
         <p:spPr>
           <a:xfrm>
-            <a:off x="960120" y="2432304"/>
+            <a:off x="6684264" y="2432304"/>
             <a:ext cx="640080" cy="640080"/>
           </a:xfrm>
           <a:prstGeom prst="rect">
@@ -12061,7 +12519,7 @@
           <a:noFill/>
         </p:spPr>
         <p:txBody>
-          <a:bodyPr wrap="square" anchor="ctr" lIns="0" rIns="0" tIns="0" bIns="0">
+          <a:bodyPr wrap="square" lIns="0" tIns="0" rIns="0" bIns="0" anchor="ctr">
             <a:spAutoFit/>
           </a:bodyPr>
           <a:lstStyle/>
@@ -12084,20 +12542,20 @@
                 </a:solidFill>
                 <a:latin typeface="Segoe UI"/>
               </a:rPr>
-              <a:t>1</a:t>
-            </a:r>
-          </a:p>
-        </p:txBody>
-      </p:sp>
-      <p:sp>
-        <p:nvSpPr>
-          <p:cNvPr id="10" name="TextBox 9"/>
+              <a:t>3</a:t>
+            </a:r>
+          </a:p>
+        </p:txBody>
+      </p:sp>
+      <p:sp>
+        <p:nvSpPr>
+          <p:cNvPr id="24" name="TextBox 23"/>
           <p:cNvSpPr txBox="1"/>
           <p:nvPr/>
         </p:nvSpPr>
         <p:spPr>
           <a:xfrm>
-            <a:off x="960120" y="3246120"/>
+            <a:off x="6684264" y="3246120"/>
             <a:ext cx="2194560" cy="457200"/>
           </a:xfrm>
           <a:prstGeom prst="rect">
@@ -12106,7 +12564,7 @@
           <a:noFill/>
         </p:spPr>
         <p:txBody>
-          <a:bodyPr wrap="square" anchor="t" lIns="0" rIns="0" tIns="0" bIns="0">
+          <a:bodyPr wrap="square" lIns="0" tIns="0" rIns="0" bIns="0" anchor="t">
             <a:spAutoFit/>
           </a:bodyPr>
           <a:lstStyle/>
@@ -12129,20 +12587,20 @@
                 </a:solidFill>
                 <a:latin typeface="Segoe UI"/>
               </a:rPr>
-              <a:t>Capture</a:t>
-            </a:r>
-          </a:p>
-        </p:txBody>
-      </p:sp>
-      <p:sp>
-        <p:nvSpPr>
-          <p:cNvPr id="11" name="TextBox 10"/>
+              <a:t>Build</a:t>
+            </a:r>
+          </a:p>
+        </p:txBody>
+      </p:sp>
+      <p:sp>
+        <p:nvSpPr>
+          <p:cNvPr id="25" name="TextBox 24"/>
           <p:cNvSpPr txBox="1"/>
           <p:nvPr/>
         </p:nvSpPr>
         <p:spPr>
           <a:xfrm>
-            <a:off x="960120" y="3703320"/>
+            <a:off x="6684264" y="3703320"/>
             <a:ext cx="2194560" cy="1097280"/>
           </a:xfrm>
           <a:prstGeom prst="rect">
@@ -12151,7 +12609,7 @@
           <a:noFill/>
         </p:spPr>
         <p:txBody>
-          <a:bodyPr wrap="square" anchor="t" lIns="0" rIns="0" tIns="0" bIns="0">
+          <a:bodyPr wrap="square" lIns="0" tIns="0" rIns="0" bIns="0" anchor="t">
             <a:spAutoFit/>
           </a:bodyPr>
           <a:lstStyle/>
@@ -12174,20 +12632,20 @@
                 </a:solidFill>
                 <a:latin typeface="Segoe UI"/>
               </a:rPr>
-              <a:t>Robot &amp; factory sensor streams land in ProjexCloud's petabyte-ready, multi-tenant backbone.</a:t>
-            </a:r>
-          </a:p>
-        </p:txBody>
-      </p:sp>
-      <p:sp>
-        <p:nvSpPr>
-          <p:cNvPr id="12" name="TextBox 11"/>
+              <a:t>Projexlight orchestrates agents to build ops consoles, quality portals &amp; maintenance apps.</a:t>
+            </a:r>
+          </a:p>
+        </p:txBody>
+      </p:sp>
+      <p:sp>
+        <p:nvSpPr>
+          <p:cNvPr id="26" name="TextBox 25"/>
           <p:cNvSpPr txBox="1"/>
           <p:nvPr/>
         </p:nvSpPr>
         <p:spPr>
           <a:xfrm>
-            <a:off x="3291840" y="3291840"/>
+            <a:off x="9015984" y="3291840"/>
             <a:ext cx="320040" cy="457200"/>
           </a:xfrm>
           <a:prstGeom prst="rect">
@@ -12196,7 +12654,7 @@
           <a:noFill/>
         </p:spPr>
         <p:txBody>
-          <a:bodyPr wrap="square" anchor="t" lIns="0" rIns="0" tIns="0" bIns="0">
+          <a:bodyPr wrap="square" lIns="0" tIns="0" rIns="0" bIns="0" anchor="t">
             <a:spAutoFit/>
           </a:bodyPr>
           <a:lstStyle/>
@@ -12226,13 +12684,13 @@
       </p:sp>
       <p:sp>
         <p:nvSpPr>
-          <p:cNvPr id="13" name="Rounded Rectangle 12"/>
+          <p:cNvPr id="27" name="Rounded Rectangle 26"/>
           <p:cNvSpPr/>
           <p:nvPr/>
         </p:nvSpPr>
         <p:spPr>
           <a:xfrm>
-            <a:off x="3502152" y="2148840"/>
+            <a:off x="9226296" y="2148840"/>
             <a:ext cx="2697480" cy="2743200"/>
           </a:xfrm>
           <a:prstGeom prst="roundRect">
@@ -12265,630 +12723,7 @@
           <a:lstStyle/>
           <a:p>
             <a:pPr algn="ctr"/>
-          </a:p>
-        </p:txBody>
-      </p:sp>
-      <p:sp>
-        <p:nvSpPr>
-          <p:cNvPr id="14" name="Rectangle 13"/>
-          <p:cNvSpPr/>
-          <p:nvPr/>
-        </p:nvSpPr>
-        <p:spPr>
-          <a:xfrm>
-            <a:off x="3502152" y="2148840"/>
-            <a:ext cx="2697480" cy="109728"/>
-          </a:xfrm>
-          <a:prstGeom prst="rect">
-            <a:avLst/>
-          </a:prstGeom>
-          <a:solidFill>
-            <a:srgbClr val="27D3C4"/>
-          </a:solidFill>
-          <a:ln>
-            <a:noFill/>
-          </a:ln>
-          <a:effectLst/>
-        </p:spPr>
-        <p:style>
-          <a:lnRef idx="1">
-            <a:schemeClr val="accent1"/>
-          </a:lnRef>
-          <a:fillRef idx="3">
-            <a:schemeClr val="accent1"/>
-          </a:fillRef>
-          <a:effectRef idx="2">
-            <a:schemeClr val="accent1"/>
-          </a:effectRef>
-          <a:fontRef idx="minor">
-            <a:schemeClr val="lt1"/>
-          </a:fontRef>
-        </p:style>
-        <p:txBody>
-          <a:bodyPr rtlCol="0" anchor="ctr"/>
-          <a:lstStyle/>
-          <a:p>
-            <a:pPr algn="ctr"/>
-          </a:p>
-        </p:txBody>
-      </p:sp>
-      <p:sp>
-        <p:nvSpPr>
-          <p:cNvPr id="15" name="Oval 14"/>
-          <p:cNvSpPr/>
-          <p:nvPr/>
-        </p:nvSpPr>
-        <p:spPr>
-          <a:xfrm>
-            <a:off x="3822192" y="2423160"/>
-            <a:ext cx="640080" cy="640080"/>
-          </a:xfrm>
-          <a:prstGeom prst="ellipse">
-            <a:avLst/>
-          </a:prstGeom>
-          <a:solidFill>
-            <a:srgbClr val="27D3C4"/>
-          </a:solidFill>
-          <a:ln>
-            <a:noFill/>
-          </a:ln>
-          <a:effectLst/>
-        </p:spPr>
-        <p:style>
-          <a:lnRef idx="1">
-            <a:schemeClr val="accent1"/>
-          </a:lnRef>
-          <a:fillRef idx="3">
-            <a:schemeClr val="accent1"/>
-          </a:fillRef>
-          <a:effectRef idx="2">
-            <a:schemeClr val="accent1"/>
-          </a:effectRef>
-          <a:fontRef idx="minor">
-            <a:schemeClr val="lt1"/>
-          </a:fontRef>
-        </p:style>
-        <p:txBody>
-          <a:bodyPr rtlCol="0" anchor="ctr"/>
-          <a:lstStyle/>
-          <a:p>
-            <a:pPr algn="ctr"/>
-          </a:p>
-        </p:txBody>
-      </p:sp>
-      <p:sp>
-        <p:nvSpPr>
-          <p:cNvPr id="16" name="TextBox 15"/>
-          <p:cNvSpPr txBox="1"/>
-          <p:nvPr/>
-        </p:nvSpPr>
-        <p:spPr>
-          <a:xfrm>
-            <a:off x="3822192" y="2432304"/>
-            <a:ext cx="640080" cy="640080"/>
-          </a:xfrm>
-          <a:prstGeom prst="rect">
-            <a:avLst/>
-          </a:prstGeom>
-          <a:noFill/>
-        </p:spPr>
-        <p:txBody>
-          <a:bodyPr wrap="square" anchor="ctr" lIns="0" rIns="0" tIns="0" bIns="0">
-            <a:spAutoFit/>
-          </a:bodyPr>
-          <a:lstStyle/>
-          <a:p>
-            <a:pPr algn="ctr">
-              <a:lnSpc>
-                <a:spcPct val="100000"/>
-              </a:lnSpc>
-              <a:spcBef>
-                <a:spcPts val="0"/>
-              </a:spcBef>
-              <a:spcAft>
-                <a:spcPts val="600"/>
-              </a:spcAft>
-            </a:pPr>
-            <a:r>
-              <a:rPr sz="2400" b="1" i="0">
-                <a:solidFill>
-                  <a:srgbClr val="0B1F3A"/>
-                </a:solidFill>
-                <a:latin typeface="Segoe UI"/>
-              </a:rPr>
-              <a:t>2</a:t>
-            </a:r>
-          </a:p>
-        </p:txBody>
-      </p:sp>
-      <p:sp>
-        <p:nvSpPr>
-          <p:cNvPr id="17" name="TextBox 16"/>
-          <p:cNvSpPr txBox="1"/>
-          <p:nvPr/>
-        </p:nvSpPr>
-        <p:spPr>
-          <a:xfrm>
-            <a:off x="3822192" y="3246120"/>
-            <a:ext cx="2194560" cy="457200"/>
-          </a:xfrm>
-          <a:prstGeom prst="rect">
-            <a:avLst/>
-          </a:prstGeom>
-          <a:noFill/>
-        </p:spPr>
-        <p:txBody>
-          <a:bodyPr wrap="square" anchor="t" lIns="0" rIns="0" tIns="0" bIns="0">
-            <a:spAutoFit/>
-          </a:bodyPr>
-          <a:lstStyle/>
-          <a:p>
-            <a:pPr algn="l">
-              <a:lnSpc>
-                <a:spcPct val="100000"/>
-              </a:lnSpc>
-              <a:spcBef>
-                <a:spcPts val="0"/>
-              </a:spcBef>
-              <a:spcAft>
-                <a:spcPts val="600"/>
-              </a:spcAft>
-            </a:pPr>
-            <a:r>
-              <a:rPr sz="2000" b="1" i="0">
-                <a:solidFill>
-                  <a:srgbClr val="FFFFFF"/>
-                </a:solidFill>
-                <a:latin typeface="Segoe UI"/>
-              </a:rPr>
-              <a:t>Govern</a:t>
-            </a:r>
-          </a:p>
-        </p:txBody>
-      </p:sp>
-      <p:sp>
-        <p:nvSpPr>
-          <p:cNvPr id="18" name="TextBox 17"/>
-          <p:cNvSpPr txBox="1"/>
-          <p:nvPr/>
-        </p:nvSpPr>
-        <p:spPr>
-          <a:xfrm>
-            <a:off x="3822192" y="3703320"/>
-            <a:ext cx="2194560" cy="1097280"/>
-          </a:xfrm>
-          <a:prstGeom prst="rect">
-            <a:avLst/>
-          </a:prstGeom>
-          <a:noFill/>
-        </p:spPr>
-        <p:txBody>
-          <a:bodyPr wrap="square" anchor="t" lIns="0" rIns="0" tIns="0" bIns="0">
-            <a:spAutoFit/>
-          </a:bodyPr>
-          <a:lstStyle/>
-          <a:p>
-            <a:pPr algn="l">
-              <a:lnSpc>
-                <a:spcPct val="108000"/>
-              </a:lnSpc>
-              <a:spcBef>
-                <a:spcPts val="0"/>
-              </a:spcBef>
-              <a:spcAft>
-                <a:spcPts val="600"/>
-              </a:spcAft>
-            </a:pPr>
-            <a:r>
-              <a:rPr sz="1350" b="0" i="0">
-                <a:solidFill>
-                  <a:srgbClr val="C9D4E6"/>
-                </a:solidFill>
-                <a:latin typeface="Segoe UI"/>
-              </a:rPr>
-              <a:t>AI models &amp; copilots run via the AI Gateway with guardrails, audit and per-tenant control.</a:t>
-            </a:r>
-          </a:p>
-        </p:txBody>
-      </p:sp>
-      <p:sp>
-        <p:nvSpPr>
-          <p:cNvPr id="19" name="TextBox 18"/>
-          <p:cNvSpPr txBox="1"/>
-          <p:nvPr/>
-        </p:nvSpPr>
-        <p:spPr>
-          <a:xfrm>
-            <a:off x="6153912" y="3291840"/>
-            <a:ext cx="320040" cy="457200"/>
-          </a:xfrm>
-          <a:prstGeom prst="rect">
-            <a:avLst/>
-          </a:prstGeom>
-          <a:noFill/>
-        </p:spPr>
-        <p:txBody>
-          <a:bodyPr wrap="square" anchor="t" lIns="0" rIns="0" tIns="0" bIns="0">
-            <a:spAutoFit/>
-          </a:bodyPr>
-          <a:lstStyle/>
-          <a:p>
-            <a:pPr algn="ctr">
-              <a:lnSpc>
-                <a:spcPct val="100000"/>
-              </a:lnSpc>
-              <a:spcBef>
-                <a:spcPts val="0"/>
-              </a:spcBef>
-              <a:spcAft>
-                <a:spcPts val="600"/>
-              </a:spcAft>
-            </a:pPr>
-            <a:r>
-              <a:rPr sz="2200" b="1" i="0">
-                <a:solidFill>
-                  <a:srgbClr val="8A98B0"/>
-                </a:solidFill>
-                <a:latin typeface="Segoe UI"/>
-              </a:rPr>
-              <a:t>→</a:t>
-            </a:r>
-          </a:p>
-        </p:txBody>
-      </p:sp>
-      <p:sp>
-        <p:nvSpPr>
-          <p:cNvPr id="20" name="Rounded Rectangle 19"/>
-          <p:cNvSpPr/>
-          <p:nvPr/>
-        </p:nvSpPr>
-        <p:spPr>
-          <a:xfrm>
-            <a:off x="6364224" y="2148840"/>
-            <a:ext cx="2697480" cy="2743200"/>
-          </a:xfrm>
-          <a:prstGeom prst="roundRect">
-            <a:avLst/>
-          </a:prstGeom>
-          <a:solidFill>
-            <a:srgbClr val="122A4D"/>
-          </a:solidFill>
-          <a:ln>
-            <a:noFill/>
-          </a:ln>
-          <a:effectLst/>
-        </p:spPr>
-        <p:style>
-          <a:lnRef idx="1">
-            <a:schemeClr val="accent1"/>
-          </a:lnRef>
-          <a:fillRef idx="3">
-            <a:schemeClr val="accent1"/>
-          </a:fillRef>
-          <a:effectRef idx="2">
-            <a:schemeClr val="accent1"/>
-          </a:effectRef>
-          <a:fontRef idx="minor">
-            <a:schemeClr val="lt1"/>
-          </a:fontRef>
-        </p:style>
-        <p:txBody>
-          <a:bodyPr rtlCol="0" anchor="ctr"/>
-          <a:lstStyle/>
-          <a:p>
-            <a:pPr algn="ctr"/>
-          </a:p>
-        </p:txBody>
-      </p:sp>
-      <p:sp>
-        <p:nvSpPr>
-          <p:cNvPr id="21" name="Rectangle 20"/>
-          <p:cNvSpPr/>
-          <p:nvPr/>
-        </p:nvSpPr>
-        <p:spPr>
-          <a:xfrm>
-            <a:off x="6364224" y="2148840"/>
-            <a:ext cx="2697480" cy="109728"/>
-          </a:xfrm>
-          <a:prstGeom prst="rect">
-            <a:avLst/>
-          </a:prstGeom>
-          <a:solidFill>
-            <a:srgbClr val="35C759"/>
-          </a:solidFill>
-          <a:ln>
-            <a:noFill/>
-          </a:ln>
-          <a:effectLst/>
-        </p:spPr>
-        <p:style>
-          <a:lnRef idx="1">
-            <a:schemeClr val="accent1"/>
-          </a:lnRef>
-          <a:fillRef idx="3">
-            <a:schemeClr val="accent1"/>
-          </a:fillRef>
-          <a:effectRef idx="2">
-            <a:schemeClr val="accent1"/>
-          </a:effectRef>
-          <a:fontRef idx="minor">
-            <a:schemeClr val="lt1"/>
-          </a:fontRef>
-        </p:style>
-        <p:txBody>
-          <a:bodyPr rtlCol="0" anchor="ctr"/>
-          <a:lstStyle/>
-          <a:p>
-            <a:pPr algn="ctr"/>
-          </a:p>
-        </p:txBody>
-      </p:sp>
-      <p:sp>
-        <p:nvSpPr>
-          <p:cNvPr id="22" name="Oval 21"/>
-          <p:cNvSpPr/>
-          <p:nvPr/>
-        </p:nvSpPr>
-        <p:spPr>
-          <a:xfrm>
-            <a:off x="6684264" y="2423160"/>
-            <a:ext cx="640080" cy="640080"/>
-          </a:xfrm>
-          <a:prstGeom prst="ellipse">
-            <a:avLst/>
-          </a:prstGeom>
-          <a:solidFill>
-            <a:srgbClr val="35C759"/>
-          </a:solidFill>
-          <a:ln>
-            <a:noFill/>
-          </a:ln>
-          <a:effectLst/>
-        </p:spPr>
-        <p:style>
-          <a:lnRef idx="1">
-            <a:schemeClr val="accent1"/>
-          </a:lnRef>
-          <a:fillRef idx="3">
-            <a:schemeClr val="accent1"/>
-          </a:fillRef>
-          <a:effectRef idx="2">
-            <a:schemeClr val="accent1"/>
-          </a:effectRef>
-          <a:fontRef idx="minor">
-            <a:schemeClr val="lt1"/>
-          </a:fontRef>
-        </p:style>
-        <p:txBody>
-          <a:bodyPr rtlCol="0" anchor="ctr"/>
-          <a:lstStyle/>
-          <a:p>
-            <a:pPr algn="ctr"/>
-          </a:p>
-        </p:txBody>
-      </p:sp>
-      <p:sp>
-        <p:nvSpPr>
-          <p:cNvPr id="23" name="TextBox 22"/>
-          <p:cNvSpPr txBox="1"/>
-          <p:nvPr/>
-        </p:nvSpPr>
-        <p:spPr>
-          <a:xfrm>
-            <a:off x="6684264" y="2432304"/>
-            <a:ext cx="640080" cy="640080"/>
-          </a:xfrm>
-          <a:prstGeom prst="rect">
-            <a:avLst/>
-          </a:prstGeom>
-          <a:noFill/>
-        </p:spPr>
-        <p:txBody>
-          <a:bodyPr wrap="square" anchor="ctr" lIns="0" rIns="0" tIns="0" bIns="0">
-            <a:spAutoFit/>
-          </a:bodyPr>
-          <a:lstStyle/>
-          <a:p>
-            <a:pPr algn="ctr">
-              <a:lnSpc>
-                <a:spcPct val="100000"/>
-              </a:lnSpc>
-              <a:spcBef>
-                <a:spcPts val="0"/>
-              </a:spcBef>
-              <a:spcAft>
-                <a:spcPts val="600"/>
-              </a:spcAft>
-            </a:pPr>
-            <a:r>
-              <a:rPr sz="2400" b="1" i="0">
-                <a:solidFill>
-                  <a:srgbClr val="0B1F3A"/>
-                </a:solidFill>
-                <a:latin typeface="Segoe UI"/>
-              </a:rPr>
-              <a:t>3</a:t>
-            </a:r>
-          </a:p>
-        </p:txBody>
-      </p:sp>
-      <p:sp>
-        <p:nvSpPr>
-          <p:cNvPr id="24" name="TextBox 23"/>
-          <p:cNvSpPr txBox="1"/>
-          <p:nvPr/>
-        </p:nvSpPr>
-        <p:spPr>
-          <a:xfrm>
-            <a:off x="6684264" y="3246120"/>
-            <a:ext cx="2194560" cy="457200"/>
-          </a:xfrm>
-          <a:prstGeom prst="rect">
-            <a:avLst/>
-          </a:prstGeom>
-          <a:noFill/>
-        </p:spPr>
-        <p:txBody>
-          <a:bodyPr wrap="square" anchor="t" lIns="0" rIns="0" tIns="0" bIns="0">
-            <a:spAutoFit/>
-          </a:bodyPr>
-          <a:lstStyle/>
-          <a:p>
-            <a:pPr algn="l">
-              <a:lnSpc>
-                <a:spcPct val="100000"/>
-              </a:lnSpc>
-              <a:spcBef>
-                <a:spcPts val="0"/>
-              </a:spcBef>
-              <a:spcAft>
-                <a:spcPts val="600"/>
-              </a:spcAft>
-            </a:pPr>
-            <a:r>
-              <a:rPr sz="2000" b="1" i="0">
-                <a:solidFill>
-                  <a:srgbClr val="FFFFFF"/>
-                </a:solidFill>
-                <a:latin typeface="Segoe UI"/>
-              </a:rPr>
-              <a:t>Build</a:t>
-            </a:r>
-          </a:p>
-        </p:txBody>
-      </p:sp>
-      <p:sp>
-        <p:nvSpPr>
-          <p:cNvPr id="25" name="TextBox 24"/>
-          <p:cNvSpPr txBox="1"/>
-          <p:nvPr/>
-        </p:nvSpPr>
-        <p:spPr>
-          <a:xfrm>
-            <a:off x="6684264" y="3703320"/>
-            <a:ext cx="2194560" cy="1097280"/>
-          </a:xfrm>
-          <a:prstGeom prst="rect">
-            <a:avLst/>
-          </a:prstGeom>
-          <a:noFill/>
-        </p:spPr>
-        <p:txBody>
-          <a:bodyPr wrap="square" anchor="t" lIns="0" rIns="0" tIns="0" bIns="0">
-            <a:spAutoFit/>
-          </a:bodyPr>
-          <a:lstStyle/>
-          <a:p>
-            <a:pPr algn="l">
-              <a:lnSpc>
-                <a:spcPct val="108000"/>
-              </a:lnSpc>
-              <a:spcBef>
-                <a:spcPts val="0"/>
-              </a:spcBef>
-              <a:spcAft>
-                <a:spcPts val="600"/>
-              </a:spcAft>
-            </a:pPr>
-            <a:r>
-              <a:rPr sz="1350" b="0" i="0">
-                <a:solidFill>
-                  <a:srgbClr val="C9D4E6"/>
-                </a:solidFill>
-                <a:latin typeface="Segoe UI"/>
-              </a:rPr>
-              <a:t>Projexlight orchestrates agents to build ops consoles, quality portals &amp; maintenance apps.</a:t>
-            </a:r>
-          </a:p>
-        </p:txBody>
-      </p:sp>
-      <p:sp>
-        <p:nvSpPr>
-          <p:cNvPr id="26" name="TextBox 25"/>
-          <p:cNvSpPr txBox="1"/>
-          <p:nvPr/>
-        </p:nvSpPr>
-        <p:spPr>
-          <a:xfrm>
-            <a:off x="9015984" y="3291840"/>
-            <a:ext cx="320040" cy="457200"/>
-          </a:xfrm>
-          <a:prstGeom prst="rect">
-            <a:avLst/>
-          </a:prstGeom>
-          <a:noFill/>
-        </p:spPr>
-        <p:txBody>
-          <a:bodyPr wrap="square" anchor="t" lIns="0" rIns="0" tIns="0" bIns="0">
-            <a:spAutoFit/>
-          </a:bodyPr>
-          <a:lstStyle/>
-          <a:p>
-            <a:pPr algn="ctr">
-              <a:lnSpc>
-                <a:spcPct val="100000"/>
-              </a:lnSpc>
-              <a:spcBef>
-                <a:spcPts val="0"/>
-              </a:spcBef>
-              <a:spcAft>
-                <a:spcPts val="600"/>
-              </a:spcAft>
-            </a:pPr>
-            <a:r>
-              <a:rPr sz="2200" b="1" i="0">
-                <a:solidFill>
-                  <a:srgbClr val="8A98B0"/>
-                </a:solidFill>
-                <a:latin typeface="Segoe UI"/>
-              </a:rPr>
-              <a:t>→</a:t>
-            </a:r>
-          </a:p>
-        </p:txBody>
-      </p:sp>
-      <p:sp>
-        <p:nvSpPr>
-          <p:cNvPr id="27" name="Rounded Rectangle 26"/>
-          <p:cNvSpPr/>
-          <p:nvPr/>
-        </p:nvSpPr>
-        <p:spPr>
-          <a:xfrm>
-            <a:off x="9226296" y="2148840"/>
-            <a:ext cx="2697480" cy="2743200"/>
-          </a:xfrm>
-          <a:prstGeom prst="roundRect">
-            <a:avLst/>
-          </a:prstGeom>
-          <a:solidFill>
-            <a:srgbClr val="122A4D"/>
-          </a:solidFill>
-          <a:ln>
-            <a:noFill/>
-          </a:ln>
-          <a:effectLst/>
-        </p:spPr>
-        <p:style>
-          <a:lnRef idx="1">
-            <a:schemeClr val="accent1"/>
-          </a:lnRef>
-          <a:fillRef idx="3">
-            <a:schemeClr val="accent1"/>
-          </a:fillRef>
-          <a:effectRef idx="2">
-            <a:schemeClr val="accent1"/>
-          </a:effectRef>
-          <a:fontRef idx="minor">
-            <a:schemeClr val="lt1"/>
-          </a:fontRef>
-        </p:style>
-        <p:txBody>
-          <a:bodyPr rtlCol="0" anchor="ctr"/>
-          <a:lstStyle/>
-          <a:p>
-            <a:pPr algn="ctr"/>
+            <a:endParaRPr/>
           </a:p>
         </p:txBody>
       </p:sp>
@@ -12933,6 +12768,7 @@
           <a:lstStyle/>
           <a:p>
             <a:pPr algn="ctr"/>
+            <a:endParaRPr/>
           </a:p>
         </p:txBody>
       </p:sp>
@@ -12977,6 +12813,7 @@
           <a:lstStyle/>
           <a:p>
             <a:pPr algn="ctr"/>
+            <a:endParaRPr/>
           </a:p>
         </p:txBody>
       </p:sp>
@@ -12997,7 +12834,7 @@
           <a:noFill/>
         </p:spPr>
         <p:txBody>
-          <a:bodyPr wrap="square" anchor="ctr" lIns="0" rIns="0" tIns="0" bIns="0">
+          <a:bodyPr wrap="square" lIns="0" tIns="0" rIns="0" bIns="0" anchor="ctr">
             <a:spAutoFit/>
           </a:bodyPr>
           <a:lstStyle/>
@@ -13042,7 +12879,7 @@
           <a:noFill/>
         </p:spPr>
         <p:txBody>
-          <a:bodyPr wrap="square" anchor="t" lIns="0" rIns="0" tIns="0" bIns="0">
+          <a:bodyPr wrap="square" lIns="0" tIns="0" rIns="0" bIns="0" anchor="t">
             <a:spAutoFit/>
           </a:bodyPr>
           <a:lstStyle/>
@@ -13087,7 +12924,7 @@
           <a:noFill/>
         </p:spPr>
         <p:txBody>
-          <a:bodyPr wrap="square" anchor="t" lIns="0" rIns="0" tIns="0" bIns="0">
+          <a:bodyPr wrap="square" lIns="0" tIns="0" rIns="0" bIns="0" anchor="t">
             <a:spAutoFit/>
           </a:bodyPr>
           <a:lstStyle/>
@@ -13156,6 +12993,7 @@
           <a:lstStyle/>
           <a:p>
             <a:pPr algn="ctr"/>
+            <a:endParaRPr/>
           </a:p>
         </p:txBody>
       </p:sp>
@@ -13176,7 +13014,7 @@
           <a:noFill/>
         </p:spPr>
         <p:txBody>
-          <a:bodyPr wrap="square" anchor="ctr" lIns="0" rIns="0" tIns="0" bIns="0">
+          <a:bodyPr wrap="square" lIns="0" tIns="0" rIns="0" bIns="0" anchor="ctr">
             <a:spAutoFit/>
           </a:bodyPr>
           <a:lstStyle/>
@@ -13230,7 +13068,7 @@
           <a:noFill/>
         </p:spPr>
         <p:txBody>
-          <a:bodyPr wrap="square" anchor="t" lIns="0" rIns="0" tIns="0" bIns="0">
+          <a:bodyPr wrap="square" lIns="0" tIns="0" rIns="0" bIns="0" anchor="t">
             <a:spAutoFit/>
           </a:bodyPr>
           <a:lstStyle/>
@@ -13275,7 +13113,7 @@
           <a:noFill/>
         </p:spPr>
         <p:txBody>
-          <a:bodyPr wrap="square" anchor="t" lIns="0" rIns="0" tIns="0" bIns="0">
+          <a:bodyPr wrap="square" lIns="0" tIns="0" rIns="0" bIns="0" anchor="t">
             <a:spAutoFit/>
           </a:bodyPr>
           <a:lstStyle/>
@@ -13312,7 +13150,7 @@
 </file>
 
 <file path=ppt/slides/slide9.xml><?xml version="1.0" encoding="utf-8"?>
-<p:sld xmlns:a="http://schemas.openxmlformats.org/drawingml/2006/main" xmlns:p="http://schemas.openxmlformats.org/presentationml/2006/main" xmlns:r="http://schemas.openxmlformats.org/officeDocument/2006/relationships">
+<p:sld xmlns:a="http://schemas.openxmlformats.org/drawingml/2006/main" xmlns:r="http://schemas.openxmlformats.org/officeDocument/2006/relationships" xmlns:p="http://schemas.openxmlformats.org/presentationml/2006/main">
   <p:cSld>
     <p:bg>
       <p:bgPr>
@@ -13328,7 +13166,14 @@
         <p:cNvGrpSpPr/>
         <p:nvPr/>
       </p:nvGrpSpPr>
-      <p:grpSpPr/>
+      <p:grpSpPr>
+        <a:xfrm>
+          <a:off x="0" y="0"/>
+          <a:ext cx="0" cy="0"/>
+          <a:chOff x="0" y="0"/>
+          <a:chExt cx="0" cy="0"/>
+        </a:xfrm>
+      </p:grpSpPr>
       <p:sp>
         <p:nvSpPr>
           <p:cNvPr id="2" name="Rectangle 1"/>
@@ -13370,6 +13215,7 @@
           <a:lstStyle/>
           <a:p>
             <a:pPr algn="ctr"/>
+            <a:endParaRPr/>
           </a:p>
         </p:txBody>
       </p:sp>
@@ -13390,7 +13236,7 @@
           <a:noFill/>
         </p:spPr>
         <p:txBody>
-          <a:bodyPr wrap="square" anchor="t" lIns="0" rIns="0" tIns="0" bIns="0">
+          <a:bodyPr wrap="square" lIns="0" tIns="0" rIns="0" bIns="0" anchor="t">
             <a:spAutoFit/>
           </a:bodyPr>
           <a:lstStyle/>
@@ -13435,7 +13281,7 @@
           <a:noFill/>
         </p:spPr>
         <p:txBody>
-          <a:bodyPr wrap="square" anchor="t" lIns="0" rIns="0" tIns="0" bIns="0">
+          <a:bodyPr wrap="square" lIns="0" tIns="0" rIns="0" bIns="0" anchor="t">
             <a:spAutoFit/>
           </a:bodyPr>
           <a:lstStyle/>
@@ -13504,6 +13350,7 @@
           <a:lstStyle/>
           <a:p>
             <a:pPr algn="ctr"/>
+            <a:endParaRPr/>
           </a:p>
         </p:txBody>
       </p:sp>
@@ -13548,6 +13395,7 @@
           <a:lstStyle/>
           <a:p>
             <a:pPr algn="ctr"/>
+            <a:endParaRPr/>
           </a:p>
         </p:txBody>
       </p:sp>
@@ -13592,6 +13440,7 @@
           <a:lstStyle/>
           <a:p>
             <a:pPr algn="ctr"/>
+            <a:endParaRPr/>
           </a:p>
         </p:txBody>
       </p:sp>
@@ -13612,7 +13461,7 @@
           <a:noFill/>
         </p:spPr>
         <p:txBody>
-          <a:bodyPr wrap="square" anchor="t" lIns="0" rIns="0" tIns="0" bIns="0">
+          <a:bodyPr wrap="square" lIns="0" tIns="0" rIns="0" bIns="0" anchor="t">
             <a:spAutoFit/>
           </a:bodyPr>
           <a:lstStyle/>
@@ -13657,7 +13506,7 @@
           <a:noFill/>
         </p:spPr>
         <p:txBody>
-          <a:bodyPr wrap="square" anchor="t" lIns="0" rIns="0" tIns="0" bIns="0">
+          <a:bodyPr wrap="square" lIns="0" tIns="0" rIns="0" bIns="0" anchor="t">
             <a:spAutoFit/>
           </a:bodyPr>
           <a:lstStyle/>
@@ -13702,7 +13551,7 @@
           <a:noFill/>
         </p:spPr>
         <p:txBody>
-          <a:bodyPr wrap="square" anchor="t" lIns="0" rIns="0" tIns="0" bIns="0">
+          <a:bodyPr wrap="square" lIns="0" tIns="0" rIns="0" bIns="0" anchor="t">
             <a:spAutoFit/>
           </a:bodyPr>
           <a:lstStyle/>
@@ -13747,7 +13596,7 @@
           <a:noFill/>
         </p:spPr>
         <p:txBody>
-          <a:bodyPr wrap="square" anchor="t" lIns="0" rIns="0" tIns="0" bIns="0">
+          <a:bodyPr wrap="square" lIns="0" tIns="0" rIns="0" bIns="0" anchor="t">
             <a:spAutoFit/>
           </a:bodyPr>
           <a:lstStyle/>
@@ -13792,7 +13641,7 @@
           <a:noFill/>
         </p:spPr>
         <p:txBody>
-          <a:bodyPr wrap="square" anchor="t" lIns="0" rIns="0" tIns="0" bIns="0">
+          <a:bodyPr wrap="square" lIns="0" tIns="0" rIns="0" bIns="0" anchor="t">
             <a:spAutoFit/>
           </a:bodyPr>
           <a:lstStyle/>
@@ -13861,6 +13710,7 @@
           <a:lstStyle/>
           <a:p>
             <a:pPr algn="ctr"/>
+            <a:endParaRPr/>
           </a:p>
         </p:txBody>
       </p:sp>
@@ -13905,6 +13755,7 @@
           <a:lstStyle/>
           <a:p>
             <a:pPr algn="ctr"/>
+            <a:endParaRPr/>
           </a:p>
         </p:txBody>
       </p:sp>
@@ -13925,7 +13776,7 @@
           <a:noFill/>
         </p:spPr>
         <p:txBody>
-          <a:bodyPr wrap="square" anchor="t" lIns="0" rIns="0" tIns="0" bIns="0">
+          <a:bodyPr wrap="square" lIns="0" tIns="0" rIns="0" bIns="0" anchor="t">
             <a:spAutoFit/>
           </a:bodyPr>
           <a:lstStyle/>
@@ -13970,7 +13821,7 @@
           <a:noFill/>
         </p:spPr>
         <p:txBody>
-          <a:bodyPr wrap="square" anchor="t" lIns="0" rIns="0" tIns="0" bIns="0">
+          <a:bodyPr wrap="square" lIns="0" tIns="0" rIns="0" bIns="0" anchor="t">
             <a:spAutoFit/>
           </a:bodyPr>
           <a:lstStyle/>
@@ -14015,7 +13866,7 @@
           <a:noFill/>
         </p:spPr>
         <p:txBody>
-          <a:bodyPr wrap="square" anchor="t" lIns="0" rIns="0" tIns="0" bIns="0">
+          <a:bodyPr wrap="square" lIns="0" tIns="0" rIns="0" bIns="0" anchor="t">
             <a:spAutoFit/>
           </a:bodyPr>
           <a:lstStyle/>
@@ -14060,7 +13911,7 @@
           <a:noFill/>
         </p:spPr>
         <p:txBody>
-          <a:bodyPr wrap="square" anchor="t" lIns="0" rIns="0" tIns="0" bIns="0">
+          <a:bodyPr wrap="square" lIns="0" tIns="0" rIns="0" bIns="0" anchor="t">
             <a:spAutoFit/>
           </a:bodyPr>
           <a:lstStyle/>
@@ -14105,7 +13956,7 @@
           <a:noFill/>
         </p:spPr>
         <p:txBody>
-          <a:bodyPr wrap="square" anchor="t" lIns="0" rIns="0" tIns="0" bIns="0">
+          <a:bodyPr wrap="square" lIns="0" tIns="0" rIns="0" bIns="0" anchor="t">
             <a:spAutoFit/>
           </a:bodyPr>
           <a:lstStyle/>
@@ -14174,6 +14025,7 @@
           <a:lstStyle/>
           <a:p>
             <a:pPr algn="ctr"/>
+            <a:endParaRPr/>
           </a:p>
         </p:txBody>
       </p:sp>
@@ -14218,6 +14070,7 @@
           <a:lstStyle/>
           <a:p>
             <a:pPr algn="ctr"/>
+            <a:endParaRPr/>
           </a:p>
         </p:txBody>
       </p:sp>
@@ -14238,7 +14091,7 @@
           <a:noFill/>
         </p:spPr>
         <p:txBody>
-          <a:bodyPr wrap="square" anchor="t" lIns="0" rIns="0" tIns="0" bIns="0">
+          <a:bodyPr wrap="square" lIns="0" tIns="0" rIns="0" bIns="0" anchor="t">
             <a:spAutoFit/>
           </a:bodyPr>
           <a:lstStyle/>
@@ -14283,7 +14136,7 @@
           <a:noFill/>
         </p:spPr>
         <p:txBody>
-          <a:bodyPr wrap="square" anchor="t" lIns="0" rIns="0" tIns="0" bIns="0">
+          <a:bodyPr wrap="square" lIns="0" tIns="0" rIns="0" bIns="0" anchor="t">
             <a:spAutoFit/>
           </a:bodyPr>
           <a:lstStyle/>
@@ -14328,7 +14181,7 @@
           <a:noFill/>
         </p:spPr>
         <p:txBody>
-          <a:bodyPr wrap="square" anchor="t" lIns="0" rIns="0" tIns="0" bIns="0">
+          <a:bodyPr wrap="square" lIns="0" tIns="0" rIns="0" bIns="0" anchor="t">
             <a:spAutoFit/>
           </a:bodyPr>
           <a:lstStyle/>
@@ -14373,7 +14226,7 @@
           <a:noFill/>
         </p:spPr>
         <p:txBody>
-          <a:bodyPr wrap="square" anchor="t" lIns="0" rIns="0" tIns="0" bIns="0">
+          <a:bodyPr wrap="square" lIns="0" tIns="0" rIns="0" bIns="0" anchor="t">
             <a:spAutoFit/>
           </a:bodyPr>
           <a:lstStyle/>
@@ -14418,7 +14271,7 @@
           <a:noFill/>
         </p:spPr>
         <p:txBody>
-          <a:bodyPr wrap="square" anchor="t" lIns="0" rIns="0" tIns="0" bIns="0">
+          <a:bodyPr wrap="square" lIns="0" tIns="0" rIns="0" bIns="0" anchor="t">
             <a:spAutoFit/>
           </a:bodyPr>
           <a:lstStyle/>
@@ -14463,7 +14316,7 @@
           <a:noFill/>
         </p:spPr>
         <p:txBody>
-          <a:bodyPr wrap="square" anchor="t" lIns="0" rIns="0" tIns="0" bIns="0">
+          <a:bodyPr wrap="square" lIns="0" tIns="0" rIns="0" bIns="0" anchor="t">
             <a:spAutoFit/>
           </a:bodyPr>
           <a:lstStyle/>
@@ -14508,7 +14361,7 @@
           <a:noFill/>
         </p:spPr>
         <p:txBody>
-          <a:bodyPr wrap="square" anchor="t" lIns="0" rIns="0" tIns="0" bIns="0">
+          <a:bodyPr wrap="square" lIns="0" tIns="0" rIns="0" bIns="0" anchor="t">
             <a:spAutoFit/>
           </a:bodyPr>
           <a:lstStyle/>
